--- a/Ekinox_Digital_Sales_Accelerator_Presentation.pptx
+++ b/Ekinox_Digital_Sales_Accelerator_Presentation.pptx
@@ -5,24 +5,22 @@
     <p:sldMasterId id="2147483648" r:id="rId1"/>
   </p:sldMasterIdLst>
   <p:sldIdLst>
-    <p:sldId id="256" r:id="rId7"/>
-    <p:sldId id="257" r:id="rId8"/>
-    <p:sldId id="258" r:id="rId9"/>
-    <p:sldId id="259" r:id="rId10"/>
-    <p:sldId id="260" r:id="rId11"/>
-    <p:sldId id="261" r:id="rId12"/>
-    <p:sldId id="262" r:id="rId13"/>
-    <p:sldId id="263" r:id="rId14"/>
-    <p:sldId id="264" r:id="rId15"/>
-    <p:sldId id="265" r:id="rId16"/>
-    <p:sldId id="266" r:id="rId17"/>
-    <p:sldId id="267" r:id="rId18"/>
-    <p:sldId id="268" r:id="rId19"/>
-    <p:sldId id="269" r:id="rId20"/>
-    <p:sldId id="270" r:id="rId21"/>
-    <p:sldId id="271" r:id="rId22"/>
+    <p:sldId id="257" r:id="rId2"/>
+    <p:sldId id="258" r:id="rId3"/>
+    <p:sldId id="259" r:id="rId4"/>
+    <p:sldId id="260" r:id="rId5"/>
+    <p:sldId id="261" r:id="rId6"/>
+    <p:sldId id="262" r:id="rId7"/>
+    <p:sldId id="263" r:id="rId8"/>
+    <p:sldId id="264" r:id="rId9"/>
+    <p:sldId id="265" r:id="rId10"/>
+    <p:sldId id="266" r:id="rId11"/>
+    <p:sldId id="267" r:id="rId12"/>
+    <p:sldId id="268" r:id="rId13"/>
+    <p:sldId id="269" r:id="rId14"/>
+    <p:sldId id="270" r:id="rId15"/>
   </p:sldIdLst>
-  <p:sldSz cx="12191695" cy="6858000" type="screen4x3"/>
+  <p:sldSz cx="12192000" cy="6858000"/>
   <p:notesSz cx="6858000" cy="9144000"/>
   <p:defaultTextStyle>
     <a:defPPr>
@@ -119,6 +117,22 @@
       </a:defRPr>
     </a:lvl9pPr>
   </p:defaultTextStyle>
+  <p:extLst>
+    <p:ext uri="{EFAFB233-063F-42B5-8137-9DF3F51BA10A}">
+      <p15:sldGuideLst xmlns:p15="http://schemas.microsoft.com/office/powerpoint/2012/main">
+        <p15:guide id="1" orient="horz" pos="2160">
+          <p15:clr>
+            <a:srgbClr val="A4A3A4"/>
+          </p15:clr>
+        </p15:guide>
+        <p15:guide id="2" pos="2880">
+          <p15:clr>
+            <a:srgbClr val="A4A3A4"/>
+          </p15:clr>
+        </p15:guide>
+      </p15:sldGuideLst>
+    </p:ext>
+  </p:extLst>
 </p:presentation>
 </file>
 
@@ -160,10 +174,9 @@
           <a:lstStyle/>
           <a:p>
             <a:r>
-              <a:rPr lang="en-US" smtClean="0"/>
+              <a:rPr lang="en-US"/>
               <a:t>Click to edit Master title style</a:t>
             </a:r>
-            <a:endParaRPr lang="en-US"/>
           </a:p>
         </p:txBody>
       </p:sp>
@@ -279,10 +292,9 @@
           </a:lstStyle>
           <a:p>
             <a:r>
-              <a:rPr lang="en-US" smtClean="0"/>
+              <a:rPr lang="en-US"/>
               <a:t>Click to edit Master subtitle style</a:t>
             </a:r>
-            <a:endParaRPr lang="en-US"/>
           </a:p>
         </p:txBody>
       </p:sp>
@@ -303,7 +315,7 @@
           <a:p>
             <a:fld id="{5BCAD085-E8A6-8845-BD4E-CB4CCA059FC4}" type="datetimeFigureOut">
               <a:rPr lang="en-US" smtClean="0"/>
-              <a:t>1/27/13</a:t>
+              <a:t>7/28/2026</a:t>
             </a:fld>
             <a:endParaRPr lang="en-US"/>
           </a:p>
@@ -397,10 +409,9 @@
           <a:lstStyle/>
           <a:p>
             <a:r>
-              <a:rPr lang="en-US" smtClean="0"/>
+              <a:rPr lang="en-US"/>
               <a:t>Click to edit Master title style</a:t>
             </a:r>
-            <a:endParaRPr lang="en-US"/>
           </a:p>
         </p:txBody>
       </p:sp>
@@ -421,38 +432,37 @@
           <a:p>
             <a:pPr lvl="0"/>
             <a:r>
-              <a:rPr lang="en-US" smtClean="0"/>
+              <a:rPr lang="en-US"/>
               <a:t>Click to edit Master text styles</a:t>
             </a:r>
           </a:p>
           <a:p>
             <a:pPr lvl="1"/>
             <a:r>
-              <a:rPr lang="en-US" smtClean="0"/>
+              <a:rPr lang="en-US"/>
               <a:t>Second level</a:t>
             </a:r>
           </a:p>
           <a:p>
             <a:pPr lvl="2"/>
             <a:r>
-              <a:rPr lang="en-US" smtClean="0"/>
+              <a:rPr lang="en-US"/>
               <a:t>Third level</a:t>
             </a:r>
           </a:p>
           <a:p>
             <a:pPr lvl="3"/>
             <a:r>
-              <a:rPr lang="en-US" smtClean="0"/>
+              <a:rPr lang="en-US"/>
               <a:t>Fourth level</a:t>
             </a:r>
           </a:p>
           <a:p>
             <a:pPr lvl="4"/>
             <a:r>
-              <a:rPr lang="en-US" smtClean="0"/>
+              <a:rPr lang="en-US"/>
               <a:t>Fifth level</a:t>
             </a:r>
-            <a:endParaRPr lang="en-US"/>
           </a:p>
         </p:txBody>
       </p:sp>
@@ -473,7 +483,7 @@
           <a:p>
             <a:fld id="{5BCAD085-E8A6-8845-BD4E-CB4CCA059FC4}" type="datetimeFigureOut">
               <a:rPr lang="en-US" smtClean="0"/>
-              <a:t>1/27/13</a:t>
+              <a:t>7/28/2026</a:t>
             </a:fld>
             <a:endParaRPr lang="en-US"/>
           </a:p>
@@ -572,10 +582,9 @@
           <a:lstStyle/>
           <a:p>
             <a:r>
-              <a:rPr lang="en-US" smtClean="0"/>
+              <a:rPr lang="en-US"/>
               <a:t>Click to edit Master title style</a:t>
             </a:r>
-            <a:endParaRPr lang="en-US"/>
           </a:p>
         </p:txBody>
       </p:sp>
@@ -601,38 +610,37 @@
           <a:p>
             <a:pPr lvl="0"/>
             <a:r>
-              <a:rPr lang="en-US" smtClean="0"/>
+              <a:rPr lang="en-US"/>
               <a:t>Click to edit Master text styles</a:t>
             </a:r>
           </a:p>
           <a:p>
             <a:pPr lvl="1"/>
             <a:r>
-              <a:rPr lang="en-US" smtClean="0"/>
+              <a:rPr lang="en-US"/>
               <a:t>Second level</a:t>
             </a:r>
           </a:p>
           <a:p>
             <a:pPr lvl="2"/>
             <a:r>
-              <a:rPr lang="en-US" smtClean="0"/>
+              <a:rPr lang="en-US"/>
               <a:t>Third level</a:t>
             </a:r>
           </a:p>
           <a:p>
             <a:pPr lvl="3"/>
             <a:r>
-              <a:rPr lang="en-US" smtClean="0"/>
+              <a:rPr lang="en-US"/>
               <a:t>Fourth level</a:t>
             </a:r>
           </a:p>
           <a:p>
             <a:pPr lvl="4"/>
             <a:r>
-              <a:rPr lang="en-US" smtClean="0"/>
+              <a:rPr lang="en-US"/>
               <a:t>Fifth level</a:t>
             </a:r>
-            <a:endParaRPr lang="en-US"/>
           </a:p>
         </p:txBody>
       </p:sp>
@@ -653,7 +661,7 @@
           <a:p>
             <a:fld id="{5BCAD085-E8A6-8845-BD4E-CB4CCA059FC4}" type="datetimeFigureOut">
               <a:rPr lang="en-US" smtClean="0"/>
-              <a:t>1/27/13</a:t>
+              <a:t>7/28/2026</a:t>
             </a:fld>
             <a:endParaRPr lang="en-US"/>
           </a:p>
@@ -747,10 +755,9 @@
           <a:lstStyle/>
           <a:p>
             <a:r>
-              <a:rPr lang="en-US" smtClean="0"/>
+              <a:rPr lang="en-US"/>
               <a:t>Click to edit Master title style</a:t>
             </a:r>
-            <a:endParaRPr lang="en-US"/>
           </a:p>
         </p:txBody>
       </p:sp>
@@ -771,38 +778,37 @@
           <a:p>
             <a:pPr lvl="0"/>
             <a:r>
-              <a:rPr lang="en-US" smtClean="0"/>
+              <a:rPr lang="en-US"/>
               <a:t>Click to edit Master text styles</a:t>
             </a:r>
           </a:p>
           <a:p>
             <a:pPr lvl="1"/>
             <a:r>
-              <a:rPr lang="en-US" smtClean="0"/>
+              <a:rPr lang="en-US"/>
               <a:t>Second level</a:t>
             </a:r>
           </a:p>
           <a:p>
             <a:pPr lvl="2"/>
             <a:r>
-              <a:rPr lang="en-US" smtClean="0"/>
+              <a:rPr lang="en-US"/>
               <a:t>Third level</a:t>
             </a:r>
           </a:p>
           <a:p>
             <a:pPr lvl="3"/>
             <a:r>
-              <a:rPr lang="en-US" smtClean="0"/>
+              <a:rPr lang="en-US"/>
               <a:t>Fourth level</a:t>
             </a:r>
           </a:p>
           <a:p>
             <a:pPr lvl="4"/>
             <a:r>
-              <a:rPr lang="en-US" smtClean="0"/>
+              <a:rPr lang="en-US"/>
               <a:t>Fifth level</a:t>
             </a:r>
-            <a:endParaRPr lang="en-US"/>
           </a:p>
         </p:txBody>
       </p:sp>
@@ -823,7 +829,7 @@
           <a:p>
             <a:fld id="{5BCAD085-E8A6-8845-BD4E-CB4CCA059FC4}" type="datetimeFigureOut">
               <a:rPr lang="en-US" smtClean="0"/>
-              <a:t>1/27/13</a:t>
+              <a:t>7/28/2026</a:t>
             </a:fld>
             <a:endParaRPr lang="en-US"/>
           </a:p>
@@ -926,10 +932,9 @@
           </a:lstStyle>
           <a:p>
             <a:r>
-              <a:rPr lang="en-US" smtClean="0"/>
+              <a:rPr lang="en-US"/>
               <a:t>Click to edit Master title style</a:t>
             </a:r>
-            <a:endParaRPr lang="en-US"/>
           </a:p>
         </p:txBody>
       </p:sp>
@@ -1046,7 +1051,7 @@
           <a:p>
             <a:pPr lvl="0"/>
             <a:r>
-              <a:rPr lang="en-US" smtClean="0"/>
+              <a:rPr lang="en-US"/>
               <a:t>Click to edit Master text styles</a:t>
             </a:r>
           </a:p>
@@ -1069,7 +1074,7 @@
           <a:p>
             <a:fld id="{5BCAD085-E8A6-8845-BD4E-CB4CCA059FC4}" type="datetimeFigureOut">
               <a:rPr lang="en-US" smtClean="0"/>
-              <a:t>1/27/13</a:t>
+              <a:t>7/28/2026</a:t>
             </a:fld>
             <a:endParaRPr lang="en-US"/>
           </a:p>
@@ -1163,10 +1168,9 @@
           <a:lstStyle/>
           <a:p>
             <a:r>
-              <a:rPr lang="en-US" smtClean="0"/>
+              <a:rPr lang="en-US"/>
               <a:t>Click to edit Master title style</a:t>
             </a:r>
-            <a:endParaRPr lang="en-US"/>
           </a:p>
         </p:txBody>
       </p:sp>
@@ -1220,38 +1224,37 @@
           <a:p>
             <a:pPr lvl="0"/>
             <a:r>
-              <a:rPr lang="en-US" smtClean="0"/>
+              <a:rPr lang="en-US"/>
               <a:t>Click to edit Master text styles</a:t>
             </a:r>
           </a:p>
           <a:p>
             <a:pPr lvl="1"/>
             <a:r>
-              <a:rPr lang="en-US" smtClean="0"/>
+              <a:rPr lang="en-US"/>
               <a:t>Second level</a:t>
             </a:r>
           </a:p>
           <a:p>
             <a:pPr lvl="2"/>
             <a:r>
-              <a:rPr lang="en-US" smtClean="0"/>
+              <a:rPr lang="en-US"/>
               <a:t>Third level</a:t>
             </a:r>
           </a:p>
           <a:p>
             <a:pPr lvl="3"/>
             <a:r>
-              <a:rPr lang="en-US" smtClean="0"/>
+              <a:rPr lang="en-US"/>
               <a:t>Fourth level</a:t>
             </a:r>
           </a:p>
           <a:p>
             <a:pPr lvl="4"/>
             <a:r>
-              <a:rPr lang="en-US" smtClean="0"/>
+              <a:rPr lang="en-US"/>
               <a:t>Fifth level</a:t>
             </a:r>
-            <a:endParaRPr lang="en-US"/>
           </a:p>
         </p:txBody>
       </p:sp>
@@ -1305,38 +1308,37 @@
           <a:p>
             <a:pPr lvl="0"/>
             <a:r>
-              <a:rPr lang="en-US" smtClean="0"/>
+              <a:rPr lang="en-US"/>
               <a:t>Click to edit Master text styles</a:t>
             </a:r>
           </a:p>
           <a:p>
             <a:pPr lvl="1"/>
             <a:r>
-              <a:rPr lang="en-US" smtClean="0"/>
+              <a:rPr lang="en-US"/>
               <a:t>Second level</a:t>
             </a:r>
           </a:p>
           <a:p>
             <a:pPr lvl="2"/>
             <a:r>
-              <a:rPr lang="en-US" smtClean="0"/>
+              <a:rPr lang="en-US"/>
               <a:t>Third level</a:t>
             </a:r>
           </a:p>
           <a:p>
             <a:pPr lvl="3"/>
             <a:r>
-              <a:rPr lang="en-US" smtClean="0"/>
+              <a:rPr lang="en-US"/>
               <a:t>Fourth level</a:t>
             </a:r>
           </a:p>
           <a:p>
             <a:pPr lvl="4"/>
             <a:r>
-              <a:rPr lang="en-US" smtClean="0"/>
+              <a:rPr lang="en-US"/>
               <a:t>Fifth level</a:t>
             </a:r>
-            <a:endParaRPr lang="en-US"/>
           </a:p>
         </p:txBody>
       </p:sp>
@@ -1357,7 +1359,7 @@
           <a:p>
             <a:fld id="{5BCAD085-E8A6-8845-BD4E-CB4CCA059FC4}" type="datetimeFigureOut">
               <a:rPr lang="en-US" smtClean="0"/>
-              <a:t>1/27/13</a:t>
+              <a:t>7/28/2026</a:t>
             </a:fld>
             <a:endParaRPr lang="en-US"/>
           </a:p>
@@ -1455,10 +1457,9 @@
           </a:lstStyle>
           <a:p>
             <a:r>
-              <a:rPr lang="en-US" smtClean="0"/>
+              <a:rPr lang="en-US"/>
               <a:t>Click to edit Master title style</a:t>
             </a:r>
-            <a:endParaRPr lang="en-US"/>
           </a:p>
         </p:txBody>
       </p:sp>
@@ -1521,7 +1522,7 @@
           <a:p>
             <a:pPr lvl="0"/>
             <a:r>
-              <a:rPr lang="en-US" smtClean="0"/>
+              <a:rPr lang="en-US"/>
               <a:t>Click to edit Master text styles</a:t>
             </a:r>
           </a:p>
@@ -1577,38 +1578,37 @@
           <a:p>
             <a:pPr lvl="0"/>
             <a:r>
-              <a:rPr lang="en-US" smtClean="0"/>
+              <a:rPr lang="en-US"/>
               <a:t>Click to edit Master text styles</a:t>
             </a:r>
           </a:p>
           <a:p>
             <a:pPr lvl="1"/>
             <a:r>
-              <a:rPr lang="en-US" smtClean="0"/>
+              <a:rPr lang="en-US"/>
               <a:t>Second level</a:t>
             </a:r>
           </a:p>
           <a:p>
             <a:pPr lvl="2"/>
             <a:r>
-              <a:rPr lang="en-US" smtClean="0"/>
+              <a:rPr lang="en-US"/>
               <a:t>Third level</a:t>
             </a:r>
           </a:p>
           <a:p>
             <a:pPr lvl="3"/>
             <a:r>
-              <a:rPr lang="en-US" smtClean="0"/>
+              <a:rPr lang="en-US"/>
               <a:t>Fourth level</a:t>
             </a:r>
           </a:p>
           <a:p>
             <a:pPr lvl="4"/>
             <a:r>
-              <a:rPr lang="en-US" smtClean="0"/>
+              <a:rPr lang="en-US"/>
               <a:t>Fifth level</a:t>
             </a:r>
-            <a:endParaRPr lang="en-US"/>
           </a:p>
         </p:txBody>
       </p:sp>
@@ -1671,7 +1671,7 @@
           <a:p>
             <a:pPr lvl="0"/>
             <a:r>
-              <a:rPr lang="en-US" smtClean="0"/>
+              <a:rPr lang="en-US"/>
               <a:t>Click to edit Master text styles</a:t>
             </a:r>
           </a:p>
@@ -1727,38 +1727,37 @@
           <a:p>
             <a:pPr lvl="0"/>
             <a:r>
-              <a:rPr lang="en-US" smtClean="0"/>
+              <a:rPr lang="en-US"/>
               <a:t>Click to edit Master text styles</a:t>
             </a:r>
           </a:p>
           <a:p>
             <a:pPr lvl="1"/>
             <a:r>
-              <a:rPr lang="en-US" smtClean="0"/>
+              <a:rPr lang="en-US"/>
               <a:t>Second level</a:t>
             </a:r>
           </a:p>
           <a:p>
             <a:pPr lvl="2"/>
             <a:r>
-              <a:rPr lang="en-US" smtClean="0"/>
+              <a:rPr lang="en-US"/>
               <a:t>Third level</a:t>
             </a:r>
           </a:p>
           <a:p>
             <a:pPr lvl="3"/>
             <a:r>
-              <a:rPr lang="en-US" smtClean="0"/>
+              <a:rPr lang="en-US"/>
               <a:t>Fourth level</a:t>
             </a:r>
           </a:p>
           <a:p>
             <a:pPr lvl="4"/>
             <a:r>
-              <a:rPr lang="en-US" smtClean="0"/>
+              <a:rPr lang="en-US"/>
               <a:t>Fifth level</a:t>
             </a:r>
-            <a:endParaRPr lang="en-US"/>
           </a:p>
         </p:txBody>
       </p:sp>
@@ -1779,7 +1778,7 @@
           <a:p>
             <a:fld id="{5BCAD085-E8A6-8845-BD4E-CB4CCA059FC4}" type="datetimeFigureOut">
               <a:rPr lang="en-US" smtClean="0"/>
-              <a:t>1/27/13</a:t>
+              <a:t>7/28/2026</a:t>
             </a:fld>
             <a:endParaRPr lang="en-US"/>
           </a:p>
@@ -1873,10 +1872,9 @@
           <a:lstStyle/>
           <a:p>
             <a:r>
-              <a:rPr lang="en-US" smtClean="0"/>
+              <a:rPr lang="en-US"/>
               <a:t>Click to edit Master title style</a:t>
             </a:r>
-            <a:endParaRPr lang="en-US"/>
           </a:p>
         </p:txBody>
       </p:sp>
@@ -1897,7 +1895,7 @@
           <a:p>
             <a:fld id="{5BCAD085-E8A6-8845-BD4E-CB4CCA059FC4}" type="datetimeFigureOut">
               <a:rPr lang="en-US" smtClean="0"/>
-              <a:t>1/27/13</a:t>
+              <a:t>7/28/2026</a:t>
             </a:fld>
             <a:endParaRPr lang="en-US"/>
           </a:p>
@@ -1992,7 +1990,7 @@
           <a:p>
             <a:fld id="{5BCAD085-E8A6-8845-BD4E-CB4CCA059FC4}" type="datetimeFigureOut">
               <a:rPr lang="en-US" smtClean="0"/>
-              <a:t>1/27/13</a:t>
+              <a:t>7/28/2026</a:t>
             </a:fld>
             <a:endParaRPr lang="en-US"/>
           </a:p>
@@ -2095,10 +2093,9 @@
           </a:lstStyle>
           <a:p>
             <a:r>
-              <a:rPr lang="en-US" smtClean="0"/>
+              <a:rPr lang="en-US"/>
               <a:t>Click to edit Master title style</a:t>
             </a:r>
-            <a:endParaRPr lang="en-US"/>
           </a:p>
         </p:txBody>
       </p:sp>
@@ -2152,38 +2149,37 @@
           <a:p>
             <a:pPr lvl="0"/>
             <a:r>
-              <a:rPr lang="en-US" smtClean="0"/>
+              <a:rPr lang="en-US"/>
               <a:t>Click to edit Master text styles</a:t>
             </a:r>
           </a:p>
           <a:p>
             <a:pPr lvl="1"/>
             <a:r>
-              <a:rPr lang="en-US" smtClean="0"/>
+              <a:rPr lang="en-US"/>
               <a:t>Second level</a:t>
             </a:r>
           </a:p>
           <a:p>
             <a:pPr lvl="2"/>
             <a:r>
-              <a:rPr lang="en-US" smtClean="0"/>
+              <a:rPr lang="en-US"/>
               <a:t>Third level</a:t>
             </a:r>
           </a:p>
           <a:p>
             <a:pPr lvl="3"/>
             <a:r>
-              <a:rPr lang="en-US" smtClean="0"/>
+              <a:rPr lang="en-US"/>
               <a:t>Fourth level</a:t>
             </a:r>
           </a:p>
           <a:p>
             <a:pPr lvl="4"/>
             <a:r>
-              <a:rPr lang="en-US" smtClean="0"/>
+              <a:rPr lang="en-US"/>
               <a:t>Fifth level</a:t>
             </a:r>
-            <a:endParaRPr lang="en-US"/>
           </a:p>
         </p:txBody>
       </p:sp>
@@ -2246,7 +2242,7 @@
           <a:p>
             <a:pPr lvl="0"/>
             <a:r>
-              <a:rPr lang="en-US" smtClean="0"/>
+              <a:rPr lang="en-US"/>
               <a:t>Click to edit Master text styles</a:t>
             </a:r>
           </a:p>
@@ -2269,7 +2265,7 @@
           <a:p>
             <a:fld id="{5BCAD085-E8A6-8845-BD4E-CB4CCA059FC4}" type="datetimeFigureOut">
               <a:rPr lang="en-US" smtClean="0"/>
-              <a:t>1/27/13</a:t>
+              <a:t>7/28/2026</a:t>
             </a:fld>
             <a:endParaRPr lang="en-US"/>
           </a:p>
@@ -2372,10 +2368,9 @@
           </a:lstStyle>
           <a:p>
             <a:r>
-              <a:rPr lang="en-US" smtClean="0"/>
+              <a:rPr lang="en-US"/>
               <a:t>Click to edit Master title style</a:t>
             </a:r>
-            <a:endParaRPr lang="en-US"/>
           </a:p>
         </p:txBody>
       </p:sp>
@@ -2499,7 +2494,7 @@
           <a:p>
             <a:pPr lvl="0"/>
             <a:r>
-              <a:rPr lang="en-US" smtClean="0"/>
+              <a:rPr lang="en-US"/>
               <a:t>Click to edit Master text styles</a:t>
             </a:r>
           </a:p>
@@ -2522,7 +2517,7 @@
           <a:p>
             <a:fld id="{5BCAD085-E8A6-8845-BD4E-CB4CCA059FC4}" type="datetimeFigureOut">
               <a:rPr lang="en-US" smtClean="0"/>
-              <a:t>1/27/13</a:t>
+              <a:t>7/28/2026</a:t>
             </a:fld>
             <a:endParaRPr lang="en-US"/>
           </a:p>
@@ -2631,10 +2626,9 @@
           <a:lstStyle/>
           <a:p>
             <a:r>
-              <a:rPr lang="en-US" smtClean="0"/>
+              <a:rPr lang="en-US"/>
               <a:t>Click to edit Master title style</a:t>
             </a:r>
-            <a:endParaRPr lang="en-US"/>
           </a:p>
         </p:txBody>
       </p:sp>
@@ -2665,38 +2659,37 @@
           <a:p>
             <a:pPr lvl="0"/>
             <a:r>
-              <a:rPr lang="en-US" smtClean="0"/>
+              <a:rPr lang="en-US"/>
               <a:t>Click to edit Master text styles</a:t>
             </a:r>
           </a:p>
           <a:p>
             <a:pPr lvl="1"/>
             <a:r>
-              <a:rPr lang="en-US" smtClean="0"/>
+              <a:rPr lang="en-US"/>
               <a:t>Second level</a:t>
             </a:r>
           </a:p>
           <a:p>
             <a:pPr lvl="2"/>
             <a:r>
-              <a:rPr lang="en-US" smtClean="0"/>
+              <a:rPr lang="en-US"/>
               <a:t>Third level</a:t>
             </a:r>
           </a:p>
           <a:p>
             <a:pPr lvl="3"/>
             <a:r>
-              <a:rPr lang="en-US" smtClean="0"/>
+              <a:rPr lang="en-US"/>
               <a:t>Fourth level</a:t>
             </a:r>
           </a:p>
           <a:p>
             <a:pPr lvl="4"/>
             <a:r>
-              <a:rPr lang="en-US" smtClean="0"/>
+              <a:rPr lang="en-US"/>
               <a:t>Fifth level</a:t>
             </a:r>
-            <a:endParaRPr lang="en-US"/>
           </a:p>
         </p:txBody>
       </p:sp>
@@ -2735,7 +2728,7 @@
           <a:p>
             <a:fld id="{5BCAD085-E8A6-8845-BD4E-CB4CCA059FC4}" type="datetimeFigureOut">
               <a:rPr lang="en-US" smtClean="0"/>
-              <a:t>1/27/13</a:t>
+              <a:t>7/28/2026</a:t>
             </a:fld>
             <a:endParaRPr lang="en-US"/>
           </a:p>
@@ -3094,7 +3087,7 @@
 </file>
 
 <file path=ppt/slides/slide1.xml><?xml version="1.0" encoding="utf-8"?>
-<p:sld xmlns:a="http://schemas.openxmlformats.org/drawingml/2006/main" xmlns:p="http://schemas.openxmlformats.org/presentationml/2006/main" xmlns:r="http://schemas.openxmlformats.org/officeDocument/2006/relationships">
+<p:sld xmlns:a="http://schemas.openxmlformats.org/drawingml/2006/main" xmlns:r="http://schemas.openxmlformats.org/officeDocument/2006/relationships" xmlns:p="http://schemas.openxmlformats.org/presentationml/2006/main">
   <p:cSld>
     <p:spTree>
       <p:nvGrpSpPr>
@@ -3102,7 +3095,14 @@
         <p:cNvGrpSpPr/>
         <p:nvPr/>
       </p:nvGrpSpPr>
-      <p:grpSpPr/>
+      <p:grpSpPr>
+        <a:xfrm>
+          <a:off x="0" y="0"/>
+          <a:ext cx="0" cy="0"/>
+          <a:chOff x="0" y="0"/>
+          <a:chExt cx="0" cy="0"/>
+        </a:xfrm>
+      </p:grpSpPr>
       <p:sp>
         <p:nvSpPr>
           <p:cNvPr id="2" name="Rectangle 1"/>
@@ -3118,7 +3118,7 @@
             <a:avLst/>
           </a:prstGeom>
           <a:solidFill>
-            <a:srgbClr val="86318E"/>
+            <a:srgbClr val="FFFFFF"/>
           </a:solidFill>
           <a:ln>
             <a:noFill/>
@@ -3143,6 +3143,7 @@
           <a:lstStyle/>
           <a:p>
             <a:pPr algn="ctr"/>
+            <a:endParaRPr/>
           </a:p>
         </p:txBody>
       </p:sp>
@@ -3154,8 +3155,8 @@
         </p:nvSpPr>
         <p:spPr>
           <a:xfrm>
-            <a:off x="914400" y="1828800"/>
-            <a:ext cx="10332720" cy="365760"/>
+            <a:off x="548640" y="365760"/>
+            <a:ext cx="10972800" cy="365760"/>
           </a:xfrm>
           <a:prstGeom prst="rect">
             <a:avLst/>
@@ -3163,13 +3164,13 @@
           <a:noFill/>
         </p:spPr>
         <p:txBody>
-          <a:bodyPr wrap="none">
+          <a:bodyPr wrap="square" lIns="0" tIns="0" rIns="0" bIns="0">
             <a:spAutoFit/>
           </a:bodyPr>
           <a:lstStyle/>
           <a:p>
             <a:pPr>
-              <a:defRPr sz="1100" b="1">
+              <a:defRPr sz="950" b="1">
                 <a:solidFill>
                   <a:srgbClr val="0D9488"/>
                 </a:solidFill>
@@ -3177,7 +3178,7 @@
               </a:defRPr>
             </a:pPr>
             <a:r>
-              <a:t>EKINOX INSURANCE PLATFORM</a:t>
+              <a:t>DIGITAL SALES ACCELERATOR</a:t>
             </a:r>
           </a:p>
         </p:txBody>
@@ -3190,8 +3191,8 @@
         </p:nvSpPr>
         <p:spPr>
           <a:xfrm>
-            <a:off x="914400" y="2194560"/>
-            <a:ext cx="10332720" cy="1645920"/>
+            <a:off x="548640" y="640080"/>
+            <a:ext cx="10972800" cy="640080"/>
           </a:xfrm>
           <a:prstGeom prst="rect">
             <a:avLst/>
@@ -3199,35 +3200,79 @@
           <a:noFill/>
         </p:spPr>
         <p:txBody>
-          <a:bodyPr wrap="square">
+          <a:bodyPr wrap="square" lIns="0" tIns="0" rIns="0" bIns="0">
             <a:spAutoFit/>
           </a:bodyPr>
           <a:lstStyle/>
           <a:p>
             <a:pPr>
-              <a:defRPr sz="4000" b="1">
-                <a:solidFill>
-                  <a:srgbClr val="FFFFFF"/>
+              <a:defRPr sz="2400" b="1">
+                <a:solidFill>
+                  <a:srgbClr val="86318E"/>
                 </a:solidFill>
                 <a:latin typeface="Arial"/>
               </a:defRPr>
             </a:pPr>
             <a:r>
-              <a:t>Digital Sales Accelerator</a:t>
-            </a:r>
-          </a:p>
-        </p:txBody>
-      </p:sp>
-      <p:sp>
-        <p:nvSpPr>
-          <p:cNvPr id="5" name="TextBox 4"/>
+              <a:t>1. Alignement Stratégique &amp; Positionnement</a:t>
+            </a:r>
+          </a:p>
+        </p:txBody>
+      </p:sp>
+      <p:sp>
+        <p:nvSpPr>
+          <p:cNvPr id="5" name="Rectangle 4"/>
+          <p:cNvSpPr/>
+          <p:nvPr/>
+        </p:nvSpPr>
+        <p:spPr>
+          <a:xfrm>
+            <a:off x="548640" y="1280160"/>
+            <a:ext cx="11094415" cy="18288"/>
+          </a:xfrm>
+          <a:prstGeom prst="rect">
+            <a:avLst/>
+          </a:prstGeom>
+          <a:solidFill>
+            <a:srgbClr val="E5E7EB"/>
+          </a:solidFill>
+          <a:ln>
+            <a:noFill/>
+          </a:ln>
+        </p:spPr>
+        <p:style>
+          <a:lnRef idx="1">
+            <a:schemeClr val="accent1"/>
+          </a:lnRef>
+          <a:fillRef idx="3">
+            <a:schemeClr val="accent1"/>
+          </a:fillRef>
+          <a:effectRef idx="2">
+            <a:schemeClr val="accent1"/>
+          </a:effectRef>
+          <a:fontRef idx="minor">
+            <a:schemeClr val="lt1"/>
+          </a:fontRef>
+        </p:style>
+        <p:txBody>
+          <a:bodyPr rtlCol="0" anchor="ctr"/>
+          <a:lstStyle/>
+          <a:p>
+            <a:pPr algn="ctr"/>
+            <a:endParaRPr/>
+          </a:p>
+        </p:txBody>
+      </p:sp>
+      <p:sp>
+        <p:nvSpPr>
+          <p:cNvPr id="6" name="TextBox 5"/>
           <p:cNvSpPr txBox="1"/>
           <p:nvPr/>
         </p:nvSpPr>
         <p:spPr>
           <a:xfrm>
-            <a:off x="914400" y="3840480"/>
-            <a:ext cx="10332720" cy="731520"/>
+            <a:off x="548640" y="6400800"/>
+            <a:ext cx="11094415" cy="274320"/>
           </a:xfrm>
           <a:prstGeom prst="rect">
             <a:avLst/>
@@ -3235,35 +3280,142 @@
           <a:noFill/>
         </p:spPr>
         <p:txBody>
-          <a:bodyPr wrap="square">
+          <a:bodyPr wrap="none" lIns="0" tIns="0" rIns="0" bIns="0">
             <a:spAutoFit/>
           </a:bodyPr>
           <a:lstStyle/>
           <a:p>
-            <a:pPr>
-              <a:defRPr sz="1600" i="1">
-                <a:solidFill>
-                  <a:srgbClr val="F9FAFB"/>
+            <a:pPr algn="r">
+              <a:defRPr sz="850">
+                <a:solidFill>
+                  <a:srgbClr val="6B7280"/>
                 </a:solidFill>
                 <a:latin typeface="Arial"/>
               </a:defRPr>
             </a:pPr>
             <a:r>
-              <a:t>Transformer l'acquisition commerciale de SanlamAllianz via une plateforme autonome</a:t>
-            </a:r>
-          </a:p>
-        </p:txBody>
-      </p:sp>
-      <p:sp>
-        <p:nvSpPr>
-          <p:cNvPr id="6" name="Rectangle 5"/>
+              <a:t>Ekinox Consulting  |  Proposition de Transformation  |  Confidentialité SanlamAllianz  |  Slide 2</a:t>
+            </a:r>
+          </a:p>
+        </p:txBody>
+      </p:sp>
+      <p:sp>
+        <p:nvSpPr>
+          <p:cNvPr id="7" name="TextBox 6"/>
+          <p:cNvSpPr txBox="1"/>
+          <p:nvPr/>
+        </p:nvSpPr>
+        <p:spPr>
+          <a:xfrm>
+            <a:off x="548640" y="1645920"/>
+            <a:ext cx="5303520" cy="4114800"/>
+          </a:xfrm>
+          <a:prstGeom prst="rect">
+            <a:avLst/>
+          </a:prstGeom>
+          <a:noFill/>
+        </p:spPr>
+        <p:txBody>
+          <a:bodyPr wrap="square" lIns="0" tIns="0" rIns="0" bIns="0">
+            <a:spAutoFit/>
+          </a:bodyPr>
+          <a:lstStyle/>
+          <a:p>
+            <a:pPr>
+              <a:lnSpc>
+                <a:spcPct val="120000"/>
+              </a:lnSpc>
+              <a:spcAft>
+                <a:spcPts val="1400"/>
+              </a:spcAft>
+              <a:defRPr sz="1300">
+                <a:solidFill>
+                  <a:srgbClr val="1F2937"/>
+                </a:solidFill>
+                <a:latin typeface="Arial"/>
+              </a:defRPr>
+            </a:pPr>
+            <a:r>
+              <a:t>SanlamAllianz doit faire évoluer sa capacité d'acquisition client.</a:t>
+            </a:r>
+          </a:p>
+          <a:p>
+            <a:pPr>
+              <a:lnSpc>
+                <a:spcPct val="120000"/>
+              </a:lnSpc>
+              <a:spcAft>
+                <a:spcPts val="1400"/>
+              </a:spcAft>
+              <a:defRPr sz="1300">
+                <a:solidFill>
+                  <a:srgbClr val="1F2937"/>
+                </a:solidFill>
+                <a:latin typeface="Arial"/>
+              </a:defRPr>
+            </a:pPr>
+            <a:r>
+              <a:t>Plutôt que d'intégrer des chatbots isolés ou d'engager d'importants budgets de refonte CRM, le Digital Sales Accelerator permet de déployer un parcours omnicanal performant, découplé du Core Insurance pour une activation immédiate.</a:t>
+            </a:r>
+          </a:p>
+        </p:txBody>
+      </p:sp>
+      <p:sp>
+        <p:nvSpPr>
+          <p:cNvPr id="8" name="Rectangle 7"/>
           <p:cNvSpPr/>
           <p:nvPr/>
         </p:nvSpPr>
         <p:spPr>
           <a:xfrm>
-            <a:off x="914400" y="4754880"/>
-            <a:ext cx="2743200" cy="54864"/>
+            <a:off x="6339535" y="1645920"/>
+            <a:ext cx="5303520" cy="1188720"/>
+          </a:xfrm>
+          <a:prstGeom prst="rect">
+            <a:avLst/>
+          </a:prstGeom>
+          <a:solidFill>
+            <a:srgbClr val="F9FAFB"/>
+          </a:solidFill>
+          <a:ln>
+            <a:solidFill>
+              <a:srgbClr val="E5E7EB"/>
+            </a:solidFill>
+          </a:ln>
+        </p:spPr>
+        <p:style>
+          <a:lnRef idx="1">
+            <a:schemeClr val="accent1"/>
+          </a:lnRef>
+          <a:fillRef idx="3">
+            <a:schemeClr val="accent1"/>
+          </a:fillRef>
+          <a:effectRef idx="2">
+            <a:schemeClr val="accent1"/>
+          </a:effectRef>
+          <a:fontRef idx="minor">
+            <a:schemeClr val="lt1"/>
+          </a:fontRef>
+        </p:style>
+        <p:txBody>
+          <a:bodyPr rtlCol="0" anchor="ctr"/>
+          <a:lstStyle/>
+          <a:p>
+            <a:pPr algn="ctr"/>
+            <a:endParaRPr/>
+          </a:p>
+        </p:txBody>
+      </p:sp>
+      <p:sp>
+        <p:nvSpPr>
+          <p:cNvPr id="9" name="Rectangle 8"/>
+          <p:cNvSpPr/>
+          <p:nvPr/>
+        </p:nvSpPr>
+        <p:spPr>
+          <a:xfrm>
+            <a:off x="6339535" y="1645920"/>
+            <a:ext cx="64008" cy="1188720"/>
           </a:xfrm>
           <a:prstGeom prst="rect">
             <a:avLst/>
@@ -3294,19 +3446,20 @@
           <a:lstStyle/>
           <a:p>
             <a:pPr algn="ctr"/>
-          </a:p>
-        </p:txBody>
-      </p:sp>
-      <p:sp>
-        <p:nvSpPr>
-          <p:cNvPr id="7" name="TextBox 6"/>
+            <a:endParaRPr/>
+          </a:p>
+        </p:txBody>
+      </p:sp>
+      <p:sp>
+        <p:nvSpPr>
+          <p:cNvPr id="10" name="TextBox 9"/>
           <p:cNvSpPr txBox="1"/>
           <p:nvPr/>
         </p:nvSpPr>
         <p:spPr>
           <a:xfrm>
-            <a:off x="914400" y="5303520"/>
-            <a:ext cx="10332720" cy="914400"/>
+            <a:off x="6537960" y="1783080"/>
+            <a:ext cx="4937760" cy="914400"/>
           </a:xfrm>
           <a:prstGeom prst="rect">
             <a:avLst/>
@@ -3314,25 +3467,330 @@
           <a:noFill/>
         </p:spPr>
         <p:txBody>
-          <a:bodyPr wrap="none">
+          <a:bodyPr wrap="square">
             <a:spAutoFit/>
           </a:bodyPr>
           <a:lstStyle/>
           <a:p>
             <a:pPr>
-              <a:defRPr sz="1100">
-                <a:solidFill>
-                  <a:srgbClr val="F9FAFB"/>
+              <a:spcAft>
+                <a:spcPts val="400"/>
+              </a:spcAft>
+              <a:defRPr sz="1100" b="1">
+                <a:solidFill>
+                  <a:srgbClr val="86318E"/>
+                </a:solidFill>
+                <a:latin typeface="Arial"/>
+              </a:defRPr>
+            </a:pPr>
+            <a:r>
+              <a:t>PRODUCTIVITÉ COMMERCIALE</a:t>
+            </a:r>
+          </a:p>
+          <a:p>
+            <a:pPr>
+              <a:lnSpc>
+                <a:spcPct val="110000"/>
+              </a:lnSpc>
+              <a:defRPr sz="1000">
+                <a:solidFill>
+                  <a:srgbClr val="1F2937"/>
                 </a:solidFill>
                 <a:latin typeface="Calibri"/>
               </a:defRPr>
             </a:pPr>
             <a:r>
-              <a:t>Destinataire : COMEX SanlamAllianz Group</a:t>
-            </a:r>
-            <a:br/>
-            <a:r>
-              <a:t>Date : Juillet 2026  |  Statut : STRICTEMENT CONFIDENTIEL</a:t>
+              <a:t>Qualification automatique des dossiers prospects avant transmission aux conseillers.</a:t>
+            </a:r>
+          </a:p>
+        </p:txBody>
+      </p:sp>
+      <p:sp>
+        <p:nvSpPr>
+          <p:cNvPr id="11" name="Rectangle 10"/>
+          <p:cNvSpPr/>
+          <p:nvPr/>
+        </p:nvSpPr>
+        <p:spPr>
+          <a:xfrm>
+            <a:off x="6339535" y="3108960"/>
+            <a:ext cx="5303520" cy="1188720"/>
+          </a:xfrm>
+          <a:prstGeom prst="rect">
+            <a:avLst/>
+          </a:prstGeom>
+          <a:solidFill>
+            <a:srgbClr val="F9FAFB"/>
+          </a:solidFill>
+          <a:ln>
+            <a:solidFill>
+              <a:srgbClr val="E5E7EB"/>
+            </a:solidFill>
+          </a:ln>
+        </p:spPr>
+        <p:style>
+          <a:lnRef idx="1">
+            <a:schemeClr val="accent1"/>
+          </a:lnRef>
+          <a:fillRef idx="3">
+            <a:schemeClr val="accent1"/>
+          </a:fillRef>
+          <a:effectRef idx="2">
+            <a:schemeClr val="accent1"/>
+          </a:effectRef>
+          <a:fontRef idx="minor">
+            <a:schemeClr val="lt1"/>
+          </a:fontRef>
+        </p:style>
+        <p:txBody>
+          <a:bodyPr rtlCol="0" anchor="ctr"/>
+          <a:lstStyle/>
+          <a:p>
+            <a:pPr algn="ctr"/>
+            <a:endParaRPr/>
+          </a:p>
+        </p:txBody>
+      </p:sp>
+      <p:sp>
+        <p:nvSpPr>
+          <p:cNvPr id="12" name="Rectangle 11"/>
+          <p:cNvSpPr/>
+          <p:nvPr/>
+        </p:nvSpPr>
+        <p:spPr>
+          <a:xfrm>
+            <a:off x="6339535" y="3108960"/>
+            <a:ext cx="64008" cy="1188720"/>
+          </a:xfrm>
+          <a:prstGeom prst="rect">
+            <a:avLst/>
+          </a:prstGeom>
+          <a:solidFill>
+            <a:srgbClr val="0D9488"/>
+          </a:solidFill>
+          <a:ln>
+            <a:noFill/>
+          </a:ln>
+        </p:spPr>
+        <p:style>
+          <a:lnRef idx="1">
+            <a:schemeClr val="accent1"/>
+          </a:lnRef>
+          <a:fillRef idx="3">
+            <a:schemeClr val="accent1"/>
+          </a:fillRef>
+          <a:effectRef idx="2">
+            <a:schemeClr val="accent1"/>
+          </a:effectRef>
+          <a:fontRef idx="minor">
+            <a:schemeClr val="lt1"/>
+          </a:fontRef>
+        </p:style>
+        <p:txBody>
+          <a:bodyPr rtlCol="0" anchor="ctr"/>
+          <a:lstStyle/>
+          <a:p>
+            <a:pPr algn="ctr"/>
+            <a:endParaRPr/>
+          </a:p>
+        </p:txBody>
+      </p:sp>
+      <p:sp>
+        <p:nvSpPr>
+          <p:cNvPr id="13" name="TextBox 12"/>
+          <p:cNvSpPr txBox="1"/>
+          <p:nvPr/>
+        </p:nvSpPr>
+        <p:spPr>
+          <a:xfrm>
+            <a:off x="6537960" y="3246120"/>
+            <a:ext cx="4937760" cy="914400"/>
+          </a:xfrm>
+          <a:prstGeom prst="rect">
+            <a:avLst/>
+          </a:prstGeom>
+          <a:noFill/>
+        </p:spPr>
+        <p:txBody>
+          <a:bodyPr wrap="square">
+            <a:spAutoFit/>
+          </a:bodyPr>
+          <a:lstStyle/>
+          <a:p>
+            <a:pPr>
+              <a:spcAft>
+                <a:spcPts val="400"/>
+              </a:spcAft>
+              <a:defRPr sz="1100" b="1">
+                <a:solidFill>
+                  <a:srgbClr val="86318E"/>
+                </a:solidFill>
+                <a:latin typeface="Arial"/>
+              </a:defRPr>
+            </a:pPr>
+            <a:r>
+              <a:t>EXPÉRIENCE OMNICANALE</a:t>
+            </a:r>
+          </a:p>
+          <a:p>
+            <a:pPr>
+              <a:lnSpc>
+                <a:spcPct val="110000"/>
+              </a:lnSpc>
+              <a:defRPr sz="1000">
+                <a:solidFill>
+                  <a:srgbClr val="1F2937"/>
+                </a:solidFill>
+                <a:latin typeface="Calibri"/>
+              </a:defRPr>
+            </a:pPr>
+            <a:r>
+              <a:t>Convergence immédiate de tous les canaux (WhatsApp, Meta, Web, SMS) vers un seul flux d'onboarding.</a:t>
+            </a:r>
+          </a:p>
+        </p:txBody>
+      </p:sp>
+      <p:sp>
+        <p:nvSpPr>
+          <p:cNvPr id="14" name="Rectangle 13"/>
+          <p:cNvSpPr/>
+          <p:nvPr/>
+        </p:nvSpPr>
+        <p:spPr>
+          <a:xfrm>
+            <a:off x="6339535" y="4572000"/>
+            <a:ext cx="5303520" cy="1188720"/>
+          </a:xfrm>
+          <a:prstGeom prst="rect">
+            <a:avLst/>
+          </a:prstGeom>
+          <a:solidFill>
+            <a:srgbClr val="F9FAFB"/>
+          </a:solidFill>
+          <a:ln>
+            <a:solidFill>
+              <a:srgbClr val="E5E7EB"/>
+            </a:solidFill>
+          </a:ln>
+        </p:spPr>
+        <p:style>
+          <a:lnRef idx="1">
+            <a:schemeClr val="accent1"/>
+          </a:lnRef>
+          <a:fillRef idx="3">
+            <a:schemeClr val="accent1"/>
+          </a:fillRef>
+          <a:effectRef idx="2">
+            <a:schemeClr val="accent1"/>
+          </a:effectRef>
+          <a:fontRef idx="minor">
+            <a:schemeClr val="lt1"/>
+          </a:fontRef>
+        </p:style>
+        <p:txBody>
+          <a:bodyPr rtlCol="0" anchor="ctr"/>
+          <a:lstStyle/>
+          <a:p>
+            <a:pPr algn="ctr"/>
+            <a:endParaRPr/>
+          </a:p>
+        </p:txBody>
+      </p:sp>
+      <p:sp>
+        <p:nvSpPr>
+          <p:cNvPr id="15" name="Rectangle 14"/>
+          <p:cNvSpPr/>
+          <p:nvPr/>
+        </p:nvSpPr>
+        <p:spPr>
+          <a:xfrm>
+            <a:off x="6339535" y="4572000"/>
+            <a:ext cx="64008" cy="1188720"/>
+          </a:xfrm>
+          <a:prstGeom prst="rect">
+            <a:avLst/>
+          </a:prstGeom>
+          <a:solidFill>
+            <a:srgbClr val="0D9488"/>
+          </a:solidFill>
+          <a:ln>
+            <a:noFill/>
+          </a:ln>
+        </p:spPr>
+        <p:style>
+          <a:lnRef idx="1">
+            <a:schemeClr val="accent1"/>
+          </a:lnRef>
+          <a:fillRef idx="3">
+            <a:schemeClr val="accent1"/>
+          </a:fillRef>
+          <a:effectRef idx="2">
+            <a:schemeClr val="accent1"/>
+          </a:effectRef>
+          <a:fontRef idx="minor">
+            <a:schemeClr val="lt1"/>
+          </a:fontRef>
+        </p:style>
+        <p:txBody>
+          <a:bodyPr rtlCol="0" anchor="ctr"/>
+          <a:lstStyle/>
+          <a:p>
+            <a:pPr algn="ctr"/>
+            <a:endParaRPr/>
+          </a:p>
+        </p:txBody>
+      </p:sp>
+      <p:sp>
+        <p:nvSpPr>
+          <p:cNvPr id="16" name="TextBox 15"/>
+          <p:cNvSpPr txBox="1"/>
+          <p:nvPr/>
+        </p:nvSpPr>
+        <p:spPr>
+          <a:xfrm>
+            <a:off x="6537960" y="4709160"/>
+            <a:ext cx="4937760" cy="914400"/>
+          </a:xfrm>
+          <a:prstGeom prst="rect">
+            <a:avLst/>
+          </a:prstGeom>
+          <a:noFill/>
+        </p:spPr>
+        <p:txBody>
+          <a:bodyPr wrap="square">
+            <a:spAutoFit/>
+          </a:bodyPr>
+          <a:lstStyle/>
+          <a:p>
+            <a:pPr>
+              <a:spcAft>
+                <a:spcPts val="400"/>
+              </a:spcAft>
+              <a:defRPr sz="1100" b="1">
+                <a:solidFill>
+                  <a:srgbClr val="86318E"/>
+                </a:solidFill>
+                <a:latin typeface="Arial"/>
+              </a:defRPr>
+            </a:pPr>
+            <a:r>
+              <a:t>ROI &amp; CAC OPTIMISÉ</a:t>
+            </a:r>
+          </a:p>
+          <a:p>
+            <a:pPr>
+              <a:lnSpc>
+                <a:spcPct val="110000"/>
+              </a:lnSpc>
+              <a:defRPr sz="1000">
+                <a:solidFill>
+                  <a:srgbClr val="1F2937"/>
+                </a:solidFill>
+                <a:latin typeface="Calibri"/>
+              </a:defRPr>
+            </a:pPr>
+            <a:r>
+              <a:t>Réduction substantielle du CAC (Coût d'Acquisition Client) et hausse nette du taux de conversion.</a:t>
             </a:r>
           </a:p>
         </p:txBody>
@@ -3346,7 +3804,7 @@
 </file>
 
 <file path=ppt/slides/slide10.xml><?xml version="1.0" encoding="utf-8"?>
-<p:sld xmlns:a="http://schemas.openxmlformats.org/drawingml/2006/main" xmlns:p="http://schemas.openxmlformats.org/presentationml/2006/main" xmlns:r="http://schemas.openxmlformats.org/officeDocument/2006/relationships">
+<p:sld xmlns:a="http://schemas.openxmlformats.org/drawingml/2006/main" xmlns:r="http://schemas.openxmlformats.org/officeDocument/2006/relationships" xmlns:p="http://schemas.openxmlformats.org/presentationml/2006/main">
   <p:cSld>
     <p:spTree>
       <p:nvGrpSpPr>
@@ -3354,7 +3812,14 @@
         <p:cNvGrpSpPr/>
         <p:nvPr/>
       </p:nvGrpSpPr>
-      <p:grpSpPr/>
+      <p:grpSpPr>
+        <a:xfrm>
+          <a:off x="0" y="0"/>
+          <a:ext cx="0" cy="0"/>
+          <a:chOff x="0" y="0"/>
+          <a:chExt cx="0" cy="0"/>
+        </a:xfrm>
+      </p:grpSpPr>
       <p:sp>
         <p:nvSpPr>
           <p:cNvPr id="2" name="Rectangle 1"/>
@@ -3395,6 +3860,7 @@
           <a:lstStyle/>
           <a:p>
             <a:pPr algn="ctr"/>
+            <a:endParaRPr/>
           </a:p>
         </p:txBody>
       </p:sp>
@@ -3415,7 +3881,7 @@
           <a:noFill/>
         </p:spPr>
         <p:txBody>
-          <a:bodyPr wrap="square" lIns="0" tIns="0" bIns="0" rIns="0">
+          <a:bodyPr wrap="square" lIns="0" tIns="0" rIns="0" bIns="0">
             <a:spAutoFit/>
           </a:bodyPr>
           <a:lstStyle/>
@@ -3451,7 +3917,7 @@
           <a:noFill/>
         </p:spPr>
         <p:txBody>
-          <a:bodyPr wrap="square" lIns="0" tIns="0" bIns="0" rIns="0">
+          <a:bodyPr wrap="square" lIns="0" tIns="0" rIns="0" bIns="0">
             <a:spAutoFit/>
           </a:bodyPr>
           <a:lstStyle/>
@@ -3465,7 +3931,7 @@
               </a:defRPr>
             </a:pPr>
             <a:r>
-              <a:t>4.6 Capacité : Gestion documentaire (upload des pièces)</a:t>
+              <a:t>4.7 Capacité : Rendez-vous &amp; Handover vers un conseiller</a:t>
             </a:r>
           </a:p>
         </p:txBody>
@@ -3510,6 +3976,7 @@
           <a:lstStyle/>
           <a:p>
             <a:pPr algn="ctr"/>
+            <a:endParaRPr/>
           </a:p>
         </p:txBody>
       </p:sp>
@@ -3530,7 +3997,7 @@
           <a:noFill/>
         </p:spPr>
         <p:txBody>
-          <a:bodyPr wrap="none" lIns="0" tIns="0" bIns="0" rIns="0">
+          <a:bodyPr wrap="none" lIns="0" tIns="0" rIns="0" bIns="0">
             <a:spAutoFit/>
           </a:bodyPr>
           <a:lstStyle/>
@@ -3544,7 +4011,7 @@
               </a:defRPr>
             </a:pPr>
             <a:r>
-              <a:t>Ekinox Consulting  |  Proposition de Transformation  |  Confidentialité SanlamAllianz  |  Slide 10</a:t>
+              <a:t>Ekinox Consulting  |  Proposition de Transformation  |  Confidentialité SanlamAllianz  |  Slide 11</a:t>
             </a:r>
           </a:p>
         </p:txBody>
@@ -3591,6 +4058,7 @@
           <a:lstStyle/>
           <a:p>
             <a:pPr algn="ctr"/>
+            <a:endParaRPr/>
           </a:p>
         </p:txBody>
       </p:sp>
@@ -3634,6 +4102,7 @@
           <a:lstStyle/>
           <a:p>
             <a:pPr algn="ctr"/>
+            <a:endParaRPr/>
           </a:p>
         </p:txBody>
       </p:sp>
@@ -3694,7 +4163,7 @@
             </a:r>
             <a:br/>
             <a:r>
-              <a:t>La fin des allers-retours administratifs fastidieux.</a:t>
+              <a:t>Le meilleur des deux mondes : la vélocité du digital et l'empathie de l'humain.</a:t>
             </a:r>
           </a:p>
           <a:p>
@@ -3717,7 +4186,7 @@
             </a:r>
             <a:br/>
             <a:r>
-              <a:t>Permet au client de transmettre ses justificatifs directement dans le fil de la conversation.</a:t>
+              <a:t>Transfère intelligemment la conversation à un agent humain lorsque la situation l'exige ou pour finaliser la vente.</a:t>
             </a:r>
           </a:p>
           <a:p>
@@ -3740,7 +4209,7 @@
             </a:r>
             <a:br/>
             <a:r>
-              <a:t>Le client prend en photo sa carte grise et son permis de conduire avec son smartphone et l'envoie via WhatsApp.</a:t>
+              <a:t>Le client souhaite négocier le tarif ; l'assistant passe le relais à un conseiller qui reprend le contexte complet de la conversation.</a:t>
             </a:r>
           </a:p>
           <a:p>
@@ -3763,7 +4232,7 @@
             </a:r>
             <a:br/>
             <a:r>
-              <a:t>Un parcours 100% digitalisé, gain de temps considérable pour finaliser le contrat.</a:t>
+              <a:t>Aucune rupture dans l'expérience client, pas besoin de répéter ses informations.</a:t>
             </a:r>
           </a:p>
         </p:txBody>
@@ -3810,6 +4279,7 @@
           <a:lstStyle/>
           <a:p>
             <a:pPr algn="ctr"/>
+            <a:endParaRPr/>
           </a:p>
         </p:txBody>
       </p:sp>
@@ -3853,6 +4323,7 @@
           <a:lstStyle/>
           <a:p>
             <a:pPr algn="ctr"/>
+            <a:endParaRPr/>
           </a:p>
         </p:txBody>
       </p:sp>
@@ -3913,7 +4384,7 @@
             </a:r>
             <a:br/>
             <a:r>
-              <a:t>Liste des documents requis, règles de validation de format (PDF, JPG, PNG).</a:t>
+              <a:t>Disponibilité des agents, règles de routage (par produit, par canal).</a:t>
             </a:r>
           </a:p>
           <a:p>
@@ -3936,7 +4407,7 @@
             </a:r>
             <a:br/>
             <a:r>
-              <a:t>Service de stockage cloud sécurisé, analyseur de pièces jointes.</a:t>
+              <a:t>Système de routage de tickets, interface de supervision en temps réel.</a:t>
             </a:r>
           </a:p>
           <a:p>
@@ -3959,7 +4430,7 @@
             </a:r>
             <a:br/>
             <a:r>
-              <a:t>API d'upload de documents, API de webhook média.</a:t>
+              <a:t>API de prise de rendez-vous (calendrier), API de handover.</a:t>
             </a:r>
           </a:p>
           <a:p>
@@ -3982,7 +4453,7 @@
             </a:r>
             <a:br/>
             <a:r>
-              <a:t>Intégration du flux média des canaux sociaux, sécurisation du stockage transitoire, association des pièces au dossier prospect.</a:t>
+              <a:t>Développement de la logique d'escalade, intégration avec les outils de calendrier, préservation du contexte de session.</a:t>
             </a:r>
           </a:p>
         </p:txBody>
@@ -3996,7 +4467,7 @@
 </file>
 
 <file path=ppt/slides/slide11.xml><?xml version="1.0" encoding="utf-8"?>
-<p:sld xmlns:a="http://schemas.openxmlformats.org/drawingml/2006/main" xmlns:p="http://schemas.openxmlformats.org/presentationml/2006/main" xmlns:r="http://schemas.openxmlformats.org/officeDocument/2006/relationships">
+<p:sld xmlns:a="http://schemas.openxmlformats.org/drawingml/2006/main" xmlns:r="http://schemas.openxmlformats.org/officeDocument/2006/relationships" xmlns:p="http://schemas.openxmlformats.org/presentationml/2006/main">
   <p:cSld>
     <p:spTree>
       <p:nvGrpSpPr>
@@ -4004,7 +4475,14 @@
         <p:cNvGrpSpPr/>
         <p:nvPr/>
       </p:nvGrpSpPr>
-      <p:grpSpPr/>
+      <p:grpSpPr>
+        <a:xfrm>
+          <a:off x="0" y="0"/>
+          <a:ext cx="0" cy="0"/>
+          <a:chOff x="0" y="0"/>
+          <a:chExt cx="0" cy="0"/>
+        </a:xfrm>
+      </p:grpSpPr>
       <p:sp>
         <p:nvSpPr>
           <p:cNvPr id="2" name="Rectangle 1"/>
@@ -4045,6 +4523,7 @@
           <a:lstStyle/>
           <a:p>
             <a:pPr algn="ctr"/>
+            <a:endParaRPr/>
           </a:p>
         </p:txBody>
       </p:sp>
@@ -4065,7 +4544,7 @@
           <a:noFill/>
         </p:spPr>
         <p:txBody>
-          <a:bodyPr wrap="square" lIns="0" tIns="0" bIns="0" rIns="0">
+          <a:bodyPr wrap="square" lIns="0" tIns="0" rIns="0" bIns="0">
             <a:spAutoFit/>
           </a:bodyPr>
           <a:lstStyle/>
@@ -4101,7 +4580,7 @@
           <a:noFill/>
         </p:spPr>
         <p:txBody>
-          <a:bodyPr wrap="square" lIns="0" tIns="0" bIns="0" rIns="0">
+          <a:bodyPr wrap="square" lIns="0" tIns="0" rIns="0" bIns="0">
             <a:spAutoFit/>
           </a:bodyPr>
           <a:lstStyle/>
@@ -4115,7 +4594,7 @@
               </a:defRPr>
             </a:pPr>
             <a:r>
-              <a:t>4.7 Capacité : Rendez-vous &amp; Handover vers un conseiller</a:t>
+              <a:t>4.8 Capacité : Sales Workspace &amp; Base Prospects</a:t>
             </a:r>
           </a:p>
         </p:txBody>
@@ -4160,6 +4639,7 @@
           <a:lstStyle/>
           <a:p>
             <a:pPr algn="ctr"/>
+            <a:endParaRPr/>
           </a:p>
         </p:txBody>
       </p:sp>
@@ -4180,7 +4660,7 @@
           <a:noFill/>
         </p:spPr>
         <p:txBody>
-          <a:bodyPr wrap="none" lIns="0" tIns="0" bIns="0" rIns="0">
+          <a:bodyPr wrap="none" lIns="0" tIns="0" rIns="0" bIns="0">
             <a:spAutoFit/>
           </a:bodyPr>
           <a:lstStyle/>
@@ -4194,7 +4674,7 @@
               </a:defRPr>
             </a:pPr>
             <a:r>
-              <a:t>Ekinox Consulting  |  Proposition de Transformation  |  Confidentialité SanlamAllianz  |  Slide 11</a:t>
+              <a:t>Ekinox Consulting  |  Proposition de Transformation  |  Confidentialité SanlamAllianz  |  Slide 12</a:t>
             </a:r>
           </a:p>
         </p:txBody>
@@ -4241,6 +4721,7 @@
           <a:lstStyle/>
           <a:p>
             <a:pPr algn="ctr"/>
+            <a:endParaRPr/>
           </a:p>
         </p:txBody>
       </p:sp>
@@ -4284,6 +4765,7 @@
           <a:lstStyle/>
           <a:p>
             <a:pPr algn="ctr"/>
+            <a:endParaRPr/>
           </a:p>
         </p:txBody>
       </p:sp>
@@ -4344,7 +4826,7 @@
             </a:r>
             <a:br/>
             <a:r>
-              <a:t>Le meilleur des deux mondes : la vélocité du digital et l'empathie de l'humain.</a:t>
+              <a:t>Un pilotage commercial réinventé pour maximiser chaque opportunité.</a:t>
             </a:r>
           </a:p>
           <a:p>
@@ -4367,7 +4849,7 @@
             </a:r>
             <a:br/>
             <a:r>
-              <a:t>Transfère intelligemment la conversation à un agent humain lorsque la situation l'exige ou pour finaliser la vente.</a:t>
+              <a:t>Centralise la gestion des prospects et facilite les actions de relance pour les équipes de vente.</a:t>
             </a:r>
           </a:p>
           <a:p>
@@ -4390,7 +4872,7 @@
             </a:r>
             <a:br/>
             <a:r>
-              <a:t>Le client souhaite négocier le tarif ; l'assistant passe le relais à un conseiller qui reprend le contexte complet de la conversation.</a:t>
+              <a:t>L'agent commercial accède à une vue unifiée de ses prospects chauds avec des suggestions de relance personnalisées.</a:t>
             </a:r>
           </a:p>
           <a:p>
@@ -4413,7 +4895,7 @@
             </a:r>
             <a:br/>
             <a:r>
-              <a:t>Aucune rupture dans l'expérience client, pas besoin de répéter ses informations.</a:t>
+              <a:t>Une relation client suivie, personnalisée et proactive.</a:t>
             </a:r>
           </a:p>
         </p:txBody>
@@ -4460,6 +4942,7 @@
           <a:lstStyle/>
           <a:p>
             <a:pPr algn="ctr"/>
+            <a:endParaRPr/>
           </a:p>
         </p:txBody>
       </p:sp>
@@ -4503,6 +4986,7 @@
           <a:lstStyle/>
           <a:p>
             <a:pPr algn="ctr"/>
+            <a:endParaRPr/>
           </a:p>
         </p:txBody>
       </p:sp>
@@ -4563,7 +5047,7 @@
             </a:r>
             <a:br/>
             <a:r>
-              <a:t>Disponibilité des agents, règles de routage (par produit, par canal).</a:t>
+              <a:t>Données d'historique des prospects, statuts du pipeline (Nouveau, En cours, Gagné, Perdu).</a:t>
             </a:r>
           </a:p>
           <a:p>
@@ -4586,7 +5070,7 @@
             </a:r>
             <a:br/>
             <a:r>
-              <a:t>Système de routage de tickets, interface de supervision en temps réel.</a:t>
+              <a:t>Application web front-end légère (SPA), base de données relationnelle (CRM light).</a:t>
             </a:r>
           </a:p>
           <a:p>
@@ -4609,7 +5093,7 @@
             </a:r>
             <a:br/>
             <a:r>
-              <a:t>API de prise de rendez-vous (calendrier), API de handover.</a:t>
+              <a:t>API CRUD Prospects, API de tâches et relances.</a:t>
             </a:r>
           </a:p>
           <a:p>
@@ -4632,7 +5116,7 @@
             </a:r>
             <a:br/>
             <a:r>
-              <a:t>Développement de la logique d'escalade, intégration avec les outils de calendrier, préservation du contexte de session.</a:t>
+              <a:t>Modélisation de la base de données, développement des vues Kanban de pipeline, gestion des droits d'accès basiques.</a:t>
             </a:r>
           </a:p>
         </p:txBody>
@@ -4646,7 +5130,7 @@
 </file>
 
 <file path=ppt/slides/slide12.xml><?xml version="1.0" encoding="utf-8"?>
-<p:sld xmlns:a="http://schemas.openxmlformats.org/drawingml/2006/main" xmlns:p="http://schemas.openxmlformats.org/presentationml/2006/main" xmlns:r="http://schemas.openxmlformats.org/officeDocument/2006/relationships">
+<p:sld xmlns:a="http://schemas.openxmlformats.org/drawingml/2006/main" xmlns:r="http://schemas.openxmlformats.org/officeDocument/2006/relationships" xmlns:p="http://schemas.openxmlformats.org/presentationml/2006/main">
   <p:cSld>
     <p:spTree>
       <p:nvGrpSpPr>
@@ -4654,7 +5138,14 @@
         <p:cNvGrpSpPr/>
         <p:nvPr/>
       </p:nvGrpSpPr>
-      <p:grpSpPr/>
+      <p:grpSpPr>
+        <a:xfrm>
+          <a:off x="0" y="0"/>
+          <a:ext cx="0" cy="0"/>
+          <a:chOff x="0" y="0"/>
+          <a:chExt cx="0" cy="0"/>
+        </a:xfrm>
+      </p:grpSpPr>
       <p:sp>
         <p:nvSpPr>
           <p:cNvPr id="2" name="Rectangle 1"/>
@@ -4695,6 +5186,7 @@
           <a:lstStyle/>
           <a:p>
             <a:pPr algn="ctr"/>
+            <a:endParaRPr/>
           </a:p>
         </p:txBody>
       </p:sp>
@@ -4715,7 +5207,7 @@
           <a:noFill/>
         </p:spPr>
         <p:txBody>
-          <a:bodyPr wrap="square" lIns="0" tIns="0" bIns="0" rIns="0">
+          <a:bodyPr wrap="square" lIns="0" tIns="0" rIns="0" bIns="0">
             <a:spAutoFit/>
           </a:bodyPr>
           <a:lstStyle/>
@@ -4751,7 +5243,7 @@
           <a:noFill/>
         </p:spPr>
         <p:txBody>
-          <a:bodyPr wrap="square" lIns="0" tIns="0" bIns="0" rIns="0">
+          <a:bodyPr wrap="square" lIns="0" tIns="0" rIns="0" bIns="0">
             <a:spAutoFit/>
           </a:bodyPr>
           <a:lstStyle/>
@@ -4765,7 +5257,7 @@
               </a:defRPr>
             </a:pPr>
             <a:r>
-              <a:t>4.8 Capacité : Sales Workspace &amp; Base Prospects</a:t>
+              <a:t>5. Roadmap Produit &amp; Trajectoire de Maturité</a:t>
             </a:r>
           </a:p>
         </p:txBody>
@@ -4810,6 +5302,7 @@
           <a:lstStyle/>
           <a:p>
             <a:pPr algn="ctr"/>
+            <a:endParaRPr/>
           </a:p>
         </p:txBody>
       </p:sp>
@@ -4830,657 +5323,7 @@
           <a:noFill/>
         </p:spPr>
         <p:txBody>
-          <a:bodyPr wrap="none" lIns="0" tIns="0" bIns="0" rIns="0">
-            <a:spAutoFit/>
-          </a:bodyPr>
-          <a:lstStyle/>
-          <a:p>
-            <a:pPr algn="r">
-              <a:defRPr sz="850">
-                <a:solidFill>
-                  <a:srgbClr val="6B7280"/>
-                </a:solidFill>
-                <a:latin typeface="Arial"/>
-              </a:defRPr>
-            </a:pPr>
-            <a:r>
-              <a:t>Ekinox Consulting  |  Proposition de Transformation  |  Confidentialité SanlamAllianz  |  Slide 12</a:t>
-            </a:r>
-          </a:p>
-        </p:txBody>
-      </p:sp>
-      <p:sp>
-        <p:nvSpPr>
-          <p:cNvPr id="7" name="Rectangle 6"/>
-          <p:cNvSpPr/>
-          <p:nvPr/>
-        </p:nvSpPr>
-        <p:spPr>
-          <a:xfrm>
-            <a:off x="548640" y="1645920"/>
-            <a:ext cx="5303520" cy="4389120"/>
-          </a:xfrm>
-          <a:prstGeom prst="rect">
-            <a:avLst/>
-          </a:prstGeom>
-          <a:solidFill>
-            <a:srgbClr val="F9FAFB"/>
-          </a:solidFill>
-          <a:ln>
-            <a:solidFill>
-              <a:srgbClr val="E5E7EB"/>
-            </a:solidFill>
-          </a:ln>
-        </p:spPr>
-        <p:style>
-          <a:lnRef idx="1">
-            <a:schemeClr val="accent1"/>
-          </a:lnRef>
-          <a:fillRef idx="3">
-            <a:schemeClr val="accent1"/>
-          </a:fillRef>
-          <a:effectRef idx="2">
-            <a:schemeClr val="accent1"/>
-          </a:effectRef>
-          <a:fontRef idx="minor">
-            <a:schemeClr val="lt1"/>
-          </a:fontRef>
-        </p:style>
-        <p:txBody>
-          <a:bodyPr rtlCol="0" anchor="ctr"/>
-          <a:lstStyle/>
-          <a:p>
-            <a:pPr algn="ctr"/>
-          </a:p>
-        </p:txBody>
-      </p:sp>
-      <p:sp>
-        <p:nvSpPr>
-          <p:cNvPr id="8" name="Rectangle 7"/>
-          <p:cNvSpPr/>
-          <p:nvPr/>
-        </p:nvSpPr>
-        <p:spPr>
-          <a:xfrm>
-            <a:off x="548640" y="1645920"/>
-            <a:ext cx="73152" cy="4389120"/>
-          </a:xfrm>
-          <a:prstGeom prst="rect">
-            <a:avLst/>
-          </a:prstGeom>
-          <a:solidFill>
-            <a:srgbClr val="86318E"/>
-          </a:solidFill>
-          <a:ln>
-            <a:noFill/>
-          </a:ln>
-        </p:spPr>
-        <p:style>
-          <a:lnRef idx="1">
-            <a:schemeClr val="accent1"/>
-          </a:lnRef>
-          <a:fillRef idx="3">
-            <a:schemeClr val="accent1"/>
-          </a:fillRef>
-          <a:effectRef idx="2">
-            <a:schemeClr val="accent1"/>
-          </a:effectRef>
-          <a:fontRef idx="minor">
-            <a:schemeClr val="lt1"/>
-          </a:fontRef>
-        </p:style>
-        <p:txBody>
-          <a:bodyPr rtlCol="0" anchor="ctr"/>
-          <a:lstStyle/>
-          <a:p>
-            <a:pPr algn="ctr"/>
-          </a:p>
-        </p:txBody>
-      </p:sp>
-      <p:sp>
-        <p:nvSpPr>
-          <p:cNvPr id="9" name="TextBox 8"/>
-          <p:cNvSpPr txBox="1"/>
-          <p:nvPr/>
-        </p:nvSpPr>
-        <p:spPr>
-          <a:xfrm>
-            <a:off x="731520" y="1828800"/>
-            <a:ext cx="4937760" cy="4023360"/>
-          </a:xfrm>
-          <a:prstGeom prst="rect">
-            <a:avLst/>
-          </a:prstGeom>
-          <a:noFill/>
-        </p:spPr>
-        <p:txBody>
-          <a:bodyPr wrap="square">
-            <a:spAutoFit/>
-          </a:bodyPr>
-          <a:lstStyle/>
-          <a:p>
-            <a:pPr>
-              <a:spcAft>
-                <a:spcPts val="1400"/>
-              </a:spcAft>
-              <a:defRPr sz="1400" b="1">
-                <a:solidFill>
-                  <a:srgbClr val="86318E"/>
-                </a:solidFill>
-                <a:latin typeface="Arial"/>
-              </a:defRPr>
-            </a:pPr>
-            <a:r>
-              <a:t>CADRAGE CLIENT &amp; VALEUR MÉTIER</a:t>
-            </a:r>
-          </a:p>
-          <a:p>
-            <a:pPr>
-              <a:lnSpc>
-                <a:spcPct val="115000"/>
-              </a:lnSpc>
-              <a:spcAft>
-                <a:spcPts val="800"/>
-              </a:spcAft>
-              <a:defRPr sz="1100">
-                <a:solidFill>
-                  <a:srgbClr val="1F2937"/>
-                </a:solidFill>
-                <a:latin typeface="Calibri"/>
-              </a:defRPr>
-            </a:pPr>
-            <a:r>
-              <a:t>Vision &amp; Objectif :</a:t>
-            </a:r>
-            <a:br/>
-            <a:r>
-              <a:t>Un pilotage commercial réinventé pour maximiser chaque opportunité.</a:t>
-            </a:r>
-          </a:p>
-          <a:p>
-            <a:pPr>
-              <a:lnSpc>
-                <a:spcPct val="115000"/>
-              </a:lnSpc>
-              <a:spcAft>
-                <a:spcPts val="800"/>
-              </a:spcAft>
-              <a:defRPr sz="1100">
-                <a:solidFill>
-                  <a:srgbClr val="1F2937"/>
-                </a:solidFill>
-                <a:latin typeface="Calibri"/>
-              </a:defRPr>
-            </a:pPr>
-            <a:r>
-              <a:t>Valeur Métier :</a:t>
-            </a:r>
-            <a:br/>
-            <a:r>
-              <a:t>Centralise la gestion des prospects et facilite les actions de relance pour les équipes de vente.</a:t>
-            </a:r>
-          </a:p>
-          <a:p>
-            <a:pPr>
-              <a:lnSpc>
-                <a:spcPct val="115000"/>
-              </a:lnSpc>
-              <a:spcAft>
-                <a:spcPts val="800"/>
-              </a:spcAft>
-              <a:defRPr sz="1100">
-                <a:solidFill>
-                  <a:srgbClr val="1F2937"/>
-                </a:solidFill>
-                <a:latin typeface="Calibri"/>
-              </a:defRPr>
-            </a:pPr>
-            <a:r>
-              <a:t>Parcours Prospect :</a:t>
-            </a:r>
-            <a:br/>
-            <a:r>
-              <a:t>L'agent commercial accède à une vue unifiée de ses prospects chauds avec des suggestions de relance personnalisées.</a:t>
-            </a:r>
-          </a:p>
-          <a:p>
-            <a:pPr>
-              <a:lnSpc>
-                <a:spcPct val="115000"/>
-              </a:lnSpc>
-              <a:spcAft>
-                <a:spcPts val="800"/>
-              </a:spcAft>
-              <a:defRPr sz="1100">
-                <a:solidFill>
-                  <a:srgbClr val="1F2937"/>
-                </a:solidFill>
-                <a:latin typeface="Calibri"/>
-              </a:defRPr>
-            </a:pPr>
-            <a:r>
-              <a:t>Impact Utilisateur :</a:t>
-            </a:r>
-            <a:br/>
-            <a:r>
-              <a:t>Une relation client suivie, personnalisée et proactive.</a:t>
-            </a:r>
-          </a:p>
-        </p:txBody>
-      </p:sp>
-      <p:sp>
-        <p:nvSpPr>
-          <p:cNvPr id="10" name="Rectangle 9"/>
-          <p:cNvSpPr/>
-          <p:nvPr/>
-        </p:nvSpPr>
-        <p:spPr>
-          <a:xfrm>
-            <a:off x="6339535" y="1645920"/>
-            <a:ext cx="5303520" cy="4389120"/>
-          </a:xfrm>
-          <a:prstGeom prst="rect">
-            <a:avLst/>
-          </a:prstGeom>
-          <a:solidFill>
-            <a:srgbClr val="F9FAFB"/>
-          </a:solidFill>
-          <a:ln>
-            <a:solidFill>
-              <a:srgbClr val="E5E7EB"/>
-            </a:solidFill>
-          </a:ln>
-        </p:spPr>
-        <p:style>
-          <a:lnRef idx="1">
-            <a:schemeClr val="accent1"/>
-          </a:lnRef>
-          <a:fillRef idx="3">
-            <a:schemeClr val="accent1"/>
-          </a:fillRef>
-          <a:effectRef idx="2">
-            <a:schemeClr val="accent1"/>
-          </a:effectRef>
-          <a:fontRef idx="minor">
-            <a:schemeClr val="lt1"/>
-          </a:fontRef>
-        </p:style>
-        <p:txBody>
-          <a:bodyPr rtlCol="0" anchor="ctr"/>
-          <a:lstStyle/>
-          <a:p>
-            <a:pPr algn="ctr"/>
-          </a:p>
-        </p:txBody>
-      </p:sp>
-      <p:sp>
-        <p:nvSpPr>
-          <p:cNvPr id="11" name="Rectangle 10"/>
-          <p:cNvSpPr/>
-          <p:nvPr/>
-        </p:nvSpPr>
-        <p:spPr>
-          <a:xfrm>
-            <a:off x="6339535" y="1645920"/>
-            <a:ext cx="73152" cy="4389120"/>
-          </a:xfrm>
-          <a:prstGeom prst="rect">
-            <a:avLst/>
-          </a:prstGeom>
-          <a:solidFill>
-            <a:srgbClr val="0D9488"/>
-          </a:solidFill>
-          <a:ln>
-            <a:noFill/>
-          </a:ln>
-        </p:spPr>
-        <p:style>
-          <a:lnRef idx="1">
-            <a:schemeClr val="accent1"/>
-          </a:lnRef>
-          <a:fillRef idx="3">
-            <a:schemeClr val="accent1"/>
-          </a:fillRef>
-          <a:effectRef idx="2">
-            <a:schemeClr val="accent1"/>
-          </a:effectRef>
-          <a:fontRef idx="minor">
-            <a:schemeClr val="lt1"/>
-          </a:fontRef>
-        </p:style>
-        <p:txBody>
-          <a:bodyPr rtlCol="0" anchor="ctr"/>
-          <a:lstStyle/>
-          <a:p>
-            <a:pPr algn="ctr"/>
-          </a:p>
-        </p:txBody>
-      </p:sp>
-      <p:sp>
-        <p:nvSpPr>
-          <p:cNvPr id="12" name="TextBox 11"/>
-          <p:cNvSpPr txBox="1"/>
-          <p:nvPr/>
-        </p:nvSpPr>
-        <p:spPr>
-          <a:xfrm>
-            <a:off x="6522415" y="1828800"/>
-            <a:ext cx="4937760" cy="4023360"/>
-          </a:xfrm>
-          <a:prstGeom prst="rect">
-            <a:avLst/>
-          </a:prstGeom>
-          <a:noFill/>
-        </p:spPr>
-        <p:txBody>
-          <a:bodyPr wrap="square">
-            <a:spAutoFit/>
-          </a:bodyPr>
-          <a:lstStyle/>
-          <a:p>
-            <a:pPr>
-              <a:spcAft>
-                <a:spcPts val="1400"/>
-              </a:spcAft>
-              <a:defRPr sz="1400" b="1">
-                <a:solidFill>
-                  <a:srgbClr val="0D9488"/>
-                </a:solidFill>
-                <a:latin typeface="Arial"/>
-              </a:defRPr>
-            </a:pPr>
-            <a:r>
-              <a:t>FICHE IMPLÉMENTATION INTERNE (MVP)</a:t>
-            </a:r>
-          </a:p>
-          <a:p>
-            <a:pPr>
-              <a:lnSpc>
-                <a:spcPct val="110000"/>
-              </a:lnSpc>
-              <a:spcAft>
-                <a:spcPts val="600"/>
-              </a:spcAft>
-              <a:defRPr sz="1050">
-                <a:solidFill>
-                  <a:srgbClr val="1F2937"/>
-                </a:solidFill>
-                <a:latin typeface="Calibri"/>
-              </a:defRPr>
-            </a:pPr>
-            <a:r>
-              <a:t>Données Nécessaires MVP :</a:t>
-            </a:r>
-            <a:br/>
-            <a:r>
-              <a:t>Données d'historique des prospects, statuts du pipeline (Nouveau, En cours, Gagné, Perdu).</a:t>
-            </a:r>
-          </a:p>
-          <a:p>
-            <a:pPr>
-              <a:lnSpc>
-                <a:spcPct val="110000"/>
-              </a:lnSpc>
-              <a:spcAft>
-                <a:spcPts val="600"/>
-              </a:spcAft>
-              <a:defRPr sz="1050">
-                <a:solidFill>
-                  <a:srgbClr val="1F2937"/>
-                </a:solidFill>
-                <a:latin typeface="Calibri"/>
-              </a:defRPr>
-            </a:pPr>
-            <a:r>
-              <a:t>Stack Technique MVP :</a:t>
-            </a:r>
-            <a:br/>
-            <a:r>
-              <a:t>Application web front-end légère (SPA), base de données relationnelle (CRM light).</a:t>
-            </a:r>
-          </a:p>
-          <a:p>
-            <a:pPr>
-              <a:lnSpc>
-                <a:spcPct val="110000"/>
-              </a:lnSpc>
-              <a:spcAft>
-                <a:spcPts val="600"/>
-              </a:spcAft>
-              <a:defRPr sz="1050">
-                <a:solidFill>
-                  <a:srgbClr val="1F2937"/>
-                </a:solidFill>
-                <a:latin typeface="Calibri"/>
-              </a:defRPr>
-            </a:pPr>
-            <a:r>
-              <a:t>APIs &amp; Services :</a:t>
-            </a:r>
-            <a:br/>
-            <a:r>
-              <a:t>API CRUD Prospects, API de tâches et relances.</a:t>
-            </a:r>
-          </a:p>
-          <a:p>
-            <a:pPr>
-              <a:lnSpc>
-                <a:spcPct val="110000"/>
-              </a:lnSpc>
-              <a:spcAft>
-                <a:spcPts val="600"/>
-              </a:spcAft>
-              <a:defRPr sz="1050">
-                <a:solidFill>
-                  <a:srgbClr val="1F2937"/>
-                </a:solidFill>
-                <a:latin typeface="Calibri"/>
-              </a:defRPr>
-            </a:pPr>
-            <a:r>
-              <a:t>Étapes Clés de Développement :</a:t>
-            </a:r>
-            <a:br/>
-            <a:r>
-              <a:t>Modélisation de la base de données, développement des vues Kanban de pipeline, gestion des droits d'accès basiques.</a:t>
-            </a:r>
-          </a:p>
-        </p:txBody>
-      </p:sp>
-    </p:spTree>
-  </p:cSld>
-  <p:clrMapOvr>
-    <a:masterClrMapping/>
-  </p:clrMapOvr>
-</p:sld>
-</file>
-
-<file path=ppt/slides/slide13.xml><?xml version="1.0" encoding="utf-8"?>
-<p:sld xmlns:a="http://schemas.openxmlformats.org/drawingml/2006/main" xmlns:p="http://schemas.openxmlformats.org/presentationml/2006/main" xmlns:r="http://schemas.openxmlformats.org/officeDocument/2006/relationships">
-  <p:cSld>
-    <p:spTree>
-      <p:nvGrpSpPr>
-        <p:cNvPr id="1" name=""/>
-        <p:cNvGrpSpPr/>
-        <p:nvPr/>
-      </p:nvGrpSpPr>
-      <p:grpSpPr/>
-      <p:sp>
-        <p:nvSpPr>
-          <p:cNvPr id="2" name="Rectangle 1"/>
-          <p:cNvSpPr/>
-          <p:nvPr/>
-        </p:nvSpPr>
-        <p:spPr>
-          <a:xfrm>
-            <a:off x="0" y="0"/>
-            <a:ext cx="12191695" cy="6858000"/>
-          </a:xfrm>
-          <a:prstGeom prst="rect">
-            <a:avLst/>
-          </a:prstGeom>
-          <a:solidFill>
-            <a:srgbClr val="FFFFFF"/>
-          </a:solidFill>
-          <a:ln>
-            <a:noFill/>
-          </a:ln>
-        </p:spPr>
-        <p:style>
-          <a:lnRef idx="1">
-            <a:schemeClr val="accent1"/>
-          </a:lnRef>
-          <a:fillRef idx="3">
-            <a:schemeClr val="accent1"/>
-          </a:fillRef>
-          <a:effectRef idx="2">
-            <a:schemeClr val="accent1"/>
-          </a:effectRef>
-          <a:fontRef idx="minor">
-            <a:schemeClr val="lt1"/>
-          </a:fontRef>
-        </p:style>
-        <p:txBody>
-          <a:bodyPr rtlCol="0" anchor="ctr"/>
-          <a:lstStyle/>
-          <a:p>
-            <a:pPr algn="ctr"/>
-          </a:p>
-        </p:txBody>
-      </p:sp>
-      <p:sp>
-        <p:nvSpPr>
-          <p:cNvPr id="3" name="TextBox 2"/>
-          <p:cNvSpPr txBox="1"/>
-          <p:nvPr/>
-        </p:nvSpPr>
-        <p:spPr>
-          <a:xfrm>
-            <a:off x="548640" y="365760"/>
-            <a:ext cx="10972800" cy="365760"/>
-          </a:xfrm>
-          <a:prstGeom prst="rect">
-            <a:avLst/>
-          </a:prstGeom>
-          <a:noFill/>
-        </p:spPr>
-        <p:txBody>
-          <a:bodyPr wrap="square" lIns="0" tIns="0" bIns="0" rIns="0">
-            <a:spAutoFit/>
-          </a:bodyPr>
-          <a:lstStyle/>
-          <a:p>
-            <a:pPr>
-              <a:defRPr sz="950" b="1">
-                <a:solidFill>
-                  <a:srgbClr val="0D9488"/>
-                </a:solidFill>
-                <a:latin typeface="Arial"/>
-              </a:defRPr>
-            </a:pPr>
-            <a:r>
-              <a:t>DIGITAL SALES ACCELERATOR</a:t>
-            </a:r>
-          </a:p>
-        </p:txBody>
-      </p:sp>
-      <p:sp>
-        <p:nvSpPr>
-          <p:cNvPr id="4" name="TextBox 3"/>
-          <p:cNvSpPr txBox="1"/>
-          <p:nvPr/>
-        </p:nvSpPr>
-        <p:spPr>
-          <a:xfrm>
-            <a:off x="548640" y="640080"/>
-            <a:ext cx="10972800" cy="640080"/>
-          </a:xfrm>
-          <a:prstGeom prst="rect">
-            <a:avLst/>
-          </a:prstGeom>
-          <a:noFill/>
-        </p:spPr>
-        <p:txBody>
-          <a:bodyPr wrap="square" lIns="0" tIns="0" bIns="0" rIns="0">
-            <a:spAutoFit/>
-          </a:bodyPr>
-          <a:lstStyle/>
-          <a:p>
-            <a:pPr>
-              <a:defRPr sz="2400" b="1">
-                <a:solidFill>
-                  <a:srgbClr val="86318E"/>
-                </a:solidFill>
-                <a:latin typeface="Arial"/>
-              </a:defRPr>
-            </a:pPr>
-            <a:r>
-              <a:t>5. Roadmap Produit &amp; Trajectoire de Maturité</a:t>
-            </a:r>
-          </a:p>
-        </p:txBody>
-      </p:sp>
-      <p:sp>
-        <p:nvSpPr>
-          <p:cNvPr id="5" name="Rectangle 4"/>
-          <p:cNvSpPr/>
-          <p:nvPr/>
-        </p:nvSpPr>
-        <p:spPr>
-          <a:xfrm>
-            <a:off x="548640" y="1280160"/>
-            <a:ext cx="11094415" cy="18288"/>
-          </a:xfrm>
-          <a:prstGeom prst="rect">
-            <a:avLst/>
-          </a:prstGeom>
-          <a:solidFill>
-            <a:srgbClr val="E5E7EB"/>
-          </a:solidFill>
-          <a:ln>
-            <a:noFill/>
-          </a:ln>
-        </p:spPr>
-        <p:style>
-          <a:lnRef idx="1">
-            <a:schemeClr val="accent1"/>
-          </a:lnRef>
-          <a:fillRef idx="3">
-            <a:schemeClr val="accent1"/>
-          </a:fillRef>
-          <a:effectRef idx="2">
-            <a:schemeClr val="accent1"/>
-          </a:effectRef>
-          <a:fontRef idx="minor">
-            <a:schemeClr val="lt1"/>
-          </a:fontRef>
-        </p:style>
-        <p:txBody>
-          <a:bodyPr rtlCol="0" anchor="ctr"/>
-          <a:lstStyle/>
-          <a:p>
-            <a:pPr algn="ctr"/>
-          </a:p>
-        </p:txBody>
-      </p:sp>
-      <p:sp>
-        <p:nvSpPr>
-          <p:cNvPr id="6" name="TextBox 5"/>
-          <p:cNvSpPr txBox="1"/>
-          <p:nvPr/>
-        </p:nvSpPr>
-        <p:spPr>
-          <a:xfrm>
-            <a:off x="548640" y="6400800"/>
-            <a:ext cx="11094415" cy="274320"/>
-          </a:xfrm>
-          <a:prstGeom prst="rect">
-            <a:avLst/>
-          </a:prstGeom>
-          <a:noFill/>
-        </p:spPr>
-        <p:txBody>
-          <a:bodyPr wrap="none" lIns="0" tIns="0" bIns="0" rIns="0">
+          <a:bodyPr wrap="none" lIns="0" tIns="0" rIns="0" bIns="0">
             <a:spAutoFit/>
           </a:bodyPr>
           <a:lstStyle/>
@@ -5518,10 +5361,34 @@
                 <a:tableStyleId>{5C22544A-7EE6-4342-B048-85BDC9FD1C3A}</a:tableStyleId>
               </a:tblPr>
               <a:tblGrid>
-                <a:gridCol w="914400"/>
-                <a:gridCol w="2286000"/>
-                <a:gridCol w="4572000"/>
-                <a:gridCol w="3322015"/>
+                <a:gridCol w="914400">
+                  <a:extLst>
+                    <a:ext uri="{9D8B030D-6E8A-4147-A177-3AD203B41FA5}">
+                      <a16:colId xmlns:a16="http://schemas.microsoft.com/office/drawing/2014/main" val="20000"/>
+                    </a:ext>
+                  </a:extLst>
+                </a:gridCol>
+                <a:gridCol w="2286000">
+                  <a:extLst>
+                    <a:ext uri="{9D8B030D-6E8A-4147-A177-3AD203B41FA5}">
+                      <a16:colId xmlns:a16="http://schemas.microsoft.com/office/drawing/2014/main" val="20001"/>
+                    </a:ext>
+                  </a:extLst>
+                </a:gridCol>
+                <a:gridCol w="4572000">
+                  <a:extLst>
+                    <a:ext uri="{9D8B030D-6E8A-4147-A177-3AD203B41FA5}">
+                      <a16:colId xmlns:a16="http://schemas.microsoft.com/office/drawing/2014/main" val="20002"/>
+                    </a:ext>
+                  </a:extLst>
+                </a:gridCol>
+                <a:gridCol w="3322015">
+                  <a:extLst>
+                    <a:ext uri="{9D8B030D-6E8A-4147-A177-3AD203B41FA5}">
+                      <a16:colId xmlns:a16="http://schemas.microsoft.com/office/drawing/2014/main" val="20003"/>
+                    </a:ext>
+                  </a:extLst>
+                </a:gridCol>
               </a:tblGrid>
               <a:tr h="685800">
                 <a:tc>
@@ -5616,6 +5483,11 @@
                     </a:solidFill>
                   </a:tcPr>
                 </a:tc>
+                <a:extLst>
+                  <a:ext uri="{0D108BD9-81ED-4DB2-BD59-A6C34878D82A}">
+                    <a16:rowId xmlns:a16="http://schemas.microsoft.com/office/drawing/2014/main" val="10000"/>
+                  </a:ext>
+                </a:extLst>
               </a:tr>
               <a:tr h="685800">
                 <a:tc>
@@ -5710,6 +5582,11 @@
                     </a:solidFill>
                   </a:tcPr>
                 </a:tc>
+                <a:extLst>
+                  <a:ext uri="{0D108BD9-81ED-4DB2-BD59-A6C34878D82A}">
+                    <a16:rowId xmlns:a16="http://schemas.microsoft.com/office/drawing/2014/main" val="10001"/>
+                  </a:ext>
+                </a:extLst>
               </a:tr>
               <a:tr h="685800">
                 <a:tc>
@@ -5804,6 +5681,11 @@
                     </a:solidFill>
                   </a:tcPr>
                 </a:tc>
+                <a:extLst>
+                  <a:ext uri="{0D108BD9-81ED-4DB2-BD59-A6C34878D82A}">
+                    <a16:rowId xmlns:a16="http://schemas.microsoft.com/office/drawing/2014/main" val="10002"/>
+                  </a:ext>
+                </a:extLst>
               </a:tr>
               <a:tr h="685800">
                 <a:tc>
@@ -5898,6 +5780,11 @@
                     </a:solidFill>
                   </a:tcPr>
                 </a:tc>
+                <a:extLst>
+                  <a:ext uri="{0D108BD9-81ED-4DB2-BD59-A6C34878D82A}">
+                    <a16:rowId xmlns:a16="http://schemas.microsoft.com/office/drawing/2014/main" val="10003"/>
+                  </a:ext>
+                </a:extLst>
               </a:tr>
               <a:tr h="685800">
                 <a:tc>
@@ -5992,6 +5879,11 @@
                     </a:solidFill>
                   </a:tcPr>
                 </a:tc>
+                <a:extLst>
+                  <a:ext uri="{0D108BD9-81ED-4DB2-BD59-A6C34878D82A}">
+                    <a16:rowId xmlns:a16="http://schemas.microsoft.com/office/drawing/2014/main" val="10004"/>
+                  </a:ext>
+                </a:extLst>
               </a:tr>
               <a:tr h="685800">
                 <a:tc>
@@ -6086,6 +5978,11 @@
                     </a:solidFill>
                   </a:tcPr>
                 </a:tc>
+                <a:extLst>
+                  <a:ext uri="{0D108BD9-81ED-4DB2-BD59-A6C34878D82A}">
+                    <a16:rowId xmlns:a16="http://schemas.microsoft.com/office/drawing/2014/main" val="10005"/>
+                  </a:ext>
+                </a:extLst>
               </a:tr>
             </a:tbl>
           </a:graphicData>
@@ -6099,8 +5996,8 @@
 </p:sld>
 </file>
 
-<file path=ppt/slides/slide14.xml><?xml version="1.0" encoding="utf-8"?>
-<p:sld xmlns:a="http://schemas.openxmlformats.org/drawingml/2006/main" xmlns:p="http://schemas.openxmlformats.org/presentationml/2006/main" xmlns:r="http://schemas.openxmlformats.org/officeDocument/2006/relationships">
+<file path=ppt/slides/slide13.xml><?xml version="1.0" encoding="utf-8"?>
+<p:sld xmlns:a="http://schemas.openxmlformats.org/drawingml/2006/main" xmlns:r="http://schemas.openxmlformats.org/officeDocument/2006/relationships" xmlns:p="http://schemas.openxmlformats.org/presentationml/2006/main">
   <p:cSld>
     <p:spTree>
       <p:nvGrpSpPr>
@@ -6108,7 +6005,14 @@
         <p:cNvGrpSpPr/>
         <p:nvPr/>
       </p:nvGrpSpPr>
-      <p:grpSpPr/>
+      <p:grpSpPr>
+        <a:xfrm>
+          <a:off x="0" y="0"/>
+          <a:ext cx="0" cy="0"/>
+          <a:chOff x="0" y="0"/>
+          <a:chExt cx="0" cy="0"/>
+        </a:xfrm>
+      </p:grpSpPr>
       <p:sp>
         <p:nvSpPr>
           <p:cNvPr id="2" name="Rectangle 1"/>
@@ -6149,6 +6053,7 @@
           <a:lstStyle/>
           <a:p>
             <a:pPr algn="ctr"/>
+            <a:endParaRPr/>
           </a:p>
         </p:txBody>
       </p:sp>
@@ -6169,7 +6074,7 @@
           <a:noFill/>
         </p:spPr>
         <p:txBody>
-          <a:bodyPr wrap="square" lIns="0" tIns="0" bIns="0" rIns="0">
+          <a:bodyPr wrap="square" lIns="0" tIns="0" rIns="0" bIns="0">
             <a:spAutoFit/>
           </a:bodyPr>
           <a:lstStyle/>
@@ -6205,7 +6110,7 @@
           <a:noFill/>
         </p:spPr>
         <p:txBody>
-          <a:bodyPr wrap="square" lIns="0" tIns="0" bIns="0" rIns="0">
+          <a:bodyPr wrap="square" lIns="0" tIns="0" rIns="0" bIns="0">
             <a:spAutoFit/>
           </a:bodyPr>
           <a:lstStyle/>
@@ -6264,6 +6169,7 @@
           <a:lstStyle/>
           <a:p>
             <a:pPr algn="ctr"/>
+            <a:endParaRPr/>
           </a:p>
         </p:txBody>
       </p:sp>
@@ -6284,7 +6190,7 @@
           <a:noFill/>
         </p:spPr>
         <p:txBody>
-          <a:bodyPr wrap="none" lIns="0" tIns="0" bIns="0" rIns="0">
+          <a:bodyPr wrap="none" lIns="0" tIns="0" rIns="0" bIns="0">
             <a:spAutoFit/>
           </a:bodyPr>
           <a:lstStyle/>
@@ -6322,10 +6228,34 @@
                 <a:tableStyleId>{5C22544A-7EE6-4342-B048-85BDC9FD1C3A}</a:tableStyleId>
               </a:tblPr>
               <a:tblGrid>
-                <a:gridCol w="2286000"/>
-                <a:gridCol w="2286000"/>
-                <a:gridCol w="2743200"/>
-                <a:gridCol w="3779215"/>
+                <a:gridCol w="2286000">
+                  <a:extLst>
+                    <a:ext uri="{9D8B030D-6E8A-4147-A177-3AD203B41FA5}">
+                      <a16:colId xmlns:a16="http://schemas.microsoft.com/office/drawing/2014/main" val="20000"/>
+                    </a:ext>
+                  </a:extLst>
+                </a:gridCol>
+                <a:gridCol w="2286000">
+                  <a:extLst>
+                    <a:ext uri="{9D8B030D-6E8A-4147-A177-3AD203B41FA5}">
+                      <a16:colId xmlns:a16="http://schemas.microsoft.com/office/drawing/2014/main" val="20001"/>
+                    </a:ext>
+                  </a:extLst>
+                </a:gridCol>
+                <a:gridCol w="2743200">
+                  <a:extLst>
+                    <a:ext uri="{9D8B030D-6E8A-4147-A177-3AD203B41FA5}">
+                      <a16:colId xmlns:a16="http://schemas.microsoft.com/office/drawing/2014/main" val="20002"/>
+                    </a:ext>
+                  </a:extLst>
+                </a:gridCol>
+                <a:gridCol w="3779215">
+                  <a:extLst>
+                    <a:ext uri="{9D8B030D-6E8A-4147-A177-3AD203B41FA5}">
+                      <a16:colId xmlns:a16="http://schemas.microsoft.com/office/drawing/2014/main" val="20003"/>
+                    </a:ext>
+                  </a:extLst>
+                </a:gridCol>
               </a:tblGrid>
               <a:tr h="685800">
                 <a:tc>
@@ -6420,6 +6350,11 @@
                     </a:solidFill>
                   </a:tcPr>
                 </a:tc>
+                <a:extLst>
+                  <a:ext uri="{0D108BD9-81ED-4DB2-BD59-A6C34878D82A}">
+                    <a16:rowId xmlns:a16="http://schemas.microsoft.com/office/drawing/2014/main" val="10000"/>
+                  </a:ext>
+                </a:extLst>
               </a:tr>
               <a:tr h="685800">
                 <a:tc>
@@ -6514,6 +6449,11 @@
                     </a:solidFill>
                   </a:tcPr>
                 </a:tc>
+                <a:extLst>
+                  <a:ext uri="{0D108BD9-81ED-4DB2-BD59-A6C34878D82A}">
+                    <a16:rowId xmlns:a16="http://schemas.microsoft.com/office/drawing/2014/main" val="10001"/>
+                  </a:ext>
+                </a:extLst>
               </a:tr>
               <a:tr h="685800">
                 <a:tc>
@@ -6608,6 +6548,11 @@
                     </a:solidFill>
                   </a:tcPr>
                 </a:tc>
+                <a:extLst>
+                  <a:ext uri="{0D108BD9-81ED-4DB2-BD59-A6C34878D82A}">
+                    <a16:rowId xmlns:a16="http://schemas.microsoft.com/office/drawing/2014/main" val="10002"/>
+                  </a:ext>
+                </a:extLst>
               </a:tr>
               <a:tr h="685800">
                 <a:tc>
@@ -6702,6 +6647,11 @@
                     </a:solidFill>
                   </a:tcPr>
                 </a:tc>
+                <a:extLst>
+                  <a:ext uri="{0D108BD9-81ED-4DB2-BD59-A6C34878D82A}">
+                    <a16:rowId xmlns:a16="http://schemas.microsoft.com/office/drawing/2014/main" val="10003"/>
+                  </a:ext>
+                </a:extLst>
               </a:tr>
               <a:tr h="685800">
                 <a:tc>
@@ -6796,6 +6746,11 @@
                     </a:solidFill>
                   </a:tcPr>
                 </a:tc>
+                <a:extLst>
+                  <a:ext uri="{0D108BD9-81ED-4DB2-BD59-A6C34878D82A}">
+                    <a16:rowId xmlns:a16="http://schemas.microsoft.com/office/drawing/2014/main" val="10004"/>
+                  </a:ext>
+                </a:extLst>
               </a:tr>
               <a:tr h="685800">
                 <a:tc>
@@ -6890,6 +6845,11 @@
                     </a:solidFill>
                   </a:tcPr>
                 </a:tc>
+                <a:extLst>
+                  <a:ext uri="{0D108BD9-81ED-4DB2-BD59-A6C34878D82A}">
+                    <a16:rowId xmlns:a16="http://schemas.microsoft.com/office/drawing/2014/main" val="10005"/>
+                  </a:ext>
+                </a:extLst>
               </a:tr>
             </a:tbl>
           </a:graphicData>
@@ -6903,8 +6863,8 @@
 </p:sld>
 </file>
 
-<file path=ppt/slides/slide15.xml><?xml version="1.0" encoding="utf-8"?>
-<p:sld xmlns:a="http://schemas.openxmlformats.org/drawingml/2006/main" xmlns:p="http://schemas.openxmlformats.org/presentationml/2006/main" xmlns:r="http://schemas.openxmlformats.org/officeDocument/2006/relationships">
+<file path=ppt/slides/slide14.xml><?xml version="1.0" encoding="utf-8"?>
+<p:sld xmlns:a="http://schemas.openxmlformats.org/drawingml/2006/main" xmlns:r="http://schemas.openxmlformats.org/officeDocument/2006/relationships" xmlns:p="http://schemas.openxmlformats.org/presentationml/2006/main">
   <p:cSld>
     <p:spTree>
       <p:nvGrpSpPr>
@@ -6912,7 +6872,14 @@
         <p:cNvGrpSpPr/>
         <p:nvPr/>
       </p:nvGrpSpPr>
-      <p:grpSpPr/>
+      <p:grpSpPr>
+        <a:xfrm>
+          <a:off x="0" y="0"/>
+          <a:ext cx="0" cy="0"/>
+          <a:chOff x="0" y="0"/>
+          <a:chExt cx="0" cy="0"/>
+        </a:xfrm>
+      </p:grpSpPr>
       <p:sp>
         <p:nvSpPr>
           <p:cNvPr id="2" name="Rectangle 1"/>
@@ -6953,6 +6920,7 @@
           <a:lstStyle/>
           <a:p>
             <a:pPr algn="ctr"/>
+            <a:endParaRPr/>
           </a:p>
         </p:txBody>
       </p:sp>
@@ -6973,7 +6941,7 @@
           <a:noFill/>
         </p:spPr>
         <p:txBody>
-          <a:bodyPr wrap="square" lIns="0" tIns="0" bIns="0" rIns="0">
+          <a:bodyPr wrap="square" lIns="0" tIns="0" rIns="0" bIns="0">
             <a:spAutoFit/>
           </a:bodyPr>
           <a:lstStyle/>
@@ -7009,7 +6977,7 @@
           <a:noFill/>
         </p:spPr>
         <p:txBody>
-          <a:bodyPr wrap="square" lIns="0" tIns="0" bIns="0" rIns="0">
+          <a:bodyPr wrap="square" lIns="0" tIns="0" rIns="0" bIns="0">
             <a:spAutoFit/>
           </a:bodyPr>
           <a:lstStyle/>
@@ -7068,6 +7036,7 @@
           <a:lstStyle/>
           <a:p>
             <a:pPr algn="ctr"/>
+            <a:endParaRPr/>
           </a:p>
         </p:txBody>
       </p:sp>
@@ -7088,7 +7057,7 @@
           <a:noFill/>
         </p:spPr>
         <p:txBody>
-          <a:bodyPr wrap="none" lIns="0" tIns="0" bIns="0" rIns="0">
+          <a:bodyPr wrap="none" lIns="0" tIns="0" rIns="0" bIns="0">
             <a:spAutoFit/>
           </a:bodyPr>
           <a:lstStyle/>
@@ -7149,6 +7118,7 @@
           <a:lstStyle/>
           <a:p>
             <a:pPr algn="ctr"/>
+            <a:endParaRPr/>
           </a:p>
         </p:txBody>
       </p:sp>
@@ -7192,6 +7162,7 @@
           <a:lstStyle/>
           <a:p>
             <a:pPr algn="ctr"/>
+            <a:endParaRPr/>
           </a:p>
         </p:txBody>
       </p:sp>
@@ -7352,6 +7323,7 @@
           <a:lstStyle/>
           <a:p>
             <a:pPr algn="ctr"/>
+            <a:endParaRPr/>
           </a:p>
         </p:txBody>
       </p:sp>
@@ -7395,6 +7367,7 @@
           <a:lstStyle/>
           <a:p>
             <a:pPr algn="ctr"/>
+            <a:endParaRPr/>
           </a:p>
         </p:txBody>
       </p:sp>
@@ -7509,155 +7482,6 @@
             </a:pPr>
             <a:r>
               <a:t>• Désignation d'un référent conformité RGPD dès le lancement.</a:t>
-            </a:r>
-          </a:p>
-        </p:txBody>
-      </p:sp>
-    </p:spTree>
-  </p:cSld>
-  <p:clrMapOvr>
-    <a:masterClrMapping/>
-  </p:clrMapOvr>
-</p:sld>
-</file>
-
-<file path=ppt/slides/slide16.xml><?xml version="1.0" encoding="utf-8"?>
-<p:sld xmlns:a="http://schemas.openxmlformats.org/drawingml/2006/main" xmlns:p="http://schemas.openxmlformats.org/presentationml/2006/main" xmlns:r="http://schemas.openxmlformats.org/officeDocument/2006/relationships">
-  <p:cSld>
-    <p:spTree>
-      <p:nvGrpSpPr>
-        <p:cNvPr id="1" name=""/>
-        <p:cNvGrpSpPr/>
-        <p:nvPr/>
-      </p:nvGrpSpPr>
-      <p:grpSpPr/>
-      <p:sp>
-        <p:nvSpPr>
-          <p:cNvPr id="2" name="Rectangle 1"/>
-          <p:cNvSpPr/>
-          <p:nvPr/>
-        </p:nvSpPr>
-        <p:spPr>
-          <a:xfrm>
-            <a:off x="0" y="0"/>
-            <a:ext cx="12191695" cy="6858000"/>
-          </a:xfrm>
-          <a:prstGeom prst="rect">
-            <a:avLst/>
-          </a:prstGeom>
-          <a:solidFill>
-            <a:srgbClr val="86318E"/>
-          </a:solidFill>
-          <a:ln>
-            <a:noFill/>
-          </a:ln>
-        </p:spPr>
-        <p:style>
-          <a:lnRef idx="1">
-            <a:schemeClr val="accent1"/>
-          </a:lnRef>
-          <a:fillRef idx="3">
-            <a:schemeClr val="accent1"/>
-          </a:fillRef>
-          <a:effectRef idx="2">
-            <a:schemeClr val="accent1"/>
-          </a:effectRef>
-          <a:fontRef idx="minor">
-            <a:schemeClr val="lt1"/>
-          </a:fontRef>
-        </p:style>
-        <p:txBody>
-          <a:bodyPr rtlCol="0" anchor="ctr"/>
-          <a:lstStyle/>
-          <a:p>
-            <a:pPr algn="ctr"/>
-          </a:p>
-        </p:txBody>
-      </p:sp>
-      <p:sp>
-        <p:nvSpPr>
-          <p:cNvPr id="3" name="TextBox 2"/>
-          <p:cNvSpPr txBox="1"/>
-          <p:nvPr/>
-        </p:nvSpPr>
-        <p:spPr>
-          <a:xfrm>
-            <a:off x="914400" y="2560320"/>
-            <a:ext cx="10362895" cy="1371600"/>
-          </a:xfrm>
-          <a:prstGeom prst="rect">
-            <a:avLst/>
-          </a:prstGeom>
-          <a:noFill/>
-        </p:spPr>
-        <p:txBody>
-          <a:bodyPr wrap="none">
-            <a:spAutoFit/>
-          </a:bodyPr>
-          <a:lstStyle/>
-          <a:p>
-            <a:pPr algn="ctr">
-              <a:defRPr sz="3600" b="1">
-                <a:solidFill>
-                  <a:srgbClr val="FFFFFF"/>
-                </a:solidFill>
-                <a:latin typeface="Arial"/>
-              </a:defRPr>
-            </a:pPr>
-            <a:r>
-              <a:t>Merci pour votre confiance</a:t>
-            </a:r>
-          </a:p>
-          <a:p>
-            <a:pPr algn="ctr">
-              <a:spcBef>
-                <a:spcPts val="1200"/>
-              </a:spcBef>
-              <a:defRPr sz="1600">
-                <a:solidFill>
-                  <a:srgbClr val="0D9488"/>
-                </a:solidFill>
-                <a:latin typeface="Arial"/>
-              </a:defRPr>
-            </a:pPr>
-            <a:r>
-              <a:t>Co-construisons le futur de l'assurance chez SanlamAllianz</a:t>
-            </a:r>
-          </a:p>
-        </p:txBody>
-      </p:sp>
-      <p:sp>
-        <p:nvSpPr>
-          <p:cNvPr id="4" name="TextBox 3"/>
-          <p:cNvSpPr txBox="1"/>
-          <p:nvPr/>
-        </p:nvSpPr>
-        <p:spPr>
-          <a:xfrm>
-            <a:off x="914400" y="5303520"/>
-            <a:ext cx="10362895" cy="731520"/>
-          </a:xfrm>
-          <a:prstGeom prst="rect">
-            <a:avLst/>
-          </a:prstGeom>
-          <a:noFill/>
-        </p:spPr>
-        <p:txBody>
-          <a:bodyPr wrap="none">
-            <a:spAutoFit/>
-          </a:bodyPr>
-          <a:lstStyle/>
-          <a:p>
-            <a:pPr algn="ctr">
-              <a:defRPr sz="1100">
-                <a:solidFill>
-                  <a:srgbClr val="F9FAFB"/>
-                </a:solidFill>
-                <a:latin typeface="Calibri"/>
-              </a:defRPr>
-            </a:pPr>
-            <a:r>
-              <a:t>Ekinox Consulting Team  |  contact@ekinox.io  |  Projet Pilote Accelerator</a:t>
             </a:r>
           </a:p>
         </p:txBody>
@@ -7671,7 +7495,7 @@
 </file>
 
 <file path=ppt/slides/slide2.xml><?xml version="1.0" encoding="utf-8"?>
-<p:sld xmlns:a="http://schemas.openxmlformats.org/drawingml/2006/main" xmlns:p="http://schemas.openxmlformats.org/presentationml/2006/main" xmlns:r="http://schemas.openxmlformats.org/officeDocument/2006/relationships">
+<p:sld xmlns:a="http://schemas.openxmlformats.org/drawingml/2006/main" xmlns:r="http://schemas.openxmlformats.org/officeDocument/2006/relationships" xmlns:p="http://schemas.openxmlformats.org/presentationml/2006/main">
   <p:cSld>
     <p:spTree>
       <p:nvGrpSpPr>
@@ -7679,7 +7503,14 @@
         <p:cNvGrpSpPr/>
         <p:nvPr/>
       </p:nvGrpSpPr>
-      <p:grpSpPr/>
+      <p:grpSpPr>
+        <a:xfrm>
+          <a:off x="0" y="0"/>
+          <a:ext cx="0" cy="0"/>
+          <a:chOff x="0" y="0"/>
+          <a:chExt cx="0" cy="0"/>
+        </a:xfrm>
+      </p:grpSpPr>
       <p:sp>
         <p:nvSpPr>
           <p:cNvPr id="2" name="Rectangle 1"/>
@@ -7720,6 +7551,7 @@
           <a:lstStyle/>
           <a:p>
             <a:pPr algn="ctr"/>
+            <a:endParaRPr/>
           </a:p>
         </p:txBody>
       </p:sp>
@@ -7740,7 +7572,7 @@
           <a:noFill/>
         </p:spPr>
         <p:txBody>
-          <a:bodyPr wrap="square" lIns="0" tIns="0" bIns="0" rIns="0">
+          <a:bodyPr wrap="square" lIns="0" tIns="0" rIns="0" bIns="0">
             <a:spAutoFit/>
           </a:bodyPr>
           <a:lstStyle/>
@@ -7776,7 +7608,7 @@
           <a:noFill/>
         </p:spPr>
         <p:txBody>
-          <a:bodyPr wrap="square" lIns="0" tIns="0" bIns="0" rIns="0">
+          <a:bodyPr wrap="square" lIns="0" tIns="0" rIns="0" bIns="0">
             <a:spAutoFit/>
           </a:bodyPr>
           <a:lstStyle/>
@@ -7790,7 +7622,7 @@
               </a:defRPr>
             </a:pPr>
             <a:r>
-              <a:t>1. Alignement Stratégique &amp; Positionnement</a:t>
+              <a:t>2. Product Blueprint &amp; Principes Directeurs</a:t>
             </a:r>
           </a:p>
         </p:txBody>
@@ -7835,6 +7667,7 @@
           <a:lstStyle/>
           <a:p>
             <a:pPr algn="ctr"/>
+            <a:endParaRPr/>
           </a:p>
         </p:txBody>
       </p:sp>
@@ -7855,7 +7688,7 @@
           <a:noFill/>
         </p:spPr>
         <p:txBody>
-          <a:bodyPr wrap="none" lIns="0" tIns="0" bIns="0" rIns="0">
+          <a:bodyPr wrap="none" lIns="0" tIns="0" rIns="0" bIns="0">
             <a:spAutoFit/>
           </a:bodyPr>
           <a:lstStyle/>
@@ -7869,7 +7702,7 @@
               </a:defRPr>
             </a:pPr>
             <a:r>
-              <a:t>Ekinox Consulting  |  Proposition de Transformation  |  Confidentialité SanlamAllianz  |  Slide 2</a:t>
+              <a:t>Ekinox Consulting  |  Proposition de Transformation  |  Confidentialité SanlamAllianz  |  Slide 3</a:t>
             </a:r>
           </a:p>
         </p:txBody>
@@ -7882,8 +7715,8 @@
         </p:nvSpPr>
         <p:spPr>
           <a:xfrm>
-            <a:off x="548640" y="1645920"/>
-            <a:ext cx="5303520" cy="4114800"/>
+            <a:off x="548640" y="1371600"/>
+            <a:ext cx="11094415" cy="457200"/>
           </a:xfrm>
           <a:prstGeom prst="rect">
             <a:avLst/>
@@ -7891,46 +7724,21 @@
           <a:noFill/>
         </p:spPr>
         <p:txBody>
-          <a:bodyPr wrap="square" lIns="0" tIns="0" bIns="0" rIns="0">
+          <a:bodyPr wrap="none" lIns="0" tIns="0" rIns="0" bIns="0">
             <a:spAutoFit/>
           </a:bodyPr>
           <a:lstStyle/>
           <a:p>
             <a:pPr>
-              <a:lnSpc>
-                <a:spcPct val="120000"/>
-              </a:lnSpc>
-              <a:spcAft>
-                <a:spcPts val="1400"/>
-              </a:spcAft>
-              <a:defRPr sz="1300">
+              <a:defRPr sz="1100" i="1">
                 <a:solidFill>
                   <a:srgbClr val="1F2937"/>
                 </a:solidFill>
-                <a:latin typeface="Arial"/>
-              </a:defRPr>
-            </a:pPr>
-            <a:r>
-              <a:t>SanlamAllianz doit faire évoluer sa capacité d'acquisition client.</a:t>
-            </a:r>
-          </a:p>
-          <a:p>
-            <a:pPr>
-              <a:lnSpc>
-                <a:spcPct val="120000"/>
-              </a:lnSpc>
-              <a:spcAft>
-                <a:spcPts val="1400"/>
-              </a:spcAft>
-              <a:defRPr sz="1300">
-                <a:solidFill>
-                  <a:srgbClr val="1F2937"/>
-                </a:solidFill>
-                <a:latin typeface="Arial"/>
-              </a:defRPr>
-            </a:pPr>
-            <a:r>
-              <a:t>Plutôt que d'intégrer des chatbots isolés ou d'engager d'importants budgets de refonte CRM, le Digital Sales Accelerator permet de déployer un parcours omnicanal performant, découplé du Core Insurance pour une activation immédiate.</a:t>
+                <a:latin typeface="Calibri"/>
+              </a:defRPr>
+            </a:pPr>
+            <a:r>
+              <a:t>Le développement du MVP est régi par six principes fondamentaux garantissant la création rapide de valeur métier sans verrous techniques.</a:t>
             </a:r>
           </a:p>
         </p:txBody>
@@ -7943,8 +7751,8 @@
         </p:nvSpPr>
         <p:spPr>
           <a:xfrm>
-            <a:off x="6339535" y="1645920"/>
-            <a:ext cx="5303520" cy="1188720"/>
+            <a:off x="548640" y="1920240"/>
+            <a:ext cx="3520440" cy="2011680"/>
           </a:xfrm>
           <a:prstGeom prst="rect">
             <a:avLst/>
@@ -7977,6 +7785,7 @@
           <a:lstStyle/>
           <a:p>
             <a:pPr algn="ctr"/>
+            <a:endParaRPr/>
           </a:p>
         </p:txBody>
       </p:sp>
@@ -7988,14 +7797,14 @@
         </p:nvSpPr>
         <p:spPr>
           <a:xfrm>
-            <a:off x="6339535" y="1645920"/>
-            <a:ext cx="64008" cy="1188720"/>
+            <a:off x="548640" y="1920240"/>
+            <a:ext cx="54864" cy="2011680"/>
           </a:xfrm>
           <a:prstGeom prst="rect">
             <a:avLst/>
           </a:prstGeom>
           <a:solidFill>
-            <a:srgbClr val="0D9488"/>
+            <a:srgbClr val="86318E"/>
           </a:solidFill>
           <a:ln>
             <a:noFill/>
@@ -8020,6 +7829,7 @@
           <a:lstStyle/>
           <a:p>
             <a:pPr algn="ctr"/>
+            <a:endParaRPr/>
           </a:p>
         </p:txBody>
       </p:sp>
@@ -8031,8 +7841,8 @@
         </p:nvSpPr>
         <p:spPr>
           <a:xfrm>
-            <a:off x="6537960" y="1783080"/>
-            <a:ext cx="4937760" cy="914400"/>
+            <a:off x="685800" y="2057400"/>
+            <a:ext cx="3291840" cy="1737360"/>
           </a:xfrm>
           <a:prstGeom prst="rect">
             <a:avLst/>
@@ -8047,9 +7857,9 @@
           <a:p>
             <a:pPr>
               <a:spcAft>
-                <a:spcPts val="400"/>
+                <a:spcPts val="800"/>
               </a:spcAft>
-              <a:defRPr sz="1100" b="1">
+              <a:defRPr sz="1150" b="1">
                 <a:solidFill>
                   <a:srgbClr val="86318E"/>
                 </a:solidFill>
@@ -8057,7 +7867,7 @@
               </a:defRPr>
             </a:pPr>
             <a:r>
-              <a:t>PRODUCTIVITÉ COMMERCIALE</a:t>
+              <a:t>BUSINESS FIRST</a:t>
             </a:r>
           </a:p>
           <a:p>
@@ -8073,7 +7883,7 @@
               </a:defRPr>
             </a:pPr>
             <a:r>
-              <a:t>Qualification automatique des dossiers prospects avant transmission aux conseillers.</a:t>
+              <a:t>Chaque fonctionnalité développée doit démontrer un impact direct sur le taux de conversion ou le coût d'acquisition.</a:t>
             </a:r>
           </a:p>
         </p:txBody>
@@ -8086,8 +7896,8 @@
         </p:nvSpPr>
         <p:spPr>
           <a:xfrm>
-            <a:off x="6339535" y="3108960"/>
-            <a:ext cx="5303520" cy="1188720"/>
+            <a:off x="4334256" y="1920240"/>
+            <a:ext cx="3520440" cy="2011680"/>
           </a:xfrm>
           <a:prstGeom prst="rect">
             <a:avLst/>
@@ -8120,6 +7930,7 @@
           <a:lstStyle/>
           <a:p>
             <a:pPr algn="ctr"/>
+            <a:endParaRPr/>
           </a:p>
         </p:txBody>
       </p:sp>
@@ -8131,8 +7942,8 @@
         </p:nvSpPr>
         <p:spPr>
           <a:xfrm>
-            <a:off x="6339535" y="3108960"/>
-            <a:ext cx="64008" cy="1188720"/>
+            <a:off x="4334256" y="1920240"/>
+            <a:ext cx="54864" cy="2011680"/>
           </a:xfrm>
           <a:prstGeom prst="rect">
             <a:avLst/>
@@ -8163,6 +7974,7 @@
           <a:lstStyle/>
           <a:p>
             <a:pPr algn="ctr"/>
+            <a:endParaRPr/>
           </a:p>
         </p:txBody>
       </p:sp>
@@ -8174,8 +7986,8 @@
         </p:nvSpPr>
         <p:spPr>
           <a:xfrm>
-            <a:off x="6537960" y="3246120"/>
-            <a:ext cx="4937760" cy="914400"/>
+            <a:off x="4471416" y="2057400"/>
+            <a:ext cx="3291840" cy="1737360"/>
           </a:xfrm>
           <a:prstGeom prst="rect">
             <a:avLst/>
@@ -8190,17 +8002,17 @@
           <a:p>
             <a:pPr>
               <a:spcAft>
-                <a:spcPts val="400"/>
+                <a:spcPts val="800"/>
               </a:spcAft>
-              <a:defRPr sz="1100" b="1">
-                <a:solidFill>
-                  <a:srgbClr val="86318E"/>
+              <a:defRPr sz="1150" b="1">
+                <a:solidFill>
+                  <a:srgbClr val="0D9488"/>
                 </a:solidFill>
                 <a:latin typeface="Arial"/>
               </a:defRPr>
             </a:pPr>
             <a:r>
-              <a:t>EXPÉRIENCE OMNICANALE</a:t>
+              <a:t>API-READY</a:t>
             </a:r>
           </a:p>
           <a:p>
@@ -8216,7 +8028,7 @@
               </a:defRPr>
             </a:pPr>
             <a:r>
-              <a:t>Convergence immédiate de tous les canaux (WhatsApp, Meta, Web, SMS) vers un seul flux d'onboarding.</a:t>
+              <a:t>Architecture modulaire conçue pour s'intégrer de manière transparente avec les canaux de distribution existants et futurs.</a:t>
             </a:r>
           </a:p>
         </p:txBody>
@@ -8229,8 +8041,8 @@
         </p:nvSpPr>
         <p:spPr>
           <a:xfrm>
-            <a:off x="6339535" y="4572000"/>
-            <a:ext cx="5303520" cy="1188720"/>
+            <a:off x="8119872" y="1920240"/>
+            <a:ext cx="3520440" cy="2011680"/>
           </a:xfrm>
           <a:prstGeom prst="rect">
             <a:avLst/>
@@ -8263,6 +8075,7 @@
           <a:lstStyle/>
           <a:p>
             <a:pPr algn="ctr"/>
+            <a:endParaRPr/>
           </a:p>
         </p:txBody>
       </p:sp>
@@ -8274,8 +8087,153 @@
         </p:nvSpPr>
         <p:spPr>
           <a:xfrm>
-            <a:off x="6339535" y="4572000"/>
-            <a:ext cx="64008" cy="1188720"/>
+            <a:off x="8119872" y="1920240"/>
+            <a:ext cx="54864" cy="2011680"/>
+          </a:xfrm>
+          <a:prstGeom prst="rect">
+            <a:avLst/>
+          </a:prstGeom>
+          <a:solidFill>
+            <a:srgbClr val="86318E"/>
+          </a:solidFill>
+          <a:ln>
+            <a:noFill/>
+          </a:ln>
+        </p:spPr>
+        <p:style>
+          <a:lnRef idx="1">
+            <a:schemeClr val="accent1"/>
+          </a:lnRef>
+          <a:fillRef idx="3">
+            <a:schemeClr val="accent1"/>
+          </a:fillRef>
+          <a:effectRef idx="2">
+            <a:schemeClr val="accent1"/>
+          </a:effectRef>
+          <a:fontRef idx="minor">
+            <a:schemeClr val="lt1"/>
+          </a:fontRef>
+        </p:style>
+        <p:txBody>
+          <a:bodyPr rtlCol="0" anchor="ctr"/>
+          <a:lstStyle/>
+          <a:p>
+            <a:pPr algn="ctr"/>
+            <a:endParaRPr/>
+          </a:p>
+        </p:txBody>
+      </p:sp>
+      <p:sp>
+        <p:nvSpPr>
+          <p:cNvPr id="16" name="TextBox 15"/>
+          <p:cNvSpPr txBox="1"/>
+          <p:nvPr/>
+        </p:nvSpPr>
+        <p:spPr>
+          <a:xfrm>
+            <a:off x="8257032" y="2057400"/>
+            <a:ext cx="3291840" cy="1737360"/>
+          </a:xfrm>
+          <a:prstGeom prst="rect">
+            <a:avLst/>
+          </a:prstGeom>
+          <a:noFill/>
+        </p:spPr>
+        <p:txBody>
+          <a:bodyPr wrap="square">
+            <a:spAutoFit/>
+          </a:bodyPr>
+          <a:lstStyle/>
+          <a:p>
+            <a:pPr>
+              <a:spcAft>
+                <a:spcPts val="800"/>
+              </a:spcAft>
+              <a:defRPr sz="1150" b="1">
+                <a:solidFill>
+                  <a:srgbClr val="86318E"/>
+                </a:solidFill>
+                <a:latin typeface="Arial"/>
+              </a:defRPr>
+            </a:pPr>
+            <a:r>
+              <a:t>MVP BY DESIGN</a:t>
+            </a:r>
+          </a:p>
+          <a:p>
+            <a:pPr>
+              <a:lnSpc>
+                <a:spcPct val="110000"/>
+              </a:lnSpc>
+              <a:defRPr sz="1000">
+                <a:solidFill>
+                  <a:srgbClr val="1F2937"/>
+                </a:solidFill>
+                <a:latin typeface="Calibri"/>
+              </a:defRPr>
+            </a:pPr>
+            <a:r>
+              <a:t>Lancement rapide avec un périmètre restreint pour valider la traction commerciale avant complexification technique.</a:t>
+            </a:r>
+          </a:p>
+        </p:txBody>
+      </p:sp>
+      <p:sp>
+        <p:nvSpPr>
+          <p:cNvPr id="17" name="Rectangle 16"/>
+          <p:cNvSpPr/>
+          <p:nvPr/>
+        </p:nvSpPr>
+        <p:spPr>
+          <a:xfrm>
+            <a:off x="548640" y="4160520"/>
+            <a:ext cx="3520440" cy="2011680"/>
+          </a:xfrm>
+          <a:prstGeom prst="rect">
+            <a:avLst/>
+          </a:prstGeom>
+          <a:solidFill>
+            <a:srgbClr val="F9FAFB"/>
+          </a:solidFill>
+          <a:ln>
+            <a:solidFill>
+              <a:srgbClr val="E5E7EB"/>
+            </a:solidFill>
+          </a:ln>
+        </p:spPr>
+        <p:style>
+          <a:lnRef idx="1">
+            <a:schemeClr val="accent1"/>
+          </a:lnRef>
+          <a:fillRef idx="3">
+            <a:schemeClr val="accent1"/>
+          </a:fillRef>
+          <a:effectRef idx="2">
+            <a:schemeClr val="accent1"/>
+          </a:effectRef>
+          <a:fontRef idx="minor">
+            <a:schemeClr val="lt1"/>
+          </a:fontRef>
+        </p:style>
+        <p:txBody>
+          <a:bodyPr rtlCol="0" anchor="ctr"/>
+          <a:lstStyle/>
+          <a:p>
+            <a:pPr algn="ctr"/>
+            <a:endParaRPr/>
+          </a:p>
+        </p:txBody>
+      </p:sp>
+      <p:sp>
+        <p:nvSpPr>
+          <p:cNvPr id="18" name="Rectangle 17"/>
+          <p:cNvSpPr/>
+          <p:nvPr/>
+        </p:nvSpPr>
+        <p:spPr>
+          <a:xfrm>
+            <a:off x="548640" y="4160520"/>
+            <a:ext cx="54864" cy="2011680"/>
           </a:xfrm>
           <a:prstGeom prst="rect">
             <a:avLst/>
@@ -8306,19 +8264,20 @@
           <a:lstStyle/>
           <a:p>
             <a:pPr algn="ctr"/>
-          </a:p>
-        </p:txBody>
-      </p:sp>
-      <p:sp>
-        <p:nvSpPr>
-          <p:cNvPr id="16" name="TextBox 15"/>
+            <a:endParaRPr/>
+          </a:p>
+        </p:txBody>
+      </p:sp>
+      <p:sp>
+        <p:nvSpPr>
+          <p:cNvPr id="19" name="TextBox 18"/>
           <p:cNvSpPr txBox="1"/>
           <p:nvPr/>
         </p:nvSpPr>
         <p:spPr>
           <a:xfrm>
-            <a:off x="6537960" y="4709160"/>
-            <a:ext cx="4937760" cy="914400"/>
+            <a:off x="685800" y="4297680"/>
+            <a:ext cx="3291840" cy="1737360"/>
           </a:xfrm>
           <a:prstGeom prst="rect">
             <a:avLst/>
@@ -8333,17 +8292,17 @@
           <a:p>
             <a:pPr>
               <a:spcAft>
-                <a:spcPts val="400"/>
+                <a:spcPts val="800"/>
               </a:spcAft>
-              <a:defRPr sz="1100" b="1">
-                <a:solidFill>
-                  <a:srgbClr val="86318E"/>
+              <a:defRPr sz="1150" b="1">
+                <a:solidFill>
+                  <a:srgbClr val="0D9488"/>
                 </a:solidFill>
                 <a:latin typeface="Arial"/>
               </a:defRPr>
             </a:pPr>
             <a:r>
-              <a:t>ROI &amp; CAC OPTIMISÉ</a:t>
+              <a:t>AI AS AN ENABLER</a:t>
             </a:r>
           </a:p>
           <a:p>
@@ -8359,7 +8318,297 @@
               </a:defRPr>
             </a:pPr>
             <a:r>
-              <a:t>Réduction substantielle du CAC (Coût d'Acquisition Client) et hausse nette du taux de conversion.</a:t>
+              <a:t>L'Intelligence Artificielle opère en coulisse pour augmenter les capacités de vente sans interférer avec l'expérience utilisateur naturelle.</a:t>
+            </a:r>
+          </a:p>
+        </p:txBody>
+      </p:sp>
+      <p:sp>
+        <p:nvSpPr>
+          <p:cNvPr id="20" name="Rectangle 19"/>
+          <p:cNvSpPr/>
+          <p:nvPr/>
+        </p:nvSpPr>
+        <p:spPr>
+          <a:xfrm>
+            <a:off x="4334256" y="4160520"/>
+            <a:ext cx="3520440" cy="2011680"/>
+          </a:xfrm>
+          <a:prstGeom prst="rect">
+            <a:avLst/>
+          </a:prstGeom>
+          <a:solidFill>
+            <a:srgbClr val="F9FAFB"/>
+          </a:solidFill>
+          <a:ln>
+            <a:solidFill>
+              <a:srgbClr val="E5E7EB"/>
+            </a:solidFill>
+          </a:ln>
+        </p:spPr>
+        <p:style>
+          <a:lnRef idx="1">
+            <a:schemeClr val="accent1"/>
+          </a:lnRef>
+          <a:fillRef idx="3">
+            <a:schemeClr val="accent1"/>
+          </a:fillRef>
+          <a:effectRef idx="2">
+            <a:schemeClr val="accent1"/>
+          </a:effectRef>
+          <a:fontRef idx="minor">
+            <a:schemeClr val="lt1"/>
+          </a:fontRef>
+        </p:style>
+        <p:txBody>
+          <a:bodyPr rtlCol="0" anchor="ctr"/>
+          <a:lstStyle/>
+          <a:p>
+            <a:pPr algn="ctr"/>
+            <a:endParaRPr/>
+          </a:p>
+        </p:txBody>
+      </p:sp>
+      <p:sp>
+        <p:nvSpPr>
+          <p:cNvPr id="21" name="Rectangle 20"/>
+          <p:cNvSpPr/>
+          <p:nvPr/>
+        </p:nvSpPr>
+        <p:spPr>
+          <a:xfrm>
+            <a:off x="4334256" y="4160520"/>
+            <a:ext cx="54864" cy="2011680"/>
+          </a:xfrm>
+          <a:prstGeom prst="rect">
+            <a:avLst/>
+          </a:prstGeom>
+          <a:solidFill>
+            <a:srgbClr val="86318E"/>
+          </a:solidFill>
+          <a:ln>
+            <a:noFill/>
+          </a:ln>
+        </p:spPr>
+        <p:style>
+          <a:lnRef idx="1">
+            <a:schemeClr val="accent1"/>
+          </a:lnRef>
+          <a:fillRef idx="3">
+            <a:schemeClr val="accent1"/>
+          </a:fillRef>
+          <a:effectRef idx="2">
+            <a:schemeClr val="accent1"/>
+          </a:effectRef>
+          <a:fontRef idx="minor">
+            <a:schemeClr val="lt1"/>
+          </a:fontRef>
+        </p:style>
+        <p:txBody>
+          <a:bodyPr rtlCol="0" anchor="ctr"/>
+          <a:lstStyle/>
+          <a:p>
+            <a:pPr algn="ctr"/>
+            <a:endParaRPr/>
+          </a:p>
+        </p:txBody>
+      </p:sp>
+      <p:sp>
+        <p:nvSpPr>
+          <p:cNvPr id="22" name="TextBox 21"/>
+          <p:cNvSpPr txBox="1"/>
+          <p:nvPr/>
+        </p:nvSpPr>
+        <p:spPr>
+          <a:xfrm>
+            <a:off x="4471416" y="4297680"/>
+            <a:ext cx="3291840" cy="1737360"/>
+          </a:xfrm>
+          <a:prstGeom prst="rect">
+            <a:avLst/>
+          </a:prstGeom>
+          <a:noFill/>
+        </p:spPr>
+        <p:txBody>
+          <a:bodyPr wrap="square">
+            <a:spAutoFit/>
+          </a:bodyPr>
+          <a:lstStyle/>
+          <a:p>
+            <a:pPr>
+              <a:spcAft>
+                <a:spcPts val="800"/>
+              </a:spcAft>
+              <a:defRPr sz="1150" b="1">
+                <a:solidFill>
+                  <a:srgbClr val="86318E"/>
+                </a:solidFill>
+                <a:latin typeface="Arial"/>
+              </a:defRPr>
+            </a:pPr>
+            <a:r>
+              <a:t>EXPLAINABILITY BY DEFAULT</a:t>
+            </a:r>
+          </a:p>
+          <a:p>
+            <a:pPr>
+              <a:lnSpc>
+                <a:spcPct val="110000"/>
+              </a:lnSpc>
+              <a:defRPr sz="1000">
+                <a:solidFill>
+                  <a:srgbClr val="1F2937"/>
+                </a:solidFill>
+                <a:latin typeface="Calibri"/>
+              </a:defRPr>
+            </a:pPr>
+            <a:r>
+              <a:t>Toute recommandation produit est justifiée par les besoins exprimés par le client, garantissant transparence et conformité.</a:t>
+            </a:r>
+          </a:p>
+        </p:txBody>
+      </p:sp>
+      <p:sp>
+        <p:nvSpPr>
+          <p:cNvPr id="23" name="Rectangle 22"/>
+          <p:cNvSpPr/>
+          <p:nvPr/>
+        </p:nvSpPr>
+        <p:spPr>
+          <a:xfrm>
+            <a:off x="8119872" y="4160520"/>
+            <a:ext cx="3520440" cy="2011680"/>
+          </a:xfrm>
+          <a:prstGeom prst="rect">
+            <a:avLst/>
+          </a:prstGeom>
+          <a:solidFill>
+            <a:srgbClr val="F9FAFB"/>
+          </a:solidFill>
+          <a:ln>
+            <a:solidFill>
+              <a:srgbClr val="E5E7EB"/>
+            </a:solidFill>
+          </a:ln>
+        </p:spPr>
+        <p:style>
+          <a:lnRef idx="1">
+            <a:schemeClr val="accent1"/>
+          </a:lnRef>
+          <a:fillRef idx="3">
+            <a:schemeClr val="accent1"/>
+          </a:fillRef>
+          <a:effectRef idx="2">
+            <a:schemeClr val="accent1"/>
+          </a:effectRef>
+          <a:fontRef idx="minor">
+            <a:schemeClr val="lt1"/>
+          </a:fontRef>
+        </p:style>
+        <p:txBody>
+          <a:bodyPr rtlCol="0" anchor="ctr"/>
+          <a:lstStyle/>
+          <a:p>
+            <a:pPr algn="ctr"/>
+            <a:endParaRPr/>
+          </a:p>
+        </p:txBody>
+      </p:sp>
+      <p:sp>
+        <p:nvSpPr>
+          <p:cNvPr id="24" name="Rectangle 23"/>
+          <p:cNvSpPr/>
+          <p:nvPr/>
+        </p:nvSpPr>
+        <p:spPr>
+          <a:xfrm>
+            <a:off x="8119872" y="4160520"/>
+            <a:ext cx="54864" cy="2011680"/>
+          </a:xfrm>
+          <a:prstGeom prst="rect">
+            <a:avLst/>
+          </a:prstGeom>
+          <a:solidFill>
+            <a:srgbClr val="0D9488"/>
+          </a:solidFill>
+          <a:ln>
+            <a:noFill/>
+          </a:ln>
+        </p:spPr>
+        <p:style>
+          <a:lnRef idx="1">
+            <a:schemeClr val="accent1"/>
+          </a:lnRef>
+          <a:fillRef idx="3">
+            <a:schemeClr val="accent1"/>
+          </a:fillRef>
+          <a:effectRef idx="2">
+            <a:schemeClr val="accent1"/>
+          </a:effectRef>
+          <a:fontRef idx="minor">
+            <a:schemeClr val="lt1"/>
+          </a:fontRef>
+        </p:style>
+        <p:txBody>
+          <a:bodyPr rtlCol="0" anchor="ctr"/>
+          <a:lstStyle/>
+          <a:p>
+            <a:pPr algn="ctr"/>
+            <a:endParaRPr/>
+          </a:p>
+        </p:txBody>
+      </p:sp>
+      <p:sp>
+        <p:nvSpPr>
+          <p:cNvPr id="25" name="TextBox 24"/>
+          <p:cNvSpPr txBox="1"/>
+          <p:nvPr/>
+        </p:nvSpPr>
+        <p:spPr>
+          <a:xfrm>
+            <a:off x="8257032" y="4297680"/>
+            <a:ext cx="3291840" cy="1737360"/>
+          </a:xfrm>
+          <a:prstGeom prst="rect">
+            <a:avLst/>
+          </a:prstGeom>
+          <a:noFill/>
+        </p:spPr>
+        <p:txBody>
+          <a:bodyPr wrap="square">
+            <a:spAutoFit/>
+          </a:bodyPr>
+          <a:lstStyle/>
+          <a:p>
+            <a:pPr>
+              <a:spcAft>
+                <a:spcPts val="800"/>
+              </a:spcAft>
+              <a:defRPr sz="1150" b="1">
+                <a:solidFill>
+                  <a:srgbClr val="0D9488"/>
+                </a:solidFill>
+                <a:latin typeface="Arial"/>
+              </a:defRPr>
+            </a:pPr>
+            <a:r>
+              <a:t>SCALABLE PLATFORM</a:t>
+            </a:r>
+          </a:p>
+          <a:p>
+            <a:pPr>
+              <a:lnSpc>
+                <a:spcPct val="110000"/>
+              </a:lnSpc>
+              <a:defRPr sz="1000">
+                <a:solidFill>
+                  <a:srgbClr val="1F2937"/>
+                </a:solidFill>
+                <a:latin typeface="Calibri"/>
+              </a:defRPr>
+            </a:pPr>
+            <a:r>
+              <a:t>Fondations techniques prêtes à absorber une montée en charge massive des interactions omnicanales sans dégradation de performance.</a:t>
             </a:r>
           </a:p>
         </p:txBody>
@@ -8373,7 +8622,7 @@
 </file>
 
 <file path=ppt/slides/slide3.xml><?xml version="1.0" encoding="utf-8"?>
-<p:sld xmlns:a="http://schemas.openxmlformats.org/drawingml/2006/main" xmlns:p="http://schemas.openxmlformats.org/presentationml/2006/main" xmlns:r="http://schemas.openxmlformats.org/officeDocument/2006/relationships">
+<p:sld xmlns:a="http://schemas.openxmlformats.org/drawingml/2006/main" xmlns:r="http://schemas.openxmlformats.org/officeDocument/2006/relationships" xmlns:p="http://schemas.openxmlformats.org/presentationml/2006/main">
   <p:cSld>
     <p:spTree>
       <p:nvGrpSpPr>
@@ -8381,7 +8630,14 @@
         <p:cNvGrpSpPr/>
         <p:nvPr/>
       </p:nvGrpSpPr>
-      <p:grpSpPr/>
+      <p:grpSpPr>
+        <a:xfrm>
+          <a:off x="0" y="0"/>
+          <a:ext cx="0" cy="0"/>
+          <a:chOff x="0" y="0"/>
+          <a:chExt cx="0" cy="0"/>
+        </a:xfrm>
+      </p:grpSpPr>
       <p:sp>
         <p:nvSpPr>
           <p:cNvPr id="2" name="Rectangle 1"/>
@@ -8422,6 +8678,7 @@
           <a:lstStyle/>
           <a:p>
             <a:pPr algn="ctr"/>
+            <a:endParaRPr/>
           </a:p>
         </p:txBody>
       </p:sp>
@@ -8442,7 +8699,7 @@
           <a:noFill/>
         </p:spPr>
         <p:txBody>
-          <a:bodyPr wrap="square" lIns="0" tIns="0" bIns="0" rIns="0">
+          <a:bodyPr wrap="square" lIns="0" tIns="0" rIns="0" bIns="0">
             <a:spAutoFit/>
           </a:bodyPr>
           <a:lstStyle/>
@@ -8478,7 +8735,7 @@
           <a:noFill/>
         </p:spPr>
         <p:txBody>
-          <a:bodyPr wrap="square" lIns="0" tIns="0" bIns="0" rIns="0">
+          <a:bodyPr wrap="square" lIns="0" tIns="0" rIns="0" bIns="0">
             <a:spAutoFit/>
           </a:bodyPr>
           <a:lstStyle/>
@@ -8492,7 +8749,7 @@
               </a:defRPr>
             </a:pPr>
             <a:r>
-              <a:t>2. Product Blueprint &amp; Principes Directeurs</a:t>
+              <a:t>3. Architecture Technique &amp; Socle Commun</a:t>
             </a:r>
           </a:p>
         </p:txBody>
@@ -8537,6 +8794,7 @@
           <a:lstStyle/>
           <a:p>
             <a:pPr algn="ctr"/>
+            <a:endParaRPr/>
           </a:p>
         </p:txBody>
       </p:sp>
@@ -8557,7 +8815,7 @@
           <a:noFill/>
         </p:spPr>
         <p:txBody>
-          <a:bodyPr wrap="none" lIns="0" tIns="0" bIns="0" rIns="0">
+          <a:bodyPr wrap="none" lIns="0" tIns="0" rIns="0" bIns="0">
             <a:spAutoFit/>
           </a:bodyPr>
           <a:lstStyle/>
@@ -8571,57 +8829,21 @@
               </a:defRPr>
             </a:pPr>
             <a:r>
-              <a:t>Ekinox Consulting  |  Proposition de Transformation  |  Confidentialité SanlamAllianz  |  Slide 3</a:t>
-            </a:r>
-          </a:p>
-        </p:txBody>
-      </p:sp>
-      <p:sp>
-        <p:nvSpPr>
-          <p:cNvPr id="7" name="TextBox 6"/>
-          <p:cNvSpPr txBox="1"/>
-          <p:nvPr/>
-        </p:nvSpPr>
-        <p:spPr>
-          <a:xfrm>
-            <a:off x="548640" y="1371600"/>
-            <a:ext cx="11094415" cy="457200"/>
-          </a:xfrm>
-          <a:prstGeom prst="rect">
-            <a:avLst/>
-          </a:prstGeom>
-          <a:noFill/>
-        </p:spPr>
-        <p:txBody>
-          <a:bodyPr wrap="none" lIns="0" tIns="0" bIns="0" rIns="0">
-            <a:spAutoFit/>
-          </a:bodyPr>
-          <a:lstStyle/>
-          <a:p>
-            <a:pPr>
-              <a:defRPr sz="1100" i="1">
-                <a:solidFill>
-                  <a:srgbClr val="1F2937"/>
-                </a:solidFill>
-                <a:latin typeface="Calibri"/>
-              </a:defRPr>
-            </a:pPr>
-            <a:r>
-              <a:t>Le développement du MVP est régi par six principes fondamentaux garantissant la création rapide de valeur métier sans verrous techniques.</a:t>
-            </a:r>
-          </a:p>
-        </p:txBody>
-      </p:sp>
-      <p:sp>
-        <p:nvSpPr>
-          <p:cNvPr id="8" name="Rectangle 7"/>
+              <a:t>Ekinox Consulting  |  Proposition de Transformation  |  Confidentialité SanlamAllianz  |  Slide 4</a:t>
+            </a:r>
+          </a:p>
+        </p:txBody>
+      </p:sp>
+      <p:sp>
+        <p:nvSpPr>
+          <p:cNvPr id="7" name="Rectangle 6"/>
           <p:cNvSpPr/>
           <p:nvPr/>
         </p:nvSpPr>
         <p:spPr>
           <a:xfrm>
-            <a:off x="548640" y="1920240"/>
-            <a:ext cx="3520440" cy="2011680"/>
+            <a:off x="548640" y="1645920"/>
+            <a:ext cx="5303520" cy="4389120"/>
           </a:xfrm>
           <a:prstGeom prst="rect">
             <a:avLst/>
@@ -8654,19 +8876,20 @@
           <a:lstStyle/>
           <a:p>
             <a:pPr algn="ctr"/>
-          </a:p>
-        </p:txBody>
-      </p:sp>
-      <p:sp>
-        <p:nvSpPr>
-          <p:cNvPr id="9" name="Rectangle 8"/>
+            <a:endParaRPr/>
+          </a:p>
+        </p:txBody>
+      </p:sp>
+      <p:sp>
+        <p:nvSpPr>
+          <p:cNvPr id="8" name="Rectangle 7"/>
           <p:cNvSpPr/>
           <p:nvPr/>
         </p:nvSpPr>
         <p:spPr>
           <a:xfrm>
-            <a:off x="548640" y="1920240"/>
-            <a:ext cx="54864" cy="2011680"/>
+            <a:off x="548640" y="1645920"/>
+            <a:ext cx="73152" cy="4389120"/>
           </a:xfrm>
           <a:prstGeom prst="rect">
             <a:avLst/>
@@ -8697,19 +8920,20 @@
           <a:lstStyle/>
           <a:p>
             <a:pPr algn="ctr"/>
-          </a:p>
-        </p:txBody>
-      </p:sp>
-      <p:sp>
-        <p:nvSpPr>
-          <p:cNvPr id="10" name="TextBox 9"/>
+            <a:endParaRPr/>
+          </a:p>
+        </p:txBody>
+      </p:sp>
+      <p:sp>
+        <p:nvSpPr>
+          <p:cNvPr id="9" name="TextBox 8"/>
           <p:cNvSpPr txBox="1"/>
           <p:nvPr/>
         </p:nvSpPr>
         <p:spPr>
           <a:xfrm>
-            <a:off x="685800" y="2057400"/>
-            <a:ext cx="3291840" cy="1737360"/>
+            <a:off x="731520" y="1828800"/>
+            <a:ext cx="4937760" cy="4023360"/>
           </a:xfrm>
           <a:prstGeom prst="rect">
             <a:avLst/>
@@ -8724,25 +8948,47 @@
           <a:p>
             <a:pPr>
               <a:spcAft>
+                <a:spcPts val="1400"/>
+              </a:spcAft>
+              <a:defRPr sz="1400" b="1">
+                <a:solidFill>
+                  <a:srgbClr val="86318E"/>
+                </a:solidFill>
+                <a:latin typeface="Arial"/>
+              </a:defRPr>
+            </a:pPr>
+            <a:r>
+              <a:t>ARCHITECTURE ORIENTÉE ÉVÉNEMENTS</a:t>
+            </a:r>
+          </a:p>
+          <a:p>
+            <a:pPr>
+              <a:lnSpc>
+                <a:spcPct val="115000"/>
+              </a:lnSpc>
+              <a:spcAft>
                 <a:spcPts val="800"/>
               </a:spcAft>
-              <a:defRPr sz="1150" b="1">
-                <a:solidFill>
-                  <a:srgbClr val="86318E"/>
-                </a:solidFill>
-                <a:latin typeface="Arial"/>
-              </a:defRPr>
-            </a:pPr>
-            <a:r>
-              <a:t>BUSINESS FIRST</a:t>
+              <a:defRPr sz="1100">
+                <a:solidFill>
+                  <a:srgbClr val="1F2937"/>
+                </a:solidFill>
+                <a:latin typeface="Calibri"/>
+              </a:defRPr>
+            </a:pPr>
+            <a:r>
+              <a:t>Une plateforme orientée micro-services, orchestrant les interactions multicanales via une couche d'intelligence centralisée.</a:t>
             </a:r>
           </a:p>
           <a:p>
             <a:pPr>
               <a:lnSpc>
-                <a:spcPct val="110000"/>
+                <a:spcPct val="115000"/>
               </a:lnSpc>
-              <a:defRPr sz="1000">
+              <a:spcAft>
+                <a:spcPts val="800"/>
+              </a:spcAft>
+              <a:defRPr sz="1100">
                 <a:solidFill>
                   <a:srgbClr val="1F2937"/>
                 </a:solidFill>
@@ -8750,21 +8996,21 @@
               </a:defRPr>
             </a:pPr>
             <a:r>
-              <a:t>Chaque fonctionnalité développée doit démontrer un impact direct sur le taux de conversion ou le coût d'acquisition.</a:t>
-            </a:r>
-          </a:p>
-        </p:txBody>
-      </p:sp>
-      <p:sp>
-        <p:nvSpPr>
-          <p:cNvPr id="11" name="Rectangle 10"/>
+              <a:t>Intégration SI : Connexion asynchrone aux systèmes legacy pour éviter les goulots d'étranglement en phase de devis.</a:t>
+            </a:r>
+          </a:p>
+        </p:txBody>
+      </p:sp>
+      <p:sp>
+        <p:nvSpPr>
+          <p:cNvPr id="10" name="Rectangle 9"/>
           <p:cNvSpPr/>
           <p:nvPr/>
         </p:nvSpPr>
         <p:spPr>
           <a:xfrm>
-            <a:off x="4334256" y="1920240"/>
-            <a:ext cx="3520440" cy="2011680"/>
+            <a:off x="6339535" y="1645920"/>
+            <a:ext cx="5303520" cy="4389120"/>
           </a:xfrm>
           <a:prstGeom prst="rect">
             <a:avLst/>
@@ -8797,19 +9043,20 @@
           <a:lstStyle/>
           <a:p>
             <a:pPr algn="ctr"/>
-          </a:p>
-        </p:txBody>
-      </p:sp>
-      <p:sp>
-        <p:nvSpPr>
-          <p:cNvPr id="12" name="Rectangle 11"/>
+            <a:endParaRPr/>
+          </a:p>
+        </p:txBody>
+      </p:sp>
+      <p:sp>
+        <p:nvSpPr>
+          <p:cNvPr id="11" name="Rectangle 10"/>
           <p:cNvSpPr/>
           <p:nvPr/>
         </p:nvSpPr>
         <p:spPr>
           <a:xfrm>
-            <a:off x="4334256" y="1920240"/>
-            <a:ext cx="54864" cy="2011680"/>
+            <a:off x="6339535" y="1645920"/>
+            <a:ext cx="73152" cy="4389120"/>
           </a:xfrm>
           <a:prstGeom prst="rect">
             <a:avLst/>
@@ -8840,19 +9087,20 @@
           <a:lstStyle/>
           <a:p>
             <a:pPr algn="ctr"/>
-          </a:p>
-        </p:txBody>
-      </p:sp>
-      <p:sp>
-        <p:nvSpPr>
-          <p:cNvPr id="13" name="TextBox 12"/>
+            <a:endParaRPr/>
+          </a:p>
+        </p:txBody>
+      </p:sp>
+      <p:sp>
+        <p:nvSpPr>
+          <p:cNvPr id="12" name="TextBox 11"/>
           <p:cNvSpPr txBox="1"/>
           <p:nvPr/>
         </p:nvSpPr>
         <p:spPr>
           <a:xfrm>
-            <a:off x="4471416" y="2057400"/>
-            <a:ext cx="3291840" cy="1737360"/>
+            <a:off x="6522415" y="1828800"/>
+            <a:ext cx="4937760" cy="4023360"/>
           </a:xfrm>
           <a:prstGeom prst="rect">
             <a:avLst/>
@@ -8867,9 +9115,9 @@
           <a:p>
             <a:pPr>
               <a:spcAft>
-                <a:spcPts val="800"/>
+                <a:spcPts val="1400"/>
               </a:spcAft>
-              <a:defRPr sz="1150" b="1">
+              <a:defRPr sz="1400" b="1">
                 <a:solidFill>
                   <a:srgbClr val="0D9488"/>
                 </a:solidFill>
@@ -8877,7 +9125,7 @@
               </a:defRPr>
             </a:pPr>
             <a:r>
-              <a:t>API-READY</a:t>
+              <a:t>COMPOSANTS TECHNOLOGIQUES CLÉS</a:t>
             </a:r>
           </a:p>
           <a:p>
@@ -8885,7 +9133,10 @@
               <a:lnSpc>
                 <a:spcPct val="110000"/>
               </a:lnSpc>
-              <a:defRPr sz="1000">
+              <a:spcAft>
+                <a:spcPts val="600"/>
+              </a:spcAft>
+              <a:defRPr sz="1050">
                 <a:solidFill>
                   <a:srgbClr val="1F2937"/>
                 </a:solidFill>
@@ -8893,579 +9144,7 @@
               </a:defRPr>
             </a:pPr>
             <a:r>
-              <a:t>Architecture modulaire conçue pour s'intégrer de manière transparente avec les canaux de distribution existants et futurs.</a:t>
-            </a:r>
-          </a:p>
-        </p:txBody>
-      </p:sp>
-      <p:sp>
-        <p:nvSpPr>
-          <p:cNvPr id="14" name="Rectangle 13"/>
-          <p:cNvSpPr/>
-          <p:nvPr/>
-        </p:nvSpPr>
-        <p:spPr>
-          <a:xfrm>
-            <a:off x="8119872" y="1920240"/>
-            <a:ext cx="3520440" cy="2011680"/>
-          </a:xfrm>
-          <a:prstGeom prst="rect">
-            <a:avLst/>
-          </a:prstGeom>
-          <a:solidFill>
-            <a:srgbClr val="F9FAFB"/>
-          </a:solidFill>
-          <a:ln>
-            <a:solidFill>
-              <a:srgbClr val="E5E7EB"/>
-            </a:solidFill>
-          </a:ln>
-        </p:spPr>
-        <p:style>
-          <a:lnRef idx="1">
-            <a:schemeClr val="accent1"/>
-          </a:lnRef>
-          <a:fillRef idx="3">
-            <a:schemeClr val="accent1"/>
-          </a:fillRef>
-          <a:effectRef idx="2">
-            <a:schemeClr val="accent1"/>
-          </a:effectRef>
-          <a:fontRef idx="minor">
-            <a:schemeClr val="lt1"/>
-          </a:fontRef>
-        </p:style>
-        <p:txBody>
-          <a:bodyPr rtlCol="0" anchor="ctr"/>
-          <a:lstStyle/>
-          <a:p>
-            <a:pPr algn="ctr"/>
-          </a:p>
-        </p:txBody>
-      </p:sp>
-      <p:sp>
-        <p:nvSpPr>
-          <p:cNvPr id="15" name="Rectangle 14"/>
-          <p:cNvSpPr/>
-          <p:nvPr/>
-        </p:nvSpPr>
-        <p:spPr>
-          <a:xfrm>
-            <a:off x="8119872" y="1920240"/>
-            <a:ext cx="54864" cy="2011680"/>
-          </a:xfrm>
-          <a:prstGeom prst="rect">
-            <a:avLst/>
-          </a:prstGeom>
-          <a:solidFill>
-            <a:srgbClr val="86318E"/>
-          </a:solidFill>
-          <a:ln>
-            <a:noFill/>
-          </a:ln>
-        </p:spPr>
-        <p:style>
-          <a:lnRef idx="1">
-            <a:schemeClr val="accent1"/>
-          </a:lnRef>
-          <a:fillRef idx="3">
-            <a:schemeClr val="accent1"/>
-          </a:fillRef>
-          <a:effectRef idx="2">
-            <a:schemeClr val="accent1"/>
-          </a:effectRef>
-          <a:fontRef idx="minor">
-            <a:schemeClr val="lt1"/>
-          </a:fontRef>
-        </p:style>
-        <p:txBody>
-          <a:bodyPr rtlCol="0" anchor="ctr"/>
-          <a:lstStyle/>
-          <a:p>
-            <a:pPr algn="ctr"/>
-          </a:p>
-        </p:txBody>
-      </p:sp>
-      <p:sp>
-        <p:nvSpPr>
-          <p:cNvPr id="16" name="TextBox 15"/>
-          <p:cNvSpPr txBox="1"/>
-          <p:nvPr/>
-        </p:nvSpPr>
-        <p:spPr>
-          <a:xfrm>
-            <a:off x="8257032" y="2057400"/>
-            <a:ext cx="3291840" cy="1737360"/>
-          </a:xfrm>
-          <a:prstGeom prst="rect">
-            <a:avLst/>
-          </a:prstGeom>
-          <a:noFill/>
-        </p:spPr>
-        <p:txBody>
-          <a:bodyPr wrap="square">
-            <a:spAutoFit/>
-          </a:bodyPr>
-          <a:lstStyle/>
-          <a:p>
-            <a:pPr>
-              <a:spcAft>
-                <a:spcPts val="800"/>
-              </a:spcAft>
-              <a:defRPr sz="1150" b="1">
-                <a:solidFill>
-                  <a:srgbClr val="86318E"/>
-                </a:solidFill>
-                <a:latin typeface="Arial"/>
-              </a:defRPr>
-            </a:pPr>
-            <a:r>
-              <a:t>MVP BY DESIGN</a:t>
-            </a:r>
-          </a:p>
-          <a:p>
-            <a:pPr>
-              <a:lnSpc>
-                <a:spcPct val="110000"/>
-              </a:lnSpc>
-              <a:defRPr sz="1000">
-                <a:solidFill>
-                  <a:srgbClr val="1F2937"/>
-                </a:solidFill>
-                <a:latin typeface="Calibri"/>
-              </a:defRPr>
-            </a:pPr>
-            <a:r>
-              <a:t>Lancement rapide avec un périmètre restreint pour valider la traction commerciale avant complexification technique.</a:t>
-            </a:r>
-          </a:p>
-        </p:txBody>
-      </p:sp>
-      <p:sp>
-        <p:nvSpPr>
-          <p:cNvPr id="17" name="Rectangle 16"/>
-          <p:cNvSpPr/>
-          <p:nvPr/>
-        </p:nvSpPr>
-        <p:spPr>
-          <a:xfrm>
-            <a:off x="548640" y="4160520"/>
-            <a:ext cx="3520440" cy="2011680"/>
-          </a:xfrm>
-          <a:prstGeom prst="rect">
-            <a:avLst/>
-          </a:prstGeom>
-          <a:solidFill>
-            <a:srgbClr val="F9FAFB"/>
-          </a:solidFill>
-          <a:ln>
-            <a:solidFill>
-              <a:srgbClr val="E5E7EB"/>
-            </a:solidFill>
-          </a:ln>
-        </p:spPr>
-        <p:style>
-          <a:lnRef idx="1">
-            <a:schemeClr val="accent1"/>
-          </a:lnRef>
-          <a:fillRef idx="3">
-            <a:schemeClr val="accent1"/>
-          </a:fillRef>
-          <a:effectRef idx="2">
-            <a:schemeClr val="accent1"/>
-          </a:effectRef>
-          <a:fontRef idx="minor">
-            <a:schemeClr val="lt1"/>
-          </a:fontRef>
-        </p:style>
-        <p:txBody>
-          <a:bodyPr rtlCol="0" anchor="ctr"/>
-          <a:lstStyle/>
-          <a:p>
-            <a:pPr algn="ctr"/>
-          </a:p>
-        </p:txBody>
-      </p:sp>
-      <p:sp>
-        <p:nvSpPr>
-          <p:cNvPr id="18" name="Rectangle 17"/>
-          <p:cNvSpPr/>
-          <p:nvPr/>
-        </p:nvSpPr>
-        <p:spPr>
-          <a:xfrm>
-            <a:off x="548640" y="4160520"/>
-            <a:ext cx="54864" cy="2011680"/>
-          </a:xfrm>
-          <a:prstGeom prst="rect">
-            <a:avLst/>
-          </a:prstGeom>
-          <a:solidFill>
-            <a:srgbClr val="0D9488"/>
-          </a:solidFill>
-          <a:ln>
-            <a:noFill/>
-          </a:ln>
-        </p:spPr>
-        <p:style>
-          <a:lnRef idx="1">
-            <a:schemeClr val="accent1"/>
-          </a:lnRef>
-          <a:fillRef idx="3">
-            <a:schemeClr val="accent1"/>
-          </a:fillRef>
-          <a:effectRef idx="2">
-            <a:schemeClr val="accent1"/>
-          </a:effectRef>
-          <a:fontRef idx="minor">
-            <a:schemeClr val="lt1"/>
-          </a:fontRef>
-        </p:style>
-        <p:txBody>
-          <a:bodyPr rtlCol="0" anchor="ctr"/>
-          <a:lstStyle/>
-          <a:p>
-            <a:pPr algn="ctr"/>
-          </a:p>
-        </p:txBody>
-      </p:sp>
-      <p:sp>
-        <p:nvSpPr>
-          <p:cNvPr id="19" name="TextBox 18"/>
-          <p:cNvSpPr txBox="1"/>
-          <p:nvPr/>
-        </p:nvSpPr>
-        <p:spPr>
-          <a:xfrm>
-            <a:off x="685800" y="4297680"/>
-            <a:ext cx="3291840" cy="1737360"/>
-          </a:xfrm>
-          <a:prstGeom prst="rect">
-            <a:avLst/>
-          </a:prstGeom>
-          <a:noFill/>
-        </p:spPr>
-        <p:txBody>
-          <a:bodyPr wrap="square">
-            <a:spAutoFit/>
-          </a:bodyPr>
-          <a:lstStyle/>
-          <a:p>
-            <a:pPr>
-              <a:spcAft>
-                <a:spcPts val="800"/>
-              </a:spcAft>
-              <a:defRPr sz="1150" b="1">
-                <a:solidFill>
-                  <a:srgbClr val="0D9488"/>
-                </a:solidFill>
-                <a:latin typeface="Arial"/>
-              </a:defRPr>
-            </a:pPr>
-            <a:r>
-              <a:t>AI AS AN ENABLER</a:t>
-            </a:r>
-          </a:p>
-          <a:p>
-            <a:pPr>
-              <a:lnSpc>
-                <a:spcPct val="110000"/>
-              </a:lnSpc>
-              <a:defRPr sz="1000">
-                <a:solidFill>
-                  <a:srgbClr val="1F2937"/>
-                </a:solidFill>
-                <a:latin typeface="Calibri"/>
-              </a:defRPr>
-            </a:pPr>
-            <a:r>
-              <a:t>L'Intelligence Artificielle opère en coulisse pour augmenter les capacités de vente sans interférer avec l'expérience utilisateur naturelle.</a:t>
-            </a:r>
-          </a:p>
-        </p:txBody>
-      </p:sp>
-      <p:sp>
-        <p:nvSpPr>
-          <p:cNvPr id="20" name="Rectangle 19"/>
-          <p:cNvSpPr/>
-          <p:nvPr/>
-        </p:nvSpPr>
-        <p:spPr>
-          <a:xfrm>
-            <a:off x="4334256" y="4160520"/>
-            <a:ext cx="3520440" cy="2011680"/>
-          </a:xfrm>
-          <a:prstGeom prst="rect">
-            <a:avLst/>
-          </a:prstGeom>
-          <a:solidFill>
-            <a:srgbClr val="F9FAFB"/>
-          </a:solidFill>
-          <a:ln>
-            <a:solidFill>
-              <a:srgbClr val="E5E7EB"/>
-            </a:solidFill>
-          </a:ln>
-        </p:spPr>
-        <p:style>
-          <a:lnRef idx="1">
-            <a:schemeClr val="accent1"/>
-          </a:lnRef>
-          <a:fillRef idx="3">
-            <a:schemeClr val="accent1"/>
-          </a:fillRef>
-          <a:effectRef idx="2">
-            <a:schemeClr val="accent1"/>
-          </a:effectRef>
-          <a:fontRef idx="minor">
-            <a:schemeClr val="lt1"/>
-          </a:fontRef>
-        </p:style>
-        <p:txBody>
-          <a:bodyPr rtlCol="0" anchor="ctr"/>
-          <a:lstStyle/>
-          <a:p>
-            <a:pPr algn="ctr"/>
-          </a:p>
-        </p:txBody>
-      </p:sp>
-      <p:sp>
-        <p:nvSpPr>
-          <p:cNvPr id="21" name="Rectangle 20"/>
-          <p:cNvSpPr/>
-          <p:nvPr/>
-        </p:nvSpPr>
-        <p:spPr>
-          <a:xfrm>
-            <a:off x="4334256" y="4160520"/>
-            <a:ext cx="54864" cy="2011680"/>
-          </a:xfrm>
-          <a:prstGeom prst="rect">
-            <a:avLst/>
-          </a:prstGeom>
-          <a:solidFill>
-            <a:srgbClr val="86318E"/>
-          </a:solidFill>
-          <a:ln>
-            <a:noFill/>
-          </a:ln>
-        </p:spPr>
-        <p:style>
-          <a:lnRef idx="1">
-            <a:schemeClr val="accent1"/>
-          </a:lnRef>
-          <a:fillRef idx="3">
-            <a:schemeClr val="accent1"/>
-          </a:fillRef>
-          <a:effectRef idx="2">
-            <a:schemeClr val="accent1"/>
-          </a:effectRef>
-          <a:fontRef idx="minor">
-            <a:schemeClr val="lt1"/>
-          </a:fontRef>
-        </p:style>
-        <p:txBody>
-          <a:bodyPr rtlCol="0" anchor="ctr"/>
-          <a:lstStyle/>
-          <a:p>
-            <a:pPr algn="ctr"/>
-          </a:p>
-        </p:txBody>
-      </p:sp>
-      <p:sp>
-        <p:nvSpPr>
-          <p:cNvPr id="22" name="TextBox 21"/>
-          <p:cNvSpPr txBox="1"/>
-          <p:nvPr/>
-        </p:nvSpPr>
-        <p:spPr>
-          <a:xfrm>
-            <a:off x="4471416" y="4297680"/>
-            <a:ext cx="3291840" cy="1737360"/>
-          </a:xfrm>
-          <a:prstGeom prst="rect">
-            <a:avLst/>
-          </a:prstGeom>
-          <a:noFill/>
-        </p:spPr>
-        <p:txBody>
-          <a:bodyPr wrap="square">
-            <a:spAutoFit/>
-          </a:bodyPr>
-          <a:lstStyle/>
-          <a:p>
-            <a:pPr>
-              <a:spcAft>
-                <a:spcPts val="800"/>
-              </a:spcAft>
-              <a:defRPr sz="1150" b="1">
-                <a:solidFill>
-                  <a:srgbClr val="86318E"/>
-                </a:solidFill>
-                <a:latin typeface="Arial"/>
-              </a:defRPr>
-            </a:pPr>
-            <a:r>
-              <a:t>EXPLAINABILITY BY DEFAULT</a:t>
-            </a:r>
-          </a:p>
-          <a:p>
-            <a:pPr>
-              <a:lnSpc>
-                <a:spcPct val="110000"/>
-              </a:lnSpc>
-              <a:defRPr sz="1000">
-                <a:solidFill>
-                  <a:srgbClr val="1F2937"/>
-                </a:solidFill>
-                <a:latin typeface="Calibri"/>
-              </a:defRPr>
-            </a:pPr>
-            <a:r>
-              <a:t>Toute recommandation produit est justifiée par les besoins exprimés par le client, garantissant transparence et conformité.</a:t>
-            </a:r>
-          </a:p>
-        </p:txBody>
-      </p:sp>
-      <p:sp>
-        <p:nvSpPr>
-          <p:cNvPr id="23" name="Rectangle 22"/>
-          <p:cNvSpPr/>
-          <p:nvPr/>
-        </p:nvSpPr>
-        <p:spPr>
-          <a:xfrm>
-            <a:off x="8119872" y="4160520"/>
-            <a:ext cx="3520440" cy="2011680"/>
-          </a:xfrm>
-          <a:prstGeom prst="rect">
-            <a:avLst/>
-          </a:prstGeom>
-          <a:solidFill>
-            <a:srgbClr val="F9FAFB"/>
-          </a:solidFill>
-          <a:ln>
-            <a:solidFill>
-              <a:srgbClr val="E5E7EB"/>
-            </a:solidFill>
-          </a:ln>
-        </p:spPr>
-        <p:style>
-          <a:lnRef idx="1">
-            <a:schemeClr val="accent1"/>
-          </a:lnRef>
-          <a:fillRef idx="3">
-            <a:schemeClr val="accent1"/>
-          </a:fillRef>
-          <a:effectRef idx="2">
-            <a:schemeClr val="accent1"/>
-          </a:effectRef>
-          <a:fontRef idx="minor">
-            <a:schemeClr val="lt1"/>
-          </a:fontRef>
-        </p:style>
-        <p:txBody>
-          <a:bodyPr rtlCol="0" anchor="ctr"/>
-          <a:lstStyle/>
-          <a:p>
-            <a:pPr algn="ctr"/>
-          </a:p>
-        </p:txBody>
-      </p:sp>
-      <p:sp>
-        <p:nvSpPr>
-          <p:cNvPr id="24" name="Rectangle 23"/>
-          <p:cNvSpPr/>
-          <p:nvPr/>
-        </p:nvSpPr>
-        <p:spPr>
-          <a:xfrm>
-            <a:off x="8119872" y="4160520"/>
-            <a:ext cx="54864" cy="2011680"/>
-          </a:xfrm>
-          <a:prstGeom prst="rect">
-            <a:avLst/>
-          </a:prstGeom>
-          <a:solidFill>
-            <a:srgbClr val="0D9488"/>
-          </a:solidFill>
-          <a:ln>
-            <a:noFill/>
-          </a:ln>
-        </p:spPr>
-        <p:style>
-          <a:lnRef idx="1">
-            <a:schemeClr val="accent1"/>
-          </a:lnRef>
-          <a:fillRef idx="3">
-            <a:schemeClr val="accent1"/>
-          </a:fillRef>
-          <a:effectRef idx="2">
-            <a:schemeClr val="accent1"/>
-          </a:effectRef>
-          <a:fontRef idx="minor">
-            <a:schemeClr val="lt1"/>
-          </a:fontRef>
-        </p:style>
-        <p:txBody>
-          <a:bodyPr rtlCol="0" anchor="ctr"/>
-          <a:lstStyle/>
-          <a:p>
-            <a:pPr algn="ctr"/>
-          </a:p>
-        </p:txBody>
-      </p:sp>
-      <p:sp>
-        <p:nvSpPr>
-          <p:cNvPr id="25" name="TextBox 24"/>
-          <p:cNvSpPr txBox="1"/>
-          <p:nvPr/>
-        </p:nvSpPr>
-        <p:spPr>
-          <a:xfrm>
-            <a:off x="8257032" y="4297680"/>
-            <a:ext cx="3291840" cy="1737360"/>
-          </a:xfrm>
-          <a:prstGeom prst="rect">
-            <a:avLst/>
-          </a:prstGeom>
-          <a:noFill/>
-        </p:spPr>
-        <p:txBody>
-          <a:bodyPr wrap="square">
-            <a:spAutoFit/>
-          </a:bodyPr>
-          <a:lstStyle/>
-          <a:p>
-            <a:pPr>
-              <a:spcAft>
-                <a:spcPts val="800"/>
-              </a:spcAft>
-              <a:defRPr sz="1150" b="1">
-                <a:solidFill>
-                  <a:srgbClr val="0D9488"/>
-                </a:solidFill>
-                <a:latin typeface="Arial"/>
-              </a:defRPr>
-            </a:pPr>
-            <a:r>
-              <a:t>SCALABLE PLATFORM</a:t>
-            </a:r>
-          </a:p>
-          <a:p>
-            <a:pPr>
-              <a:lnSpc>
-                <a:spcPct val="110000"/>
-              </a:lnSpc>
-              <a:defRPr sz="1000">
-                <a:solidFill>
-                  <a:srgbClr val="1F2937"/>
-                </a:solidFill>
-                <a:latin typeface="Calibri"/>
-              </a:defRPr>
-            </a:pPr>
-            <a:r>
-              <a:t>Fondations techniques prêtes à absorber une montée en charge massive des interactions omnicanales sans dégradation de performance.</a:t>
+              <a:t>Moteur de dialogue cognitif, Référentiel de produits décentralisé, Hub omnicanal de messagerie, Base de connaissances unifiée.</a:t>
             </a:r>
           </a:p>
         </p:txBody>
@@ -9479,7 +9158,7 @@
 </file>
 
 <file path=ppt/slides/slide4.xml><?xml version="1.0" encoding="utf-8"?>
-<p:sld xmlns:a="http://schemas.openxmlformats.org/drawingml/2006/main" xmlns:p="http://schemas.openxmlformats.org/presentationml/2006/main" xmlns:r="http://schemas.openxmlformats.org/officeDocument/2006/relationships">
+<p:sld xmlns:a="http://schemas.openxmlformats.org/drawingml/2006/main" xmlns:r="http://schemas.openxmlformats.org/officeDocument/2006/relationships" xmlns:p="http://schemas.openxmlformats.org/presentationml/2006/main">
   <p:cSld>
     <p:spTree>
       <p:nvGrpSpPr>
@@ -9487,7 +9166,14 @@
         <p:cNvGrpSpPr/>
         <p:nvPr/>
       </p:nvGrpSpPr>
-      <p:grpSpPr/>
+      <p:grpSpPr>
+        <a:xfrm>
+          <a:off x="0" y="0"/>
+          <a:ext cx="0" cy="0"/>
+          <a:chOff x="0" y="0"/>
+          <a:chExt cx="0" cy="0"/>
+        </a:xfrm>
+      </p:grpSpPr>
       <p:sp>
         <p:nvSpPr>
           <p:cNvPr id="2" name="Rectangle 1"/>
@@ -9528,6 +9214,7 @@
           <a:lstStyle/>
           <a:p>
             <a:pPr algn="ctr"/>
+            <a:endParaRPr/>
           </a:p>
         </p:txBody>
       </p:sp>
@@ -9548,7 +9235,7 @@
           <a:noFill/>
         </p:spPr>
         <p:txBody>
-          <a:bodyPr wrap="square" lIns="0" tIns="0" bIns="0" rIns="0">
+          <a:bodyPr wrap="square" lIns="0" tIns="0" rIns="0" bIns="0">
             <a:spAutoFit/>
           </a:bodyPr>
           <a:lstStyle/>
@@ -9584,7 +9271,7 @@
           <a:noFill/>
         </p:spPr>
         <p:txBody>
-          <a:bodyPr wrap="square" lIns="0" tIns="0" bIns="0" rIns="0">
+          <a:bodyPr wrap="square" lIns="0" tIns="0" rIns="0" bIns="0">
             <a:spAutoFit/>
           </a:bodyPr>
           <a:lstStyle/>
@@ -9598,7 +9285,7 @@
               </a:defRPr>
             </a:pPr>
             <a:r>
-              <a:t>3. Architecture Technique &amp; Socle Commun</a:t>
+              <a:t>4.1 Capacité : Acquisition Omnicanale</a:t>
             </a:r>
           </a:p>
         </p:txBody>
@@ -9643,6 +9330,7 @@
           <a:lstStyle/>
           <a:p>
             <a:pPr algn="ctr"/>
+            <a:endParaRPr/>
           </a:p>
         </p:txBody>
       </p:sp>
@@ -9663,7 +9351,7 @@
           <a:noFill/>
         </p:spPr>
         <p:txBody>
-          <a:bodyPr wrap="none" lIns="0" tIns="0" bIns="0" rIns="0">
+          <a:bodyPr wrap="none" lIns="0" tIns="0" rIns="0" bIns="0">
             <a:spAutoFit/>
           </a:bodyPr>
           <a:lstStyle/>
@@ -9677,7 +9365,7 @@
               </a:defRPr>
             </a:pPr>
             <a:r>
-              <a:t>Ekinox Consulting  |  Proposition de Transformation  |  Confidentialité SanlamAllianz  |  Slide 4</a:t>
+              <a:t>Ekinox Consulting  |  Proposition de Transformation  |  Confidentialité SanlamAllianz  |  Slide 5</a:t>
             </a:r>
           </a:p>
         </p:txBody>
@@ -9724,6 +9412,7 @@
           <a:lstStyle/>
           <a:p>
             <a:pPr algn="ctr"/>
+            <a:endParaRPr/>
           </a:p>
         </p:txBody>
       </p:sp>
@@ -9767,6 +9456,7 @@
           <a:lstStyle/>
           <a:p>
             <a:pPr algn="ctr"/>
+            <a:endParaRPr/>
           </a:p>
         </p:txBody>
       </p:sp>
@@ -9804,7 +9494,7 @@
               </a:defRPr>
             </a:pPr>
             <a:r>
-              <a:t>ARCHITECTURE ORIENTÉE ÉVÉNEMENTS</a:t>
+              <a:t>CADRAGE CLIENT &amp; VALEUR MÉTIER</a:t>
             </a:r>
           </a:p>
           <a:p>
@@ -9823,7 +9513,11 @@
               </a:defRPr>
             </a:pPr>
             <a:r>
-              <a:t>Une plateforme orientée micro-services, orchestrant les interactions multicanales via une couche d'intelligence centralisée.</a:t>
+              <a:t>Vision &amp; Objectif :</a:t>
+            </a:r>
+            <a:br/>
+            <a:r>
+              <a:t>Être présent là où se trouvent vos futurs clients, en fluidifiant le point d'entrée.</a:t>
             </a:r>
           </a:p>
           <a:p>
@@ -9842,7 +9536,57 @@
               </a:defRPr>
             </a:pPr>
             <a:r>
-              <a:t>Intégration SI : Connexion asynchrone aux systèmes legacy pour éviter les goulots d'étranglement en phase de devis.</a:t>
+              <a:t>Valeur Métier :</a:t>
+            </a:r>
+            <a:br/>
+            <a:r>
+              <a:t>Capte les prospects sur leurs canaux favoris (réseaux sociaux, messagerie, web) avec une expérience unifiée.</a:t>
+            </a:r>
+          </a:p>
+          <a:p>
+            <a:pPr>
+              <a:lnSpc>
+                <a:spcPct val="115000"/>
+              </a:lnSpc>
+              <a:spcAft>
+                <a:spcPts val="800"/>
+              </a:spcAft>
+              <a:defRPr sz="1100">
+                <a:solidFill>
+                  <a:srgbClr val="1F2937"/>
+                </a:solidFill>
+                <a:latin typeface="Calibri"/>
+              </a:defRPr>
+            </a:pPr>
+            <a:r>
+              <a:t>Parcours Prospect :</a:t>
+            </a:r>
+            <a:br/>
+            <a:r>
+              <a:t>Un prospect scanne un QR code sur une affiche publicitaire et démarre instantanément une conversation WhatsApp avec SanlamAllianz.</a:t>
+            </a:r>
+          </a:p>
+          <a:p>
+            <a:pPr>
+              <a:lnSpc>
+                <a:spcPct val="115000"/>
+              </a:lnSpc>
+              <a:spcAft>
+                <a:spcPts val="800"/>
+              </a:spcAft>
+              <a:defRPr sz="1100">
+                <a:solidFill>
+                  <a:srgbClr val="1F2937"/>
+                </a:solidFill>
+                <a:latin typeface="Calibri"/>
+              </a:defRPr>
+            </a:pPr>
+            <a:r>
+              <a:t>Impact Utilisateur :</a:t>
+            </a:r>
+            <a:br/>
+            <a:r>
+              <a:t>Réduction drastique de la friction à l'entrée et augmentation du volume de leads qualifiés.</a:t>
             </a:r>
           </a:p>
         </p:txBody>
@@ -9889,6 +9633,7 @@
           <a:lstStyle/>
           <a:p>
             <a:pPr algn="ctr"/>
+            <a:endParaRPr/>
           </a:p>
         </p:txBody>
       </p:sp>
@@ -9932,6 +9677,7 @@
           <a:lstStyle/>
           <a:p>
             <a:pPr algn="ctr"/>
+            <a:endParaRPr/>
           </a:p>
         </p:txBody>
       </p:sp>
@@ -9969,7 +9715,7 @@
               </a:defRPr>
             </a:pPr>
             <a:r>
-              <a:t>COMPOSANTS TECHNOLOGIQUES CLÉS</a:t>
+              <a:t>FICHE IMPLÉMENTATION INTERNE (MVP)</a:t>
             </a:r>
           </a:p>
           <a:p>
@@ -9988,7 +9734,80 @@
               </a:defRPr>
             </a:pPr>
             <a:r>
-              <a:t>Moteur de dialogue cognitif, Référentiel de produits décentralisé, Hub omnicanal de messagerie, Base de connaissances unifiée.</a:t>
+              <a:t>Données Nécessaires MVP :</a:t>
+            </a:r>
+            <a:br/>
+            <a:r>
+              <a:t>URL des campagnes, configurations des canaux sociaux.</a:t>
+            </a:r>
+          </a:p>
+          <a:p>
+            <a:pPr>
+              <a:lnSpc>
+                <a:spcPct val="110000"/>
+              </a:lnSpc>
+              <a:spcAft>
+                <a:spcPts val="600"/>
+              </a:spcAft>
+              <a:defRPr sz="1050">
+                <a:solidFill>
+                  <a:srgbClr val="1F2937"/>
+                </a:solidFill>
+                <a:latin typeface="Calibri"/>
+              </a:defRPr>
+            </a:pPr>
+            <a:r>
+              <a:t>Stack Technique MVP :</a:t>
+            </a:r>
+            <a:br/>
+            <a:r>
+              <a:t>Connecteurs Webhooks, API Graph Meta, API WhatsApp Business.</a:t>
+            </a:r>
+          </a:p>
+          <a:p>
+            <a:pPr>
+              <a:lnSpc>
+                <a:spcPct val="110000"/>
+              </a:lnSpc>
+              <a:spcAft>
+                <a:spcPts val="600"/>
+              </a:spcAft>
+              <a:defRPr sz="1050">
+                <a:solidFill>
+                  <a:srgbClr val="1F2937"/>
+                </a:solidFill>
+                <a:latin typeface="Calibri"/>
+              </a:defRPr>
+            </a:pPr>
+            <a:r>
+              <a:t>APIs &amp; Services :</a:t>
+            </a:r>
+            <a:br/>
+            <a:r>
+              <a:t>Gateway omnicanale.</a:t>
+            </a:r>
+          </a:p>
+          <a:p>
+            <a:pPr>
+              <a:lnSpc>
+                <a:spcPct val="110000"/>
+              </a:lnSpc>
+              <a:spcAft>
+                <a:spcPts val="600"/>
+              </a:spcAft>
+              <a:defRPr sz="1050">
+                <a:solidFill>
+                  <a:srgbClr val="1F2937"/>
+                </a:solidFill>
+                <a:latin typeface="Calibri"/>
+              </a:defRPr>
+            </a:pPr>
+            <a:r>
+              <a:t>Étapes Clés de Développement :</a:t>
+            </a:r>
+            <a:br/>
+            <a:r>
+              <a:t>Configuration des endpoints, gestion du routage des messages entrants, normalisation des payloads.</a:t>
             </a:r>
           </a:p>
         </p:txBody>
@@ -10002,7 +9821,7 @@
 </file>
 
 <file path=ppt/slides/slide5.xml><?xml version="1.0" encoding="utf-8"?>
-<p:sld xmlns:a="http://schemas.openxmlformats.org/drawingml/2006/main" xmlns:p="http://schemas.openxmlformats.org/presentationml/2006/main" xmlns:r="http://schemas.openxmlformats.org/officeDocument/2006/relationships">
+<p:sld xmlns:a="http://schemas.openxmlformats.org/drawingml/2006/main" xmlns:r="http://schemas.openxmlformats.org/officeDocument/2006/relationships" xmlns:p="http://schemas.openxmlformats.org/presentationml/2006/main">
   <p:cSld>
     <p:spTree>
       <p:nvGrpSpPr>
@@ -10010,7 +9829,14 @@
         <p:cNvGrpSpPr/>
         <p:nvPr/>
       </p:nvGrpSpPr>
-      <p:grpSpPr/>
+      <p:grpSpPr>
+        <a:xfrm>
+          <a:off x="0" y="0"/>
+          <a:ext cx="0" cy="0"/>
+          <a:chOff x="0" y="0"/>
+          <a:chExt cx="0" cy="0"/>
+        </a:xfrm>
+      </p:grpSpPr>
       <p:sp>
         <p:nvSpPr>
           <p:cNvPr id="2" name="Rectangle 1"/>
@@ -10051,6 +9877,7 @@
           <a:lstStyle/>
           <a:p>
             <a:pPr algn="ctr"/>
+            <a:endParaRPr/>
           </a:p>
         </p:txBody>
       </p:sp>
@@ -10071,7 +9898,7 @@
           <a:noFill/>
         </p:spPr>
         <p:txBody>
-          <a:bodyPr wrap="square" lIns="0" tIns="0" bIns="0" rIns="0">
+          <a:bodyPr wrap="square" lIns="0" tIns="0" rIns="0" bIns="0">
             <a:spAutoFit/>
           </a:bodyPr>
           <a:lstStyle/>
@@ -10107,7 +9934,7 @@
           <a:noFill/>
         </p:spPr>
         <p:txBody>
-          <a:bodyPr wrap="square" lIns="0" tIns="0" bIns="0" rIns="0">
+          <a:bodyPr wrap="square" lIns="0" tIns="0" rIns="0" bIns="0">
             <a:spAutoFit/>
           </a:bodyPr>
           <a:lstStyle/>
@@ -10121,7 +9948,7 @@
               </a:defRPr>
             </a:pPr>
             <a:r>
-              <a:t>4.1 Capacité : Acquisition Omnicanale</a:t>
+              <a:t>4.2 Capacité : Digital Sales Assistant</a:t>
             </a:r>
           </a:p>
         </p:txBody>
@@ -10166,6 +9993,7 @@
           <a:lstStyle/>
           <a:p>
             <a:pPr algn="ctr"/>
+            <a:endParaRPr/>
           </a:p>
         </p:txBody>
       </p:sp>
@@ -10186,7 +10014,7 @@
           <a:noFill/>
         </p:spPr>
         <p:txBody>
-          <a:bodyPr wrap="none" lIns="0" tIns="0" bIns="0" rIns="0">
+          <a:bodyPr wrap="none" lIns="0" tIns="0" rIns="0" bIns="0">
             <a:spAutoFit/>
           </a:bodyPr>
           <a:lstStyle/>
@@ -10200,7 +10028,7 @@
               </a:defRPr>
             </a:pPr>
             <a:r>
-              <a:t>Ekinox Consulting  |  Proposition de Transformation  |  Confidentialité SanlamAllianz  |  Slide 5</a:t>
+              <a:t>Ekinox Consulting  |  Proposition de Transformation  |  Confidentialité SanlamAllianz  |  Slide 6</a:t>
             </a:r>
           </a:p>
         </p:txBody>
@@ -10247,6 +10075,7 @@
           <a:lstStyle/>
           <a:p>
             <a:pPr algn="ctr"/>
+            <a:endParaRPr/>
           </a:p>
         </p:txBody>
       </p:sp>
@@ -10290,6 +10119,7 @@
           <a:lstStyle/>
           <a:p>
             <a:pPr algn="ctr"/>
+            <a:endParaRPr/>
           </a:p>
         </p:txBody>
       </p:sp>
@@ -10350,7 +10180,7 @@
             </a:r>
             <a:br/>
             <a:r>
-              <a:t>Être présent là où se trouvent vos futurs clients, en fluidifiant le point d'entrée.</a:t>
+              <a:t>Un conseiller d'assurance digital, disponible 24/7 pour qualifier et guider le prospect.</a:t>
             </a:r>
           </a:p>
           <a:p>
@@ -10373,7 +10203,7 @@
             </a:r>
             <a:br/>
             <a:r>
-              <a:t>Capte les prospects sur leurs canaux favoris (réseaux sociaux, messagerie, web) avec une expérience unifiée.</a:t>
+              <a:t>Automatise la découverte des besoins du client par une conversation naturelle et empathique.</a:t>
             </a:r>
           </a:p>
           <a:p>
@@ -10396,7 +10226,7 @@
             </a:r>
             <a:br/>
             <a:r>
-              <a:t>Un prospect scanne un QR code sur une affiche publicitaire et démarre instantanément une conversation WhatsApp avec SanlamAllianz.</a:t>
+              <a:t>Le prospect exprime son besoin d'assurance automobile, l'assistant pose 3 questions clés pour cerner le profil de conducteur.</a:t>
             </a:r>
           </a:p>
           <a:p>
@@ -10419,7 +10249,7 @@
             </a:r>
             <a:br/>
             <a:r>
-              <a:t>Réduction drastique de la friction à l'entrée et augmentation du volume de leads qualifiés.</a:t>
+              <a:t>Une expérience d'avant-vente personnalisée, sans temps d'attente.</a:t>
             </a:r>
           </a:p>
         </p:txBody>
@@ -10466,6 +10296,7 @@
           <a:lstStyle/>
           <a:p>
             <a:pPr algn="ctr"/>
+            <a:endParaRPr/>
           </a:p>
         </p:txBody>
       </p:sp>
@@ -10509,6 +10340,7 @@
           <a:lstStyle/>
           <a:p>
             <a:pPr algn="ctr"/>
+            <a:endParaRPr/>
           </a:p>
         </p:txBody>
       </p:sp>
@@ -10569,7 +10401,7 @@
             </a:r>
             <a:br/>
             <a:r>
-              <a:t>URL des campagnes, configurations des canaux sociaux.</a:t>
+              <a:t>Arbres de décision métier, scripts de conversation, ton de voix de la marque.</a:t>
             </a:r>
           </a:p>
           <a:p>
@@ -10592,7 +10424,7 @@
             </a:r>
             <a:br/>
             <a:r>
-              <a:t>Connecteurs Webhooks, API Graph Meta, API WhatsApp Business.</a:t>
+              <a:t>Moteur NLP, gestionnaire d'état de dialogue.</a:t>
             </a:r>
           </a:p>
           <a:p>
@@ -10615,7 +10447,7 @@
             </a:r>
             <a:br/>
             <a:r>
-              <a:t>Gateway omnicanale.</a:t>
+              <a:t>Endpoint de NLP as a Service, API de contexte conversationnel.</a:t>
             </a:r>
           </a:p>
           <a:p>
@@ -10638,7 +10470,7 @@
             </a:r>
             <a:br/>
             <a:r>
-              <a:t>Configuration des endpoints, gestion du routage des messages entrants, normalisation des payloads.</a:t>
+              <a:t>Entraînement sur les intentions, définition des entités à extraire, paramétrage des fallbacks.</a:t>
             </a:r>
           </a:p>
         </p:txBody>
@@ -10652,7 +10484,7 @@
 </file>
 
 <file path=ppt/slides/slide6.xml><?xml version="1.0" encoding="utf-8"?>
-<p:sld xmlns:a="http://schemas.openxmlformats.org/drawingml/2006/main" xmlns:p="http://schemas.openxmlformats.org/presentationml/2006/main" xmlns:r="http://schemas.openxmlformats.org/officeDocument/2006/relationships">
+<p:sld xmlns:a="http://schemas.openxmlformats.org/drawingml/2006/main" xmlns:r="http://schemas.openxmlformats.org/officeDocument/2006/relationships" xmlns:p="http://schemas.openxmlformats.org/presentationml/2006/main">
   <p:cSld>
     <p:spTree>
       <p:nvGrpSpPr>
@@ -10660,7 +10492,14 @@
         <p:cNvGrpSpPr/>
         <p:nvPr/>
       </p:nvGrpSpPr>
-      <p:grpSpPr/>
+      <p:grpSpPr>
+        <a:xfrm>
+          <a:off x="0" y="0"/>
+          <a:ext cx="0" cy="0"/>
+          <a:chOff x="0" y="0"/>
+          <a:chExt cx="0" cy="0"/>
+        </a:xfrm>
+      </p:grpSpPr>
       <p:sp>
         <p:nvSpPr>
           <p:cNvPr id="2" name="Rectangle 1"/>
@@ -10701,6 +10540,7 @@
           <a:lstStyle/>
           <a:p>
             <a:pPr algn="ctr"/>
+            <a:endParaRPr/>
           </a:p>
         </p:txBody>
       </p:sp>
@@ -10721,7 +10561,7 @@
           <a:noFill/>
         </p:spPr>
         <p:txBody>
-          <a:bodyPr wrap="square" lIns="0" tIns="0" bIns="0" rIns="0">
+          <a:bodyPr wrap="square" lIns="0" tIns="0" rIns="0" bIns="0">
             <a:spAutoFit/>
           </a:bodyPr>
           <a:lstStyle/>
@@ -10757,7 +10597,7 @@
           <a:noFill/>
         </p:spPr>
         <p:txBody>
-          <a:bodyPr wrap="square" lIns="0" tIns="0" bIns="0" rIns="0">
+          <a:bodyPr wrap="square" lIns="0" tIns="0" rIns="0" bIns="0">
             <a:spAutoFit/>
           </a:bodyPr>
           <a:lstStyle/>
@@ -10771,7 +10611,7 @@
               </a:defRPr>
             </a:pPr>
             <a:r>
-              <a:t>4.2 Capacité : Digital Sales Assistant</a:t>
+              <a:t>4.3 Capacité : Product Advisor</a:t>
             </a:r>
           </a:p>
         </p:txBody>
@@ -10816,6 +10656,7 @@
           <a:lstStyle/>
           <a:p>
             <a:pPr algn="ctr"/>
+            <a:endParaRPr/>
           </a:p>
         </p:txBody>
       </p:sp>
@@ -10836,7 +10677,7 @@
           <a:noFill/>
         </p:spPr>
         <p:txBody>
-          <a:bodyPr wrap="none" lIns="0" tIns="0" bIns="0" rIns="0">
+          <a:bodyPr wrap="none" lIns="0" tIns="0" rIns="0" bIns="0">
             <a:spAutoFit/>
           </a:bodyPr>
           <a:lstStyle/>
@@ -10850,7 +10691,7 @@
               </a:defRPr>
             </a:pPr>
             <a:r>
-              <a:t>Ekinox Consulting  |  Proposition de Transformation  |  Confidentialité SanlamAllianz  |  Slide 6</a:t>
+              <a:t>Ekinox Consulting  |  Proposition de Transformation  |  Confidentialité SanlamAllianz  |  Slide 7</a:t>
             </a:r>
           </a:p>
         </p:txBody>
@@ -10897,6 +10738,7 @@
           <a:lstStyle/>
           <a:p>
             <a:pPr algn="ctr"/>
+            <a:endParaRPr/>
           </a:p>
         </p:txBody>
       </p:sp>
@@ -10940,6 +10782,7 @@
           <a:lstStyle/>
           <a:p>
             <a:pPr algn="ctr"/>
+            <a:endParaRPr/>
           </a:p>
         </p:txBody>
       </p:sp>
@@ -11000,7 +10843,7 @@
             </a:r>
             <a:br/>
             <a:r>
-              <a:t>Un conseiller d'assurance digital, disponible 24/7 pour qualifier et guider le prospect.</a:t>
+              <a:t>La bonne offre, pour le bon profil, au bon moment.</a:t>
             </a:r>
           </a:p>
           <a:p>
@@ -11023,7 +10866,7 @@
             </a:r>
             <a:br/>
             <a:r>
-              <a:t>Automatise la découverte des besoins du client par une conversation naturelle et empathique.</a:t>
+              <a:t>Recommande dynamiquement les produits d'assurance les plus pertinents basés sur le contexte du client.</a:t>
             </a:r>
           </a:p>
           <a:p>
@@ -11046,7 +10889,7 @@
             </a:r>
             <a:br/>
             <a:r>
-              <a:t>Le prospect exprime son besoin d'assurance automobile, l'assistant pose 3 questions clés pour cerner le profil de conducteur.</a:t>
+              <a:t>L'assistant suggère une offre Tous Risques avec option bris de glace suite à l'analyse des réponses du prospect.</a:t>
             </a:r>
           </a:p>
           <a:p>
@@ -11069,7 +10912,7 @@
             </a:r>
             <a:br/>
             <a:r>
-              <a:t>Une expérience d'avant-vente personnalisée, sans temps d'attente.</a:t>
+              <a:t>Augmentation de la pertinence de l'offre et du taux de conversion, sentiment d'être compris.</a:t>
             </a:r>
           </a:p>
         </p:txBody>
@@ -11116,6 +10959,7 @@
           <a:lstStyle/>
           <a:p>
             <a:pPr algn="ctr"/>
+            <a:endParaRPr/>
           </a:p>
         </p:txBody>
       </p:sp>
@@ -11159,6 +11003,7 @@
           <a:lstStyle/>
           <a:p>
             <a:pPr algn="ctr"/>
+            <a:endParaRPr/>
           </a:p>
         </p:txBody>
       </p:sp>
@@ -11219,7 +11064,7 @@
             </a:r>
             <a:br/>
             <a:r>
-              <a:t>Arbres de décision métier, scripts de conversation, ton de voix de la marque.</a:t>
+              <a:t>Catalogue produits simplifié, règles de recommandation métier, grilles tarifaires indicatives.</a:t>
             </a:r>
           </a:p>
           <a:p>
@@ -11242,7 +11087,7 @@
             </a:r>
             <a:br/>
             <a:r>
-              <a:t>Moteur NLP, gestionnaire d'état de dialogue.</a:t>
+              <a:t>Moteur de règles métier léger, moteur d'inférence statique.</a:t>
             </a:r>
           </a:p>
           <a:p>
@@ -11265,7 +11110,7 @@
             </a:r>
             <a:br/>
             <a:r>
-              <a:t>Endpoint de NLP as a Service, API de contexte conversationnel.</a:t>
+              <a:t>API de recommandation produit (mockup interne pour le MVP).</a:t>
             </a:r>
           </a:p>
           <a:p>
@@ -11288,7 +11133,7 @@
             </a:r>
             <a:br/>
             <a:r>
-              <a:t>Entraînement sur les intentions, définition des entités à extraire, paramétrage des fallbacks.</a:t>
+              <a:t>Digitalisation du catalogue produit (format JSON/NoSQL), implémentation de l'algorithme de matching produit/besoin.</a:t>
             </a:r>
           </a:p>
         </p:txBody>
@@ -11302,7 +11147,7 @@
 </file>
 
 <file path=ppt/slides/slide7.xml><?xml version="1.0" encoding="utf-8"?>
-<p:sld xmlns:a="http://schemas.openxmlformats.org/drawingml/2006/main" xmlns:p="http://schemas.openxmlformats.org/presentationml/2006/main" xmlns:r="http://schemas.openxmlformats.org/officeDocument/2006/relationships">
+<p:sld xmlns:a="http://schemas.openxmlformats.org/drawingml/2006/main" xmlns:r="http://schemas.openxmlformats.org/officeDocument/2006/relationships" xmlns:p="http://schemas.openxmlformats.org/presentationml/2006/main">
   <p:cSld>
     <p:spTree>
       <p:nvGrpSpPr>
@@ -11310,7 +11155,14 @@
         <p:cNvGrpSpPr/>
         <p:nvPr/>
       </p:nvGrpSpPr>
-      <p:grpSpPr/>
+      <p:grpSpPr>
+        <a:xfrm>
+          <a:off x="0" y="0"/>
+          <a:ext cx="0" cy="0"/>
+          <a:chOff x="0" y="0"/>
+          <a:chExt cx="0" cy="0"/>
+        </a:xfrm>
+      </p:grpSpPr>
       <p:sp>
         <p:nvSpPr>
           <p:cNvPr id="2" name="Rectangle 1"/>
@@ -11351,6 +11203,7 @@
           <a:lstStyle/>
           <a:p>
             <a:pPr algn="ctr"/>
+            <a:endParaRPr/>
           </a:p>
         </p:txBody>
       </p:sp>
@@ -11371,7 +11224,7 @@
           <a:noFill/>
         </p:spPr>
         <p:txBody>
-          <a:bodyPr wrap="square" lIns="0" tIns="0" bIns="0" rIns="0">
+          <a:bodyPr wrap="square" lIns="0" tIns="0" rIns="0" bIns="0">
             <a:spAutoFit/>
           </a:bodyPr>
           <a:lstStyle/>
@@ -11407,7 +11260,7 @@
           <a:noFill/>
         </p:spPr>
         <p:txBody>
-          <a:bodyPr wrap="square" lIns="0" tIns="0" bIns="0" rIns="0">
+          <a:bodyPr wrap="square" lIns="0" tIns="0" rIns="0" bIns="0">
             <a:spAutoFit/>
           </a:bodyPr>
           <a:lstStyle/>
@@ -11421,7 +11274,7 @@
               </a:defRPr>
             </a:pPr>
             <a:r>
-              <a:t>4.3 Capacité : Product Advisor</a:t>
+              <a:t>4.4 Capacité : Knowledge Hub Assurance</a:t>
             </a:r>
           </a:p>
         </p:txBody>
@@ -11466,6 +11319,7 @@
           <a:lstStyle/>
           <a:p>
             <a:pPr algn="ctr"/>
+            <a:endParaRPr/>
           </a:p>
         </p:txBody>
       </p:sp>
@@ -11486,7 +11340,7 @@
           <a:noFill/>
         </p:spPr>
         <p:txBody>
-          <a:bodyPr wrap="none" lIns="0" tIns="0" bIns="0" rIns="0">
+          <a:bodyPr wrap="none" lIns="0" tIns="0" rIns="0" bIns="0">
             <a:spAutoFit/>
           </a:bodyPr>
           <a:lstStyle/>
@@ -11500,7 +11354,7 @@
               </a:defRPr>
             </a:pPr>
             <a:r>
-              <a:t>Ekinox Consulting  |  Proposition de Transformation  |  Confidentialité SanlamAllianz  |  Slide 7</a:t>
+              <a:t>Ekinox Consulting  |  Proposition de Transformation  |  Confidentialité SanlamAllianz  |  Slide 8</a:t>
             </a:r>
           </a:p>
         </p:txBody>
@@ -11547,6 +11401,7 @@
           <a:lstStyle/>
           <a:p>
             <a:pPr algn="ctr"/>
+            <a:endParaRPr/>
           </a:p>
         </p:txBody>
       </p:sp>
@@ -11590,6 +11445,7 @@
           <a:lstStyle/>
           <a:p>
             <a:pPr algn="ctr"/>
+            <a:endParaRPr/>
           </a:p>
         </p:txBody>
       </p:sp>
@@ -11650,7 +11506,7 @@
             </a:r>
             <a:br/>
             <a:r>
-              <a:t>La bonne offre, pour le bon profil, au bon moment.</a:t>
+              <a:t>L'expertise métier SanlamAllianz infusée dans chaque interaction.</a:t>
             </a:r>
           </a:p>
           <a:p>
@@ -11673,7 +11529,7 @@
             </a:r>
             <a:br/>
             <a:r>
-              <a:t>Recommande dynamiquement les produits d'assurance les plus pertinents basés sur le contexte du client.</a:t>
+              <a:t>Répond instantanément à toute question technique sur les garanties, exclusions et conditions.</a:t>
             </a:r>
           </a:p>
           <a:p>
@@ -11696,7 +11552,7 @@
             </a:r>
             <a:br/>
             <a:r>
-              <a:t>L'assistant suggère une offre Tous Risques avec option bris de glace suite à l'analyse des réponses du prospect.</a:t>
+              <a:t>Le prospect demande si les dommages causés par la grêle sont couverts ; l'assistant répond avec précision en citant les conditions générales.</a:t>
             </a:r>
           </a:p>
           <a:p>
@@ -11719,7 +11575,7 @@
             </a:r>
             <a:br/>
             <a:r>
-              <a:t>Augmentation de la pertinence de l'offre et du taux de conversion, sentiment d'être compris.</a:t>
+              <a:t>Réassurance immédiate du client face à la complexité des contrats d'assurance.</a:t>
             </a:r>
           </a:p>
         </p:txBody>
@@ -11766,6 +11622,7 @@
           <a:lstStyle/>
           <a:p>
             <a:pPr algn="ctr"/>
+            <a:endParaRPr/>
           </a:p>
         </p:txBody>
       </p:sp>
@@ -11809,6 +11666,7 @@
           <a:lstStyle/>
           <a:p>
             <a:pPr algn="ctr"/>
+            <a:endParaRPr/>
           </a:p>
         </p:txBody>
       </p:sp>
@@ -11869,7 +11727,7 @@
             </a:r>
             <a:br/>
             <a:r>
-              <a:t>Catalogue produits simplifié, règles de recommandation métier, grilles tarifaires indicatives.</a:t>
+              <a:t>Fichiers PDF des conditions générales, conditions particulières, FAQ, manuels produits.</a:t>
             </a:r>
           </a:p>
           <a:p>
@@ -11892,7 +11750,7 @@
             </a:r>
             <a:br/>
             <a:r>
-              <a:t>Moteur de règles métier léger, moteur d'inférence statique.</a:t>
+              <a:t>Moteur d'ingestion documentaire, indexation sémantique, base vectorielle (usage interne).</a:t>
             </a:r>
           </a:p>
           <a:p>
@@ -11915,7 +11773,7 @@
             </a:r>
             <a:br/>
             <a:r>
-              <a:t>API de recommandation produit (mockup interne pour le MVP).</a:t>
+              <a:t>API de recherche documentaire interne.</a:t>
             </a:r>
           </a:p>
           <a:p>
@@ -11938,7 +11796,7 @@
             </a:r>
             <a:br/>
             <a:r>
-              <a:t>Digitalisation du catalogue produit (format JSON/NoSQL), implémentation de l'algorithme de matching produit/besoin.</a:t>
+              <a:t>Parsing des PDF, nettoyage du texte, création des index de recherche, évaluation de la précision des réponses.</a:t>
             </a:r>
           </a:p>
         </p:txBody>
@@ -11952,7 +11810,7 @@
 </file>
 
 <file path=ppt/slides/slide8.xml><?xml version="1.0" encoding="utf-8"?>
-<p:sld xmlns:a="http://schemas.openxmlformats.org/drawingml/2006/main" xmlns:p="http://schemas.openxmlformats.org/presentationml/2006/main" xmlns:r="http://schemas.openxmlformats.org/officeDocument/2006/relationships">
+<p:sld xmlns:a="http://schemas.openxmlformats.org/drawingml/2006/main" xmlns:r="http://schemas.openxmlformats.org/officeDocument/2006/relationships" xmlns:p="http://schemas.openxmlformats.org/presentationml/2006/main">
   <p:cSld>
     <p:spTree>
       <p:nvGrpSpPr>
@@ -11960,7 +11818,14 @@
         <p:cNvGrpSpPr/>
         <p:nvPr/>
       </p:nvGrpSpPr>
-      <p:grpSpPr/>
+      <p:grpSpPr>
+        <a:xfrm>
+          <a:off x="0" y="0"/>
+          <a:ext cx="0" cy="0"/>
+          <a:chOff x="0" y="0"/>
+          <a:chExt cx="0" cy="0"/>
+        </a:xfrm>
+      </p:grpSpPr>
       <p:sp>
         <p:nvSpPr>
           <p:cNvPr id="2" name="Rectangle 1"/>
@@ -12001,6 +11866,7 @@
           <a:lstStyle/>
           <a:p>
             <a:pPr algn="ctr"/>
+            <a:endParaRPr/>
           </a:p>
         </p:txBody>
       </p:sp>
@@ -12021,7 +11887,7 @@
           <a:noFill/>
         </p:spPr>
         <p:txBody>
-          <a:bodyPr wrap="square" lIns="0" tIns="0" bIns="0" rIns="0">
+          <a:bodyPr wrap="square" lIns="0" tIns="0" rIns="0" bIns="0">
             <a:spAutoFit/>
           </a:bodyPr>
           <a:lstStyle/>
@@ -12057,7 +11923,7 @@
           <a:noFill/>
         </p:spPr>
         <p:txBody>
-          <a:bodyPr wrap="square" lIns="0" tIns="0" bIns="0" rIns="0">
+          <a:bodyPr wrap="square" lIns="0" tIns="0" rIns="0" bIns="0">
             <a:spAutoFit/>
           </a:bodyPr>
           <a:lstStyle/>
@@ -12071,7 +11937,7 @@
               </a:defRPr>
             </a:pPr>
             <a:r>
-              <a:t>4.4 Capacité : Knowledge Hub Assurance</a:t>
+              <a:t>4.5 Capacité : Préparation du dossier de souscription</a:t>
             </a:r>
           </a:p>
         </p:txBody>
@@ -12116,6 +11982,7 @@
           <a:lstStyle/>
           <a:p>
             <a:pPr algn="ctr"/>
+            <a:endParaRPr/>
           </a:p>
         </p:txBody>
       </p:sp>
@@ -12136,7 +12003,7 @@
           <a:noFill/>
         </p:spPr>
         <p:txBody>
-          <a:bodyPr wrap="none" lIns="0" tIns="0" bIns="0" rIns="0">
+          <a:bodyPr wrap="none" lIns="0" tIns="0" rIns="0" bIns="0">
             <a:spAutoFit/>
           </a:bodyPr>
           <a:lstStyle/>
@@ -12150,7 +12017,7 @@
               </a:defRPr>
             </a:pPr>
             <a:r>
-              <a:t>Ekinox Consulting  |  Proposition de Transformation  |  Confidentialité SanlamAllianz  |  Slide 8</a:t>
+              <a:t>Ekinox Consulting  |  Proposition de Transformation  |  Confidentialité SanlamAllianz  |  Slide 9</a:t>
             </a:r>
           </a:p>
         </p:txBody>
@@ -12197,6 +12064,7 @@
           <a:lstStyle/>
           <a:p>
             <a:pPr algn="ctr"/>
+            <a:endParaRPr/>
           </a:p>
         </p:txBody>
       </p:sp>
@@ -12240,6 +12108,7 @@
           <a:lstStyle/>
           <a:p>
             <a:pPr algn="ctr"/>
+            <a:endParaRPr/>
           </a:p>
         </p:txBody>
       </p:sp>
@@ -12300,7 +12169,7 @@
             </a:r>
             <a:br/>
             <a:r>
-              <a:t>L'expertise métier SanlamAllianz infusée dans chaque interaction.</a:t>
+              <a:t>L'onboarding client rendu simple, rapide et sans effort.</a:t>
             </a:r>
           </a:p>
           <a:p>
@@ -12323,7 +12192,7 @@
             </a:r>
             <a:br/>
             <a:r>
-              <a:t>Répond instantanément à toute question technique sur les garanties, exclusions et conditions.</a:t>
+              <a:t>Collecte proactive et intelligente des données nécessaires à la création du contrat.</a:t>
             </a:r>
           </a:p>
           <a:p>
@@ -12346,7 +12215,7 @@
             </a:r>
             <a:br/>
             <a:r>
-              <a:t>Le prospect demande si les dommages causés par la grêle sont couverts ; l'assistant répond avec précision en citant les conditions générales.</a:t>
+              <a:t>L'assistant guide le client pas-à-pas pour fournir son nom, adresse et informations du véhicule.</a:t>
             </a:r>
           </a:p>
           <a:p>
@@ -12369,7 +12238,7 @@
             </a:r>
             <a:br/>
             <a:r>
-              <a:t>Réassurance immédiate du client face à la complexité des contrats d'assurance.</a:t>
+              <a:t>Réduction du taux d'abandon en phase de finalisation du devis.</a:t>
             </a:r>
           </a:p>
         </p:txBody>
@@ -12416,6 +12285,7 @@
           <a:lstStyle/>
           <a:p>
             <a:pPr algn="ctr"/>
+            <a:endParaRPr/>
           </a:p>
         </p:txBody>
       </p:sp>
@@ -12459,6 +12329,7 @@
           <a:lstStyle/>
           <a:p>
             <a:pPr algn="ctr"/>
+            <a:endParaRPr/>
           </a:p>
         </p:txBody>
       </p:sp>
@@ -12519,7 +12390,7 @@
             </a:r>
             <a:br/>
             <a:r>
-              <a:t>Fichiers PDF des conditions générales, conditions particulières, FAQ, manuels produits.</a:t>
+              <a:t>Dictionnaire de données client, liste des champs obligatoires par produit.</a:t>
             </a:r>
           </a:p>
           <a:p>
@@ -12542,7 +12413,7 @@
             </a:r>
             <a:br/>
             <a:r>
-              <a:t>Moteur d'ingestion documentaire, indexation sémantique, base vectorielle (usage interne).</a:t>
+              <a:t>Formulaires conversationnels, validateurs de données dynamiques.</a:t>
             </a:r>
           </a:p>
           <a:p>
@@ -12565,7 +12436,7 @@
             </a:r>
             <a:br/>
             <a:r>
-              <a:t>API de recherche documentaire interne.</a:t>
+              <a:t>API de soumission de données de pré-souscription.</a:t>
             </a:r>
           </a:p>
           <a:p>
@@ -12588,7 +12459,7 @@
             </a:r>
             <a:br/>
             <a:r>
-              <a:t>Parsing des PDF, nettoyage du texte, création des index de recherche, évaluation de la précision des réponses.</a:t>
+              <a:t>Définition des flux de collecte, implémentation des contrôles de saisie (email, téléphone, dates).</a:t>
             </a:r>
           </a:p>
         </p:txBody>
@@ -12602,7 +12473,7 @@
 </file>
 
 <file path=ppt/slides/slide9.xml><?xml version="1.0" encoding="utf-8"?>
-<p:sld xmlns:a="http://schemas.openxmlformats.org/drawingml/2006/main" xmlns:p="http://schemas.openxmlformats.org/presentationml/2006/main" xmlns:r="http://schemas.openxmlformats.org/officeDocument/2006/relationships">
+<p:sld xmlns:a="http://schemas.openxmlformats.org/drawingml/2006/main" xmlns:r="http://schemas.openxmlformats.org/officeDocument/2006/relationships" xmlns:p="http://schemas.openxmlformats.org/presentationml/2006/main">
   <p:cSld>
     <p:spTree>
       <p:nvGrpSpPr>
@@ -12610,7 +12481,14 @@
         <p:cNvGrpSpPr/>
         <p:nvPr/>
       </p:nvGrpSpPr>
-      <p:grpSpPr/>
+      <p:grpSpPr>
+        <a:xfrm>
+          <a:off x="0" y="0"/>
+          <a:ext cx="0" cy="0"/>
+          <a:chOff x="0" y="0"/>
+          <a:chExt cx="0" cy="0"/>
+        </a:xfrm>
+      </p:grpSpPr>
       <p:sp>
         <p:nvSpPr>
           <p:cNvPr id="2" name="Rectangle 1"/>
@@ -12651,6 +12529,7 @@
           <a:lstStyle/>
           <a:p>
             <a:pPr algn="ctr"/>
+            <a:endParaRPr/>
           </a:p>
         </p:txBody>
       </p:sp>
@@ -12671,7 +12550,7 @@
           <a:noFill/>
         </p:spPr>
         <p:txBody>
-          <a:bodyPr wrap="square" lIns="0" tIns="0" bIns="0" rIns="0">
+          <a:bodyPr wrap="square" lIns="0" tIns="0" rIns="0" bIns="0">
             <a:spAutoFit/>
           </a:bodyPr>
           <a:lstStyle/>
@@ -12707,7 +12586,7 @@
           <a:noFill/>
         </p:spPr>
         <p:txBody>
-          <a:bodyPr wrap="square" lIns="0" tIns="0" bIns="0" rIns="0">
+          <a:bodyPr wrap="square" lIns="0" tIns="0" rIns="0" bIns="0">
             <a:spAutoFit/>
           </a:bodyPr>
           <a:lstStyle/>
@@ -12721,7 +12600,7 @@
               </a:defRPr>
             </a:pPr>
             <a:r>
-              <a:t>4.5 Capacité : Préparation du dossier de souscription</a:t>
+              <a:t>4.6 Capacité : Gestion documentaire (upload des pièces)</a:t>
             </a:r>
           </a:p>
         </p:txBody>
@@ -12766,6 +12645,7 @@
           <a:lstStyle/>
           <a:p>
             <a:pPr algn="ctr"/>
+            <a:endParaRPr/>
           </a:p>
         </p:txBody>
       </p:sp>
@@ -12786,7 +12666,7 @@
           <a:noFill/>
         </p:spPr>
         <p:txBody>
-          <a:bodyPr wrap="none" lIns="0" tIns="0" bIns="0" rIns="0">
+          <a:bodyPr wrap="none" lIns="0" tIns="0" rIns="0" bIns="0">
             <a:spAutoFit/>
           </a:bodyPr>
           <a:lstStyle/>
@@ -12800,7 +12680,7 @@
               </a:defRPr>
             </a:pPr>
             <a:r>
-              <a:t>Ekinox Consulting  |  Proposition de Transformation  |  Confidentialité SanlamAllianz  |  Slide 9</a:t>
+              <a:t>Ekinox Consulting  |  Proposition de Transformation  |  Confidentialité SanlamAllianz  |  Slide 10</a:t>
             </a:r>
           </a:p>
         </p:txBody>
@@ -12847,6 +12727,7 @@
           <a:lstStyle/>
           <a:p>
             <a:pPr algn="ctr"/>
+            <a:endParaRPr/>
           </a:p>
         </p:txBody>
       </p:sp>
@@ -12890,6 +12771,7 @@
           <a:lstStyle/>
           <a:p>
             <a:pPr algn="ctr"/>
+            <a:endParaRPr/>
           </a:p>
         </p:txBody>
       </p:sp>
@@ -12950,7 +12832,7 @@
             </a:r>
             <a:br/>
             <a:r>
-              <a:t>L'onboarding client rendu simple, rapide et sans effort.</a:t>
+              <a:t>La fin des allers-retours administratifs fastidieux.</a:t>
             </a:r>
           </a:p>
           <a:p>
@@ -12973,7 +12855,7 @@
             </a:r>
             <a:br/>
             <a:r>
-              <a:t>Collecte proactive et intelligente des données nécessaires à la création du contrat.</a:t>
+              <a:t>Permet au client de transmettre ses justificatifs directement dans le fil de la conversation.</a:t>
             </a:r>
           </a:p>
           <a:p>
@@ -12996,7 +12878,7 @@
             </a:r>
             <a:br/>
             <a:r>
-              <a:t>L'assistant guide le client pas-à-pas pour fournir son nom, adresse et informations du véhicule.</a:t>
+              <a:t>Le client prend en photo sa carte grise et son permis de conduire avec son smartphone et l'envoie via WhatsApp.</a:t>
             </a:r>
           </a:p>
           <a:p>
@@ -13019,7 +12901,7 @@
             </a:r>
             <a:br/>
             <a:r>
-              <a:t>Réduction du taux d'abandon en phase de finalisation du devis.</a:t>
+              <a:t>Un parcours 100% digitalisé, gain de temps considérable pour finaliser le contrat.</a:t>
             </a:r>
           </a:p>
         </p:txBody>
@@ -13066,6 +12948,7 @@
           <a:lstStyle/>
           <a:p>
             <a:pPr algn="ctr"/>
+            <a:endParaRPr/>
           </a:p>
         </p:txBody>
       </p:sp>
@@ -13109,6 +12992,7 @@
           <a:lstStyle/>
           <a:p>
             <a:pPr algn="ctr"/>
+            <a:endParaRPr/>
           </a:p>
         </p:txBody>
       </p:sp>
@@ -13169,7 +13053,7 @@
             </a:r>
             <a:br/>
             <a:r>
-              <a:t>Dictionnaire de données client, liste des champs obligatoires par produit.</a:t>
+              <a:t>Liste des documents requis, règles de validation de format (PDF, JPG, PNG).</a:t>
             </a:r>
           </a:p>
           <a:p>
@@ -13192,7 +13076,7 @@
             </a:r>
             <a:br/>
             <a:r>
-              <a:t>Formulaires conversationnels, validateurs de données dynamiques.</a:t>
+              <a:t>Service de stockage cloud sécurisé, analyseur de pièces jointes.</a:t>
             </a:r>
           </a:p>
           <a:p>
@@ -13215,7 +13099,7 @@
             </a:r>
             <a:br/>
             <a:r>
-              <a:t>API de soumission de données de pré-souscription.</a:t>
+              <a:t>API d'upload de documents, API de webhook média.</a:t>
             </a:r>
           </a:p>
           <a:p>
@@ -13238,7 +13122,7 @@
             </a:r>
             <a:br/>
             <a:r>
-              <a:t>Définition des flux de collecte, implémentation des contrôles de saisie (email, téléphone, dates).</a:t>
+              <a:t>Intégration du flux média des canaux sociaux, sécurisation du stockage transitoire, association des pièces au dossier prospect.</a:t>
             </a:r>
           </a:p>
         </p:txBody>
